--- a/output/wordlabs-ic-suffix-3day.pptx
+++ b/output/wordlabs-ic-suffix-3day.pptx
@@ -6057,7 +6057,7 @@
                 <a:ea typeface="Calibri" pitchFamily="34" charset="-122"/>
                 <a:cs typeface="Calibri" pitchFamily="34" charset="-120"/>
               </a:rPr>
-              <a:t>volcanic</a:t>
+              <a:t>magnetic</a:t>
             </a:r>
             <a:pPr algn="l" indent="0" marL="0">
               <a:buNone/>
@@ -6071,7 +6071,7 @@
                 <a:ea typeface="Calibri" pitchFamily="34" charset="-122"/>
                 <a:cs typeface="Calibri" pitchFamily="34" charset="-120"/>
               </a:rPr>
-              <a:t> eruption created an </a:t>
+              <a:t> rocks near the </a:t>
             </a:r>
             <a:pPr algn="l" indent="0" marL="0">
               <a:buNone/>
@@ -6088,7 +6088,7 @@
                 <a:ea typeface="Calibri" pitchFamily="34" charset="-122"/>
                 <a:cs typeface="Calibri" pitchFamily="34" charset="-120"/>
               </a:rPr>
-              <a:t>electric</a:t>
+              <a:t>cosmic</a:t>
             </a:r>
             <a:pPr algn="l" indent="0" marL="0">
               <a:buNone/>
@@ -6102,7 +6102,7 @@
                 <a:ea typeface="Calibri" pitchFamily="34" charset="-122"/>
                 <a:cs typeface="Calibri" pitchFamily="34" charset="-120"/>
               </a:rPr>
-              <a:t> atmosphere among the students watching the documentary.</a:t>
+              <a:t> dust amazed every student on the excursion.</a:t>
             </a:r>
             <a:endParaRPr lang="en-US" sz="1800" dirty="0"/>
           </a:p>
@@ -6257,7 +6257,7 @@
                 <a:ea typeface="Trebuchet MS" pitchFamily="34" charset="-122"/>
                 <a:cs typeface="Trebuchet MS" pitchFamily="34" charset="-120"/>
               </a:rPr>
-              <a:t>volcanic</a:t>
+              <a:t>magnetic</a:t>
             </a:r>
             <a:endParaRPr lang="en-US" sz="1400" dirty="0"/>
           </a:p>
@@ -6385,7 +6385,7 @@
                 <a:ea typeface="Trebuchet MS" pitchFamily="34" charset="-122"/>
                 <a:cs typeface="Trebuchet MS" pitchFamily="34" charset="-120"/>
               </a:rPr>
-              <a:t>electric</a:t>
+              <a:t>cosmic</a:t>
             </a:r>
             <a:endParaRPr lang="en-US" sz="1400" dirty="0"/>
           </a:p>
@@ -6855,7 +6855,7 @@
                 <a:ea typeface="Trebuchet MS" pitchFamily="34" charset="-122"/>
                 <a:cs typeface="Trebuchet MS" pitchFamily="34" charset="-120"/>
               </a:rPr>
-              <a:t>volcanic</a:t>
+              <a:t>magnetic</a:t>
             </a:r>
             <a:endParaRPr lang="en-US" sz="2800" dirty="0"/>
           </a:p>
@@ -7682,7 +7682,7 @@
                 <a:ea typeface="Trebuchet MS" pitchFamily="34" charset="-122"/>
                 <a:cs typeface="Trebuchet MS" pitchFamily="34" charset="-120"/>
               </a:rPr>
-              <a:t>volcanic</a:t>
+              <a:t>magnetic</a:t>
             </a:r>
             <a:endParaRPr lang="en-US" sz="2800" dirty="0"/>
           </a:p>
@@ -7821,7 +7821,7 @@
                 <a:ea typeface="Trebuchet MS" pitchFamily="34" charset="-122"/>
                 <a:cs typeface="Trebuchet MS" pitchFamily="34" charset="-120"/>
               </a:rPr>
-              <a:t>volcan</a:t>
+              <a:t>magnet</a:t>
             </a:r>
             <a:endParaRPr lang="en-US" sz="1300" dirty="0"/>
           </a:p>
@@ -7860,7 +7860,7 @@
                 <a:ea typeface="Calibri" pitchFamily="34" charset="-122"/>
                 <a:cs typeface="Calibri" pitchFamily="34" charset="-120"/>
               </a:rPr>
-              <a:t>volcano</a:t>
+              <a:t>a force that attracts metal</a:t>
             </a:r>
             <a:endParaRPr lang="en-US" sz="850" dirty="0"/>
           </a:p>
@@ -7972,7 +7972,7 @@
                 <a:ea typeface="Calibri" pitchFamily="34" charset="-122"/>
                 <a:cs typeface="Calibri" pitchFamily="34" charset="-120"/>
               </a:rPr>
-              <a:t>relating to</a:t>
+              <a:t>relating to, having the nature of</a:t>
             </a:r>
             <a:endParaRPr lang="en-US" sz="850" dirty="0"/>
           </a:p>
@@ -8667,7 +8667,7 @@
                 <a:ea typeface="Trebuchet MS" pitchFamily="34" charset="-122"/>
                 <a:cs typeface="Trebuchet MS" pitchFamily="34" charset="-120"/>
               </a:rPr>
-              <a:t>volcanic</a:t>
+              <a:t>magnetic</a:t>
             </a:r>
             <a:endParaRPr lang="en-US" sz="2800" dirty="0"/>
           </a:p>
@@ -8806,7 +8806,7 @@
                 <a:ea typeface="Trebuchet MS" pitchFamily="34" charset="-122"/>
                 <a:cs typeface="Trebuchet MS" pitchFamily="34" charset="-120"/>
               </a:rPr>
-              <a:t>volcan</a:t>
+              <a:t>magnet</a:t>
             </a:r>
             <a:endParaRPr lang="en-US" sz="1300" dirty="0"/>
           </a:p>
@@ -8845,7 +8845,7 @@
                 <a:ea typeface="Calibri" pitchFamily="34" charset="-122"/>
                 <a:cs typeface="Calibri" pitchFamily="34" charset="-120"/>
               </a:rPr>
-              <a:t>volcano</a:t>
+              <a:t>a force that attracts metal</a:t>
             </a:r>
             <a:endParaRPr lang="en-US" sz="850" dirty="0"/>
           </a:p>
@@ -8957,7 +8957,7 @@
                 <a:ea typeface="Calibri" pitchFamily="34" charset="-122"/>
                 <a:cs typeface="Calibri" pitchFamily="34" charset="-120"/>
               </a:rPr>
-              <a:t>relating to</a:t>
+              <a:t>relating to, having the nature of</a:t>
             </a:r>
             <a:endParaRPr lang="en-US" sz="850" dirty="0"/>
           </a:p>
@@ -9116,7 +9116,7 @@
                 <a:ea typeface="Trebuchet MS" pitchFamily="34" charset="-122"/>
                 <a:cs typeface="Trebuchet MS" pitchFamily="34" charset="-120"/>
               </a:rPr>
-              <a:t>vol</a:t>
+              <a:t>mag</a:t>
             </a:r>
             <a:endParaRPr lang="en-US" sz="1400" dirty="0"/>
           </a:p>
@@ -9221,7 +9221,7 @@
                 <a:ea typeface="Trebuchet MS" pitchFamily="34" charset="-122"/>
                 <a:cs typeface="Trebuchet MS" pitchFamily="34" charset="-120"/>
               </a:rPr>
-              <a:t>can</a:t>
+              <a:t>net</a:t>
             </a:r>
             <a:endParaRPr lang="en-US" sz="1400" dirty="0"/>
           </a:p>
@@ -9889,7 +9889,7 @@
                 <a:ea typeface="Trebuchet MS" pitchFamily="34" charset="-122"/>
                 <a:cs typeface="Trebuchet MS" pitchFamily="34" charset="-120"/>
               </a:rPr>
-              <a:t>volcanic</a:t>
+              <a:t>magnetic</a:t>
             </a:r>
             <a:endParaRPr lang="en-US" sz="2800" dirty="0"/>
           </a:p>
@@ -10028,7 +10028,7 @@
                 <a:ea typeface="Trebuchet MS" pitchFamily="34" charset="-122"/>
                 <a:cs typeface="Trebuchet MS" pitchFamily="34" charset="-120"/>
               </a:rPr>
-              <a:t>volcan</a:t>
+              <a:t>magnet</a:t>
             </a:r>
             <a:endParaRPr lang="en-US" sz="1300" dirty="0"/>
           </a:p>
@@ -10067,7 +10067,7 @@
                 <a:ea typeface="Calibri" pitchFamily="34" charset="-122"/>
                 <a:cs typeface="Calibri" pitchFamily="34" charset="-120"/>
               </a:rPr>
-              <a:t>volcano</a:t>
+              <a:t>a force that attracts metal</a:t>
             </a:r>
             <a:endParaRPr lang="en-US" sz="850" dirty="0"/>
           </a:p>
@@ -10179,7 +10179,7 @@
                 <a:ea typeface="Calibri" pitchFamily="34" charset="-122"/>
                 <a:cs typeface="Calibri" pitchFamily="34" charset="-120"/>
               </a:rPr>
-              <a:t>relating to</a:t>
+              <a:t>relating to, having the nature of</a:t>
             </a:r>
             <a:endParaRPr lang="en-US" sz="850" dirty="0"/>
           </a:p>
@@ -10338,7 +10338,7 @@
                 <a:ea typeface="Trebuchet MS" pitchFamily="34" charset="-122"/>
                 <a:cs typeface="Trebuchet MS" pitchFamily="34" charset="-120"/>
               </a:rPr>
-              <a:t>vol</a:t>
+              <a:t>mag</a:t>
             </a:r>
             <a:endParaRPr lang="en-US" sz="1400" dirty="0"/>
           </a:p>
@@ -10443,7 +10443,7 @@
                 <a:ea typeface="Trebuchet MS" pitchFamily="34" charset="-122"/>
                 <a:cs typeface="Trebuchet MS" pitchFamily="34" charset="-120"/>
               </a:rPr>
-              <a:t>can</a:t>
+              <a:t>net</a:t>
             </a:r>
             <a:endParaRPr lang="en-US" sz="1400" dirty="0"/>
           </a:p>
@@ -10655,7 +10655,7 @@
         </p:nvSpPr>
         <p:spPr>
           <a:xfrm>
-            <a:off x="2124837" y="4169664"/>
+            <a:off x="2023872" y="4169664"/>
             <a:ext cx="685800" cy="384048"/>
           </a:xfrm>
           <a:prstGeom prst="rect">
@@ -10682,7 +10682,7 @@
         </p:nvSpPr>
         <p:spPr>
           <a:xfrm>
-            <a:off x="2124837" y="4169664"/>
+            <a:off x="2023872" y="4169664"/>
             <a:ext cx="685800" cy="384048"/>
           </a:xfrm>
           <a:prstGeom prst="rect">
@@ -10707,7 +10707,7 @@
                 <a:ea typeface="Trebuchet MS" pitchFamily="34" charset="-122"/>
                 <a:cs typeface="Trebuchet MS" pitchFamily="34" charset="-120"/>
               </a:rPr>
-              <a:t>v</a:t>
+              <a:t>m</a:t>
             </a:r>
             <a:endParaRPr lang="en-US" sz="900" dirty="0"/>
           </a:p>
@@ -10721,7 +10721,7 @@
         </p:nvSpPr>
         <p:spPr>
           <a:xfrm>
-            <a:off x="3033522" y="4169664"/>
+            <a:off x="2831592" y="4169664"/>
             <a:ext cx="685800" cy="384048"/>
           </a:xfrm>
           <a:prstGeom prst="rect">
@@ -10748,7 +10748,7 @@
         </p:nvSpPr>
         <p:spPr>
           <a:xfrm>
-            <a:off x="3033522" y="4169664"/>
+            <a:off x="2831592" y="4169664"/>
             <a:ext cx="685800" cy="384048"/>
           </a:xfrm>
           <a:prstGeom prst="rect">
@@ -10773,7 +10773,7 @@
                 <a:ea typeface="Trebuchet MS" pitchFamily="34" charset="-122"/>
                 <a:cs typeface="Trebuchet MS" pitchFamily="34" charset="-120"/>
               </a:rPr>
-              <a:t>o</a:t>
+              <a:t>a</a:t>
             </a:r>
             <a:endParaRPr lang="en-US" sz="900" dirty="0"/>
           </a:p>
@@ -10787,7 +10787,7 @@
         </p:nvSpPr>
         <p:spPr>
           <a:xfrm>
-            <a:off x="3942207" y="4169664"/>
+            <a:off x="3639312" y="4169664"/>
             <a:ext cx="685800" cy="384048"/>
           </a:xfrm>
           <a:prstGeom prst="rect">
@@ -10814,7 +10814,7 @@
         </p:nvSpPr>
         <p:spPr>
           <a:xfrm>
-            <a:off x="3942207" y="4169664"/>
+            <a:off x="3639312" y="4169664"/>
             <a:ext cx="685800" cy="384048"/>
           </a:xfrm>
           <a:prstGeom prst="rect">
@@ -10839,7 +10839,7 @@
                 <a:ea typeface="Trebuchet MS" pitchFamily="34" charset="-122"/>
                 <a:cs typeface="Trebuchet MS" pitchFamily="34" charset="-120"/>
               </a:rPr>
-              <a:t>l</a:t>
+              <a:t>g</a:t>
             </a:r>
             <a:endParaRPr lang="en-US" sz="900" dirty="0"/>
           </a:p>
@@ -10853,7 +10853,7 @@
         </p:nvSpPr>
         <p:spPr>
           <a:xfrm>
-            <a:off x="4850892" y="4169664"/>
+            <a:off x="4447032" y="4169664"/>
             <a:ext cx="685800" cy="384048"/>
           </a:xfrm>
           <a:prstGeom prst="rect">
@@ -10880,7 +10880,7 @@
         </p:nvSpPr>
         <p:spPr>
           <a:xfrm>
-            <a:off x="4850892" y="4169664"/>
+            <a:off x="4447032" y="4169664"/>
             <a:ext cx="685800" cy="384048"/>
           </a:xfrm>
           <a:prstGeom prst="rect">
@@ -10905,6 +10905,270 @@
                 <a:ea typeface="Trebuchet MS" pitchFamily="34" charset="-122"/>
                 <a:cs typeface="Trebuchet MS" pitchFamily="34" charset="-120"/>
               </a:rPr>
+              <a:t>n</a:t>
+            </a:r>
+            <a:endParaRPr lang="en-US" sz="900" dirty="0"/>
+          </a:p>
+        </p:txBody>
+      </p:sp>
+      <p:sp>
+        <p:nvSpPr>
+          <p:cNvPr id="44" name="Shape 42"/>
+          <p:cNvSpPr/>
+          <p:nvPr/>
+        </p:nvSpPr>
+        <p:spPr>
+          <a:xfrm>
+            <a:off x="5254752" y="4169664"/>
+            <a:ext cx="685800" cy="384048"/>
+          </a:xfrm>
+          <a:prstGeom prst="rect">
+            <a:avLst>
+              <a:gd name="adj" fmla="val 9524"/>
+            </a:avLst>
+          </a:prstGeom>
+          <a:solidFill>
+            <a:srgbClr val="FFFFFF"/>
+          </a:solidFill>
+          <a:ln w="12700">
+            <a:solidFill>
+              <a:srgbClr val="DB2777"/>
+            </a:solidFill>
+            <a:prstDash val="solid"/>
+          </a:ln>
+        </p:spPr>
+      </p:sp>
+      <p:sp>
+        <p:nvSpPr>
+          <p:cNvPr id="45" name="Text 43"/>
+          <p:cNvSpPr/>
+          <p:nvPr/>
+        </p:nvSpPr>
+        <p:spPr>
+          <a:xfrm>
+            <a:off x="5254752" y="4169664"/>
+            <a:ext cx="685800" cy="384048"/>
+          </a:xfrm>
+          <a:prstGeom prst="rect">
+            <a:avLst/>
+          </a:prstGeom>
+          <a:noFill/>
+          <a:ln/>
+        </p:spPr>
+        <p:txBody>
+          <a:bodyPr wrap="square" lIns="0" tIns="0" rIns="0" bIns="0" rtlCol="0" anchor="ctr"/>
+          <a:lstStyle/>
+          <a:p>
+            <a:pPr algn="ctr" indent="0" marL="0">
+              <a:buNone/>
+            </a:pPr>
+            <a:r>
+              <a:rPr lang="en-US" sz="900" b="1" dirty="0">
+                <a:solidFill>
+                  <a:srgbClr val="9D174D"/>
+                </a:solidFill>
+                <a:latin typeface="Trebuchet MS" pitchFamily="34" charset="0"/>
+                <a:ea typeface="Trebuchet MS" pitchFamily="34" charset="-122"/>
+                <a:cs typeface="Trebuchet MS" pitchFamily="34" charset="-120"/>
+              </a:rPr>
+              <a:t>e</a:t>
+            </a:r>
+            <a:endParaRPr lang="en-US" sz="900" dirty="0"/>
+          </a:p>
+        </p:txBody>
+      </p:sp>
+      <p:sp>
+        <p:nvSpPr>
+          <p:cNvPr id="46" name="Shape 44"/>
+          <p:cNvSpPr/>
+          <p:nvPr/>
+        </p:nvSpPr>
+        <p:spPr>
+          <a:xfrm>
+            <a:off x="6062472" y="4169664"/>
+            <a:ext cx="685800" cy="384048"/>
+          </a:xfrm>
+          <a:prstGeom prst="rect">
+            <a:avLst>
+              <a:gd name="adj" fmla="val 9524"/>
+            </a:avLst>
+          </a:prstGeom>
+          <a:solidFill>
+            <a:srgbClr val="FFFFFF"/>
+          </a:solidFill>
+          <a:ln w="12700">
+            <a:solidFill>
+              <a:srgbClr val="DB2777"/>
+            </a:solidFill>
+            <a:prstDash val="solid"/>
+          </a:ln>
+        </p:spPr>
+      </p:sp>
+      <p:sp>
+        <p:nvSpPr>
+          <p:cNvPr id="47" name="Text 45"/>
+          <p:cNvSpPr/>
+          <p:nvPr/>
+        </p:nvSpPr>
+        <p:spPr>
+          <a:xfrm>
+            <a:off x="6062472" y="4169664"/>
+            <a:ext cx="685800" cy="384048"/>
+          </a:xfrm>
+          <a:prstGeom prst="rect">
+            <a:avLst/>
+          </a:prstGeom>
+          <a:noFill/>
+          <a:ln/>
+        </p:spPr>
+        <p:txBody>
+          <a:bodyPr wrap="square" lIns="0" tIns="0" rIns="0" bIns="0" rtlCol="0" anchor="ctr"/>
+          <a:lstStyle/>
+          <a:p>
+            <a:pPr algn="ctr" indent="0" marL="0">
+              <a:buNone/>
+            </a:pPr>
+            <a:r>
+              <a:rPr lang="en-US" sz="900" b="1" dirty="0">
+                <a:solidFill>
+                  <a:srgbClr val="9D174D"/>
+                </a:solidFill>
+                <a:latin typeface="Trebuchet MS" pitchFamily="34" charset="0"/>
+                <a:ea typeface="Trebuchet MS" pitchFamily="34" charset="-122"/>
+                <a:cs typeface="Trebuchet MS" pitchFamily="34" charset="-120"/>
+              </a:rPr>
+              <a:t>t</a:t>
+            </a:r>
+            <a:endParaRPr lang="en-US" sz="900" dirty="0"/>
+          </a:p>
+        </p:txBody>
+      </p:sp>
+      <p:sp>
+        <p:nvSpPr>
+          <p:cNvPr id="48" name="Shape 46"/>
+          <p:cNvSpPr/>
+          <p:nvPr/>
+        </p:nvSpPr>
+        <p:spPr>
+          <a:xfrm>
+            <a:off x="6870192" y="4169664"/>
+            <a:ext cx="685800" cy="384048"/>
+          </a:xfrm>
+          <a:prstGeom prst="rect">
+            <a:avLst>
+              <a:gd name="adj" fmla="val 9524"/>
+            </a:avLst>
+          </a:prstGeom>
+          <a:solidFill>
+            <a:srgbClr val="FFFFFF"/>
+          </a:solidFill>
+          <a:ln w="12700">
+            <a:solidFill>
+              <a:srgbClr val="DB2777"/>
+            </a:solidFill>
+            <a:prstDash val="solid"/>
+          </a:ln>
+        </p:spPr>
+      </p:sp>
+      <p:sp>
+        <p:nvSpPr>
+          <p:cNvPr id="49" name="Text 47"/>
+          <p:cNvSpPr/>
+          <p:nvPr/>
+        </p:nvSpPr>
+        <p:spPr>
+          <a:xfrm>
+            <a:off x="6870192" y="4169664"/>
+            <a:ext cx="685800" cy="384048"/>
+          </a:xfrm>
+          <a:prstGeom prst="rect">
+            <a:avLst/>
+          </a:prstGeom>
+          <a:noFill/>
+          <a:ln/>
+        </p:spPr>
+        <p:txBody>
+          <a:bodyPr wrap="square" lIns="0" tIns="0" rIns="0" bIns="0" rtlCol="0" anchor="ctr"/>
+          <a:lstStyle/>
+          <a:p>
+            <a:pPr algn="ctr" indent="0" marL="0">
+              <a:buNone/>
+            </a:pPr>
+            <a:r>
+              <a:rPr lang="en-US" sz="900" b="1" dirty="0">
+                <a:solidFill>
+                  <a:srgbClr val="9D174D"/>
+                </a:solidFill>
+                <a:latin typeface="Trebuchet MS" pitchFamily="34" charset="0"/>
+                <a:ea typeface="Trebuchet MS" pitchFamily="34" charset="-122"/>
+                <a:cs typeface="Trebuchet MS" pitchFamily="34" charset="-120"/>
+              </a:rPr>
+              <a:t>i</a:t>
+            </a:r>
+            <a:endParaRPr lang="en-US" sz="900" dirty="0"/>
+          </a:p>
+        </p:txBody>
+      </p:sp>
+      <p:sp>
+        <p:nvSpPr>
+          <p:cNvPr id="50" name="Shape 48"/>
+          <p:cNvSpPr/>
+          <p:nvPr/>
+        </p:nvSpPr>
+        <p:spPr>
+          <a:xfrm>
+            <a:off x="7677912" y="4169664"/>
+            <a:ext cx="685800" cy="384048"/>
+          </a:xfrm>
+          <a:prstGeom prst="rect">
+            <a:avLst>
+              <a:gd name="adj" fmla="val 9524"/>
+            </a:avLst>
+          </a:prstGeom>
+          <a:solidFill>
+            <a:srgbClr val="FFFFFF"/>
+          </a:solidFill>
+          <a:ln w="12700">
+            <a:solidFill>
+              <a:srgbClr val="DB2777"/>
+            </a:solidFill>
+            <a:prstDash val="solid"/>
+          </a:ln>
+        </p:spPr>
+      </p:sp>
+      <p:sp>
+        <p:nvSpPr>
+          <p:cNvPr id="51" name="Text 49"/>
+          <p:cNvSpPr/>
+          <p:nvPr/>
+        </p:nvSpPr>
+        <p:spPr>
+          <a:xfrm>
+            <a:off x="7677912" y="4169664"/>
+            <a:ext cx="685800" cy="384048"/>
+          </a:xfrm>
+          <a:prstGeom prst="rect">
+            <a:avLst/>
+          </a:prstGeom>
+          <a:noFill/>
+          <a:ln/>
+        </p:spPr>
+        <p:txBody>
+          <a:bodyPr wrap="square" lIns="0" tIns="0" rIns="0" bIns="0" rtlCol="0" anchor="ctr"/>
+          <a:lstStyle/>
+          <a:p>
+            <a:pPr algn="ctr" indent="0" marL="0">
+              <a:buNone/>
+            </a:pPr>
+            <a:r>
+              <a:rPr lang="en-US" sz="900" b="1" dirty="0">
+                <a:solidFill>
+                  <a:srgbClr val="9D174D"/>
+                </a:solidFill>
+                <a:latin typeface="Trebuchet MS" pitchFamily="34" charset="0"/>
+                <a:ea typeface="Trebuchet MS" pitchFamily="34" charset="-122"/>
+                <a:cs typeface="Trebuchet MS" pitchFamily="34" charset="-120"/>
+              </a:rPr>
               <a:t>c</a:t>
             </a:r>
             <a:endParaRPr lang="en-US" sz="900" dirty="0"/>
@@ -10913,13 +11177,13 @@
       </p:sp>
       <p:sp>
         <p:nvSpPr>
-          <p:cNvPr id="44" name="Text 42"/>
-          <p:cNvSpPr/>
-          <p:nvPr/>
-        </p:nvSpPr>
-        <p:spPr>
-          <a:xfrm>
-            <a:off x="4850892" y="4572000"/>
+          <p:cNvPr id="52" name="Text 50"/>
+          <p:cNvSpPr/>
+          <p:nvPr/>
+        </p:nvSpPr>
+        <p:spPr>
+          <a:xfrm>
+            <a:off x="7677912" y="4572000"/>
             <a:ext cx="685800" cy="219456"/>
           </a:xfrm>
           <a:prstGeom prst="rect">
@@ -10945,243 +11209,6 @@
                 <a:cs typeface="Calibri" pitchFamily="34" charset="-120"/>
               </a:rPr>
               <a:t>/k/</a:t>
-            </a:r>
-            <a:endParaRPr lang="en-US" sz="750" dirty="0"/>
-          </a:p>
-        </p:txBody>
-      </p:sp>
-      <p:sp>
-        <p:nvSpPr>
-          <p:cNvPr id="45" name="Shape 43"/>
-          <p:cNvSpPr/>
-          <p:nvPr/>
-        </p:nvSpPr>
-        <p:spPr>
-          <a:xfrm>
-            <a:off x="5759577" y="4169664"/>
-            <a:ext cx="685800" cy="384048"/>
-          </a:xfrm>
-          <a:prstGeom prst="rect">
-            <a:avLst>
-              <a:gd name="adj" fmla="val 9524"/>
-            </a:avLst>
-          </a:prstGeom>
-          <a:solidFill>
-            <a:srgbClr val="FFFFFF"/>
-          </a:solidFill>
-          <a:ln w="12700">
-            <a:solidFill>
-              <a:srgbClr val="DB2777"/>
-            </a:solidFill>
-            <a:prstDash val="solid"/>
-          </a:ln>
-        </p:spPr>
-      </p:sp>
-      <p:sp>
-        <p:nvSpPr>
-          <p:cNvPr id="46" name="Text 44"/>
-          <p:cNvSpPr/>
-          <p:nvPr/>
-        </p:nvSpPr>
-        <p:spPr>
-          <a:xfrm>
-            <a:off x="5759577" y="4169664"/>
-            <a:ext cx="685800" cy="384048"/>
-          </a:xfrm>
-          <a:prstGeom prst="rect">
-            <a:avLst/>
-          </a:prstGeom>
-          <a:noFill/>
-          <a:ln/>
-        </p:spPr>
-        <p:txBody>
-          <a:bodyPr wrap="square" lIns="0" tIns="0" rIns="0" bIns="0" rtlCol="0" anchor="ctr"/>
-          <a:lstStyle/>
-          <a:p>
-            <a:pPr algn="ctr" indent="0" marL="0">
-              <a:buNone/>
-            </a:pPr>
-            <a:r>
-              <a:rPr lang="en-US" sz="900" b="1" dirty="0">
-                <a:solidFill>
-                  <a:srgbClr val="9D174D"/>
-                </a:solidFill>
-                <a:latin typeface="Trebuchet MS" pitchFamily="34" charset="0"/>
-                <a:ea typeface="Trebuchet MS" pitchFamily="34" charset="-122"/>
-                <a:cs typeface="Trebuchet MS" pitchFamily="34" charset="-120"/>
-              </a:rPr>
-              <a:t>a</a:t>
-            </a:r>
-            <a:endParaRPr lang="en-US" sz="900" dirty="0"/>
-          </a:p>
-        </p:txBody>
-      </p:sp>
-      <p:sp>
-        <p:nvSpPr>
-          <p:cNvPr id="47" name="Shape 45"/>
-          <p:cNvSpPr/>
-          <p:nvPr/>
-        </p:nvSpPr>
-        <p:spPr>
-          <a:xfrm>
-            <a:off x="6668262" y="4169664"/>
-            <a:ext cx="685800" cy="384048"/>
-          </a:xfrm>
-          <a:prstGeom prst="rect">
-            <a:avLst>
-              <a:gd name="adj" fmla="val 9524"/>
-            </a:avLst>
-          </a:prstGeom>
-          <a:solidFill>
-            <a:srgbClr val="FFFFFF"/>
-          </a:solidFill>
-          <a:ln w="12700">
-            <a:solidFill>
-              <a:srgbClr val="DB2777"/>
-            </a:solidFill>
-            <a:prstDash val="solid"/>
-          </a:ln>
-        </p:spPr>
-      </p:sp>
-      <p:sp>
-        <p:nvSpPr>
-          <p:cNvPr id="48" name="Text 46"/>
-          <p:cNvSpPr/>
-          <p:nvPr/>
-        </p:nvSpPr>
-        <p:spPr>
-          <a:xfrm>
-            <a:off x="6668262" y="4169664"/>
-            <a:ext cx="685800" cy="384048"/>
-          </a:xfrm>
-          <a:prstGeom prst="rect">
-            <a:avLst/>
-          </a:prstGeom>
-          <a:noFill/>
-          <a:ln/>
-        </p:spPr>
-        <p:txBody>
-          <a:bodyPr wrap="square" lIns="0" tIns="0" rIns="0" bIns="0" rtlCol="0" anchor="ctr"/>
-          <a:lstStyle/>
-          <a:p>
-            <a:pPr algn="ctr" indent="0" marL="0">
-              <a:buNone/>
-            </a:pPr>
-            <a:r>
-              <a:rPr lang="en-US" sz="900" b="1" dirty="0">
-                <a:solidFill>
-                  <a:srgbClr val="9D174D"/>
-                </a:solidFill>
-                <a:latin typeface="Trebuchet MS" pitchFamily="34" charset="0"/>
-                <a:ea typeface="Trebuchet MS" pitchFamily="34" charset="-122"/>
-                <a:cs typeface="Trebuchet MS" pitchFamily="34" charset="-120"/>
-              </a:rPr>
-              <a:t>n</a:t>
-            </a:r>
-            <a:endParaRPr lang="en-US" sz="900" dirty="0"/>
-          </a:p>
-        </p:txBody>
-      </p:sp>
-      <p:sp>
-        <p:nvSpPr>
-          <p:cNvPr id="49" name="Shape 47"/>
-          <p:cNvSpPr/>
-          <p:nvPr/>
-        </p:nvSpPr>
-        <p:spPr>
-          <a:xfrm>
-            <a:off x="7576947" y="4169664"/>
-            <a:ext cx="685800" cy="384048"/>
-          </a:xfrm>
-          <a:prstGeom prst="rect">
-            <a:avLst>
-              <a:gd name="adj" fmla="val 9524"/>
-            </a:avLst>
-          </a:prstGeom>
-          <a:solidFill>
-            <a:srgbClr val="FFFFFF"/>
-          </a:solidFill>
-          <a:ln w="12700">
-            <a:solidFill>
-              <a:srgbClr val="DB2777"/>
-            </a:solidFill>
-            <a:prstDash val="solid"/>
-          </a:ln>
-        </p:spPr>
-      </p:sp>
-      <p:sp>
-        <p:nvSpPr>
-          <p:cNvPr id="50" name="Text 48"/>
-          <p:cNvSpPr/>
-          <p:nvPr/>
-        </p:nvSpPr>
-        <p:spPr>
-          <a:xfrm>
-            <a:off x="7576947" y="4169664"/>
-            <a:ext cx="685800" cy="384048"/>
-          </a:xfrm>
-          <a:prstGeom prst="rect">
-            <a:avLst/>
-          </a:prstGeom>
-          <a:noFill/>
-          <a:ln/>
-        </p:spPr>
-        <p:txBody>
-          <a:bodyPr wrap="square" lIns="0" tIns="0" rIns="0" bIns="0" rtlCol="0" anchor="ctr"/>
-          <a:lstStyle/>
-          <a:p>
-            <a:pPr algn="ctr" indent="0" marL="0">
-              <a:buNone/>
-            </a:pPr>
-            <a:r>
-              <a:rPr lang="en-US" sz="900" b="1" dirty="0">
-                <a:solidFill>
-                  <a:srgbClr val="9D174D"/>
-                </a:solidFill>
-                <a:latin typeface="Trebuchet MS" pitchFamily="34" charset="0"/>
-                <a:ea typeface="Trebuchet MS" pitchFamily="34" charset="-122"/>
-                <a:cs typeface="Trebuchet MS" pitchFamily="34" charset="-120"/>
-              </a:rPr>
-              <a:t>ic</a:t>
-            </a:r>
-            <a:endParaRPr lang="en-US" sz="900" dirty="0"/>
-          </a:p>
-        </p:txBody>
-      </p:sp>
-      <p:sp>
-        <p:nvSpPr>
-          <p:cNvPr id="51" name="Text 49"/>
-          <p:cNvSpPr/>
-          <p:nvPr/>
-        </p:nvSpPr>
-        <p:spPr>
-          <a:xfrm>
-            <a:off x="7576947" y="4572000"/>
-            <a:ext cx="685800" cy="219456"/>
-          </a:xfrm>
-          <a:prstGeom prst="rect">
-            <a:avLst/>
-          </a:prstGeom>
-          <a:noFill/>
-          <a:ln/>
-        </p:spPr>
-        <p:txBody>
-          <a:bodyPr wrap="square" lIns="0" tIns="0" rIns="0" bIns="0" rtlCol="0" anchor="t"/>
-          <a:lstStyle/>
-          <a:p>
-            <a:pPr algn="ctr" indent="0" marL="0">
-              <a:buNone/>
-            </a:pPr>
-            <a:r>
-              <a:rPr lang="en-US" sz="750" i="1" dirty="0">
-                <a:solidFill>
-                  <a:srgbClr val="94A3B8"/>
-                </a:solidFill>
-                <a:latin typeface="Calibri" pitchFamily="34" charset="0"/>
-                <a:ea typeface="Calibri" pitchFamily="34" charset="-122"/>
-                <a:cs typeface="Calibri" pitchFamily="34" charset="-120"/>
-              </a:rPr>
-              <a:t>/ik/</a:t>
             </a:r>
             <a:endParaRPr lang="en-US" sz="750" dirty="0"/>
           </a:p>
@@ -11612,7 +11639,7 @@
                 <a:ea typeface="Trebuchet MS" pitchFamily="34" charset="-122"/>
                 <a:cs typeface="Trebuchet MS" pitchFamily="34" charset="-120"/>
               </a:rPr>
-              <a:t>electric</a:t>
+              <a:t>cosmic</a:t>
             </a:r>
             <a:endParaRPr lang="en-US" sz="2800" dirty="0"/>
           </a:p>
@@ -12439,7 +12466,7 @@
                 <a:ea typeface="Trebuchet MS" pitchFamily="34" charset="-122"/>
                 <a:cs typeface="Trebuchet MS" pitchFamily="34" charset="-120"/>
               </a:rPr>
-              <a:t>electric</a:t>
+              <a:t>cosmic</a:t>
             </a:r>
             <a:endParaRPr lang="en-US" sz="2800" dirty="0"/>
           </a:p>
@@ -12578,7 +12605,7 @@
                 <a:ea typeface="Trebuchet MS" pitchFamily="34" charset="-122"/>
                 <a:cs typeface="Trebuchet MS" pitchFamily="34" charset="-120"/>
               </a:rPr>
-              <a:t>electr</a:t>
+              <a:t>cosm</a:t>
             </a:r>
             <a:endParaRPr lang="en-US" sz="1300" dirty="0"/>
           </a:p>
@@ -12617,7 +12644,7 @@
                 <a:ea typeface="Calibri" pitchFamily="34" charset="-122"/>
                 <a:cs typeface="Calibri" pitchFamily="34" charset="-120"/>
               </a:rPr>
-              <a:t>electricity, amber</a:t>
+              <a:t>universe, order</a:t>
             </a:r>
             <a:endParaRPr lang="en-US" sz="850" dirty="0"/>
           </a:p>
@@ -12729,7 +12756,7 @@
                 <a:ea typeface="Calibri" pitchFamily="34" charset="-122"/>
                 <a:cs typeface="Calibri" pitchFamily="34" charset="-120"/>
               </a:rPr>
-              <a:t>relating to</a:t>
+              <a:t>relating to, having the nature of</a:t>
             </a:r>
             <a:endParaRPr lang="en-US" sz="850" dirty="0"/>
           </a:p>
@@ -13424,7 +13451,7 @@
                 <a:ea typeface="Trebuchet MS" pitchFamily="34" charset="-122"/>
                 <a:cs typeface="Trebuchet MS" pitchFamily="34" charset="-120"/>
               </a:rPr>
-              <a:t>electric</a:t>
+              <a:t>cosmic</a:t>
             </a:r>
             <a:endParaRPr lang="en-US" sz="2800" dirty="0"/>
           </a:p>
@@ -13563,7 +13590,7 @@
                 <a:ea typeface="Trebuchet MS" pitchFamily="34" charset="-122"/>
                 <a:cs typeface="Trebuchet MS" pitchFamily="34" charset="-120"/>
               </a:rPr>
-              <a:t>electr</a:t>
+              <a:t>cosm</a:t>
             </a:r>
             <a:endParaRPr lang="en-US" sz="1300" dirty="0"/>
           </a:p>
@@ -13602,7 +13629,7 @@
                 <a:ea typeface="Calibri" pitchFamily="34" charset="-122"/>
                 <a:cs typeface="Calibri" pitchFamily="34" charset="-120"/>
               </a:rPr>
-              <a:t>electricity, amber</a:t>
+              <a:t>universe, order</a:t>
             </a:r>
             <a:endParaRPr lang="en-US" sz="850" dirty="0"/>
           </a:p>
@@ -13714,7 +13741,7 @@
                 <a:ea typeface="Calibri" pitchFamily="34" charset="-122"/>
                 <a:cs typeface="Calibri" pitchFamily="34" charset="-120"/>
               </a:rPr>
-              <a:t>relating to</a:t>
+              <a:t>relating to, having the nature of</a:t>
             </a:r>
             <a:endParaRPr lang="en-US" sz="850" dirty="0"/>
           </a:p>
@@ -13821,7 +13848,7 @@
         </p:nvSpPr>
         <p:spPr>
           <a:xfrm>
-            <a:off x="2313432" y="3364992"/>
+            <a:off x="2999232" y="3364992"/>
             <a:ext cx="1645920" cy="475488"/>
           </a:xfrm>
           <a:prstGeom prst="rect">
@@ -13848,7 +13875,7 @@
         </p:nvSpPr>
         <p:spPr>
           <a:xfrm>
-            <a:off x="2313432" y="3364992"/>
+            <a:off x="2999232" y="3364992"/>
             <a:ext cx="1645920" cy="475488"/>
           </a:xfrm>
           <a:prstGeom prst="rect">
@@ -13873,7 +13900,7 @@
                 <a:ea typeface="Trebuchet MS" pitchFamily="34" charset="-122"/>
                 <a:cs typeface="Trebuchet MS" pitchFamily="34" charset="-120"/>
               </a:rPr>
-              <a:t>e</a:t>
+              <a:t>cos</a:t>
             </a:r>
             <a:endParaRPr lang="en-US" sz="1400" dirty="0"/>
           </a:p>
@@ -13887,8 +13914,8 @@
         </p:nvSpPr>
         <p:spPr>
           <a:xfrm>
-            <a:off x="3959352" y="3364992"/>
-            <a:ext cx="411480" cy="475488"/>
+            <a:off x="4645152" y="3364992"/>
+            <a:ext cx="1097280" cy="475488"/>
           </a:xfrm>
           <a:prstGeom prst="rect">
             <a:avLst/>
@@ -13926,7 +13953,7 @@
         </p:nvSpPr>
         <p:spPr>
           <a:xfrm>
-            <a:off x="4370832" y="3364992"/>
+            <a:off x="5742432" y="3364992"/>
             <a:ext cx="1645920" cy="475488"/>
           </a:xfrm>
           <a:prstGeom prst="rect">
@@ -13953,7 +13980,7 @@
         </p:nvSpPr>
         <p:spPr>
           <a:xfrm>
-            <a:off x="4370832" y="3364992"/>
+            <a:off x="5742432" y="3364992"/>
             <a:ext cx="1645920" cy="475488"/>
           </a:xfrm>
           <a:prstGeom prst="rect">
@@ -13978,7 +14005,7 @@
                 <a:ea typeface="Trebuchet MS" pitchFamily="34" charset="-122"/>
                 <a:cs typeface="Trebuchet MS" pitchFamily="34" charset="-120"/>
               </a:rPr>
-              <a:t>lec</a:t>
+              <a:t>mic</a:t>
             </a:r>
             <a:endParaRPr lang="en-US" sz="1400" dirty="0"/>
           </a:p>
@@ -13986,119 +14013,80 @@
       </p:sp>
       <p:sp>
         <p:nvSpPr>
-          <p:cNvPr id="30" name="Text 28"/>
-          <p:cNvSpPr/>
-          <p:nvPr/>
-        </p:nvSpPr>
-        <p:spPr>
-          <a:xfrm>
-            <a:off x="6016752" y="3364992"/>
-            <a:ext cx="411480" cy="475488"/>
-          </a:xfrm>
-          <a:prstGeom prst="rect">
-            <a:avLst/>
-          </a:prstGeom>
-          <a:noFill/>
-          <a:ln/>
-        </p:spPr>
-        <p:txBody>
-          <a:bodyPr wrap="square" lIns="0" tIns="0" rIns="0" bIns="0" rtlCol="0" anchor="ctr"/>
-          <a:lstStyle/>
-          <a:p>
-            <a:pPr algn="ctr" indent="0" marL="0">
-              <a:buNone/>
-            </a:pPr>
-            <a:r>
-              <a:rPr lang="en-US" sz="1600" b="1" dirty="0">
-                <a:solidFill>
-                  <a:srgbClr val="0D9488"/>
+          <p:cNvPr id="30" name="Shape 28"/>
+          <p:cNvSpPr/>
+          <p:nvPr/>
+        </p:nvSpPr>
+        <p:spPr>
+          <a:xfrm>
+            <a:off x="365760" y="4096512"/>
+            <a:ext cx="1371600" cy="804672"/>
+          </a:xfrm>
+          <a:prstGeom prst="rect">
+            <a:avLst>
+              <a:gd name="adj" fmla="val 6818"/>
+            </a:avLst>
+          </a:prstGeom>
+          <a:solidFill>
+            <a:srgbClr val="E2E8F0"/>
+          </a:solidFill>
+          <a:ln w="12700">
+            <a:solidFill>
+              <a:srgbClr val="E2E8F0"/>
+            </a:solidFill>
+            <a:prstDash val="solid"/>
+          </a:ln>
+        </p:spPr>
+      </p:sp>
+      <p:sp>
+        <p:nvSpPr>
+          <p:cNvPr id="31" name="Text 29"/>
+          <p:cNvSpPr/>
+          <p:nvPr/>
+        </p:nvSpPr>
+        <p:spPr>
+          <a:xfrm>
+            <a:off x="365760" y="4096512"/>
+            <a:ext cx="1371600" cy="804672"/>
+          </a:xfrm>
+          <a:prstGeom prst="rect">
+            <a:avLst/>
+          </a:prstGeom>
+          <a:noFill/>
+          <a:ln/>
+        </p:spPr>
+        <p:txBody>
+          <a:bodyPr wrap="square" lIns="0" tIns="0" rIns="0" bIns="0" rtlCol="0" anchor="ctr"/>
+          <a:lstStyle/>
+          <a:p>
+            <a:pPr algn="ctr" indent="0" marL="0">
+              <a:buNone/>
+            </a:pPr>
+            <a:r>
+              <a:rPr lang="en-US" sz="1100" b="1" dirty="0">
+                <a:solidFill>
+                  <a:srgbClr val="475569"/>
                 </a:solidFill>
                 <a:latin typeface="Trebuchet MS" pitchFamily="34" charset="0"/>
                 <a:ea typeface="Trebuchet MS" pitchFamily="34" charset="-122"/>
                 <a:cs typeface="Trebuchet MS" pitchFamily="34" charset="-120"/>
               </a:rPr>
-              <a:t>·</a:t>
-            </a:r>
-            <a:endParaRPr lang="en-US" sz="1600" dirty="0"/>
-          </a:p>
-        </p:txBody>
-      </p:sp>
-      <p:sp>
-        <p:nvSpPr>
-          <p:cNvPr id="31" name="Shape 29"/>
-          <p:cNvSpPr/>
-          <p:nvPr/>
-        </p:nvSpPr>
-        <p:spPr>
-          <a:xfrm>
-            <a:off x="6428232" y="3364992"/>
-            <a:ext cx="1645920" cy="475488"/>
-          </a:xfrm>
-          <a:prstGeom prst="rect">
-            <a:avLst>
-              <a:gd name="adj" fmla="val 9615"/>
-            </a:avLst>
-          </a:prstGeom>
-          <a:solidFill>
-            <a:srgbClr val="FFFFFF"/>
-          </a:solidFill>
-          <a:ln w="12700">
-            <a:solidFill>
-              <a:srgbClr val="0D9488"/>
-            </a:solidFill>
-            <a:prstDash val="solid"/>
-          </a:ln>
-        </p:spPr>
-      </p:sp>
-      <p:sp>
-        <p:nvSpPr>
-          <p:cNvPr id="32" name="Text 30"/>
-          <p:cNvSpPr/>
-          <p:nvPr/>
-        </p:nvSpPr>
-        <p:spPr>
-          <a:xfrm>
-            <a:off x="6428232" y="3364992"/>
-            <a:ext cx="1645920" cy="475488"/>
-          </a:xfrm>
-          <a:prstGeom prst="rect">
-            <a:avLst/>
-          </a:prstGeom>
-          <a:noFill/>
-          <a:ln/>
-        </p:spPr>
-        <p:txBody>
-          <a:bodyPr wrap="square" lIns="0" tIns="0" rIns="0" bIns="0" rtlCol="0" anchor="ctr"/>
-          <a:lstStyle/>
-          <a:p>
-            <a:pPr algn="ctr" indent="0" marL="0">
-              <a:buNone/>
-            </a:pPr>
-            <a:r>
-              <a:rPr lang="en-US" sz="1400" b="1" dirty="0">
-                <a:solidFill>
-                  <a:srgbClr val="0D9488"/>
-                </a:solidFill>
-                <a:latin typeface="Trebuchet MS" pitchFamily="34" charset="0"/>
-                <a:ea typeface="Trebuchet MS" pitchFamily="34" charset="-122"/>
-                <a:cs typeface="Trebuchet MS" pitchFamily="34" charset="-120"/>
-              </a:rPr>
-              <a:t>tric</a:t>
-            </a:r>
-            <a:endParaRPr lang="en-US" sz="1400" dirty="0"/>
-          </a:p>
-        </p:txBody>
-      </p:sp>
-      <p:sp>
-        <p:nvSpPr>
-          <p:cNvPr id="33" name="Shape 31"/>
-          <p:cNvSpPr/>
-          <p:nvPr/>
-        </p:nvSpPr>
-        <p:spPr>
-          <a:xfrm>
-            <a:off x="365760" y="4096512"/>
-            <a:ext cx="1371600" cy="804672"/>
+              <a:t>Phonemes</a:t>
+            </a:r>
+            <a:endParaRPr lang="en-US" sz="1100" dirty="0"/>
+          </a:p>
+        </p:txBody>
+      </p:sp>
+      <p:sp>
+        <p:nvSpPr>
+          <p:cNvPr id="32" name="Shape 30"/>
+          <p:cNvSpPr/>
+          <p:nvPr/>
+        </p:nvSpPr>
+        <p:spPr>
+          <a:xfrm>
+            <a:off x="1874520" y="4096512"/>
+            <a:ext cx="6903720" cy="804672"/>
           </a:xfrm>
           <a:prstGeom prst="rect">
             <a:avLst>
@@ -14106,85 +14094,19 @@
             </a:avLst>
           </a:prstGeom>
           <a:solidFill>
-            <a:srgbClr val="E2E8F0"/>
+            <a:srgbClr val="F8FAFC"/>
           </a:solidFill>
           <a:ln w="12700">
             <a:solidFill>
               <a:srgbClr val="E2E8F0"/>
             </a:solidFill>
-            <a:prstDash val="solid"/>
-          </a:ln>
-        </p:spPr>
-      </p:sp>
-      <p:sp>
-        <p:nvSpPr>
-          <p:cNvPr id="34" name="Text 32"/>
-          <p:cNvSpPr/>
-          <p:nvPr/>
-        </p:nvSpPr>
-        <p:spPr>
-          <a:xfrm>
-            <a:off x="365760" y="4096512"/>
-            <a:ext cx="1371600" cy="804672"/>
-          </a:xfrm>
-          <a:prstGeom prst="rect">
-            <a:avLst/>
-          </a:prstGeom>
-          <a:noFill/>
-          <a:ln/>
-        </p:spPr>
-        <p:txBody>
-          <a:bodyPr wrap="square" lIns="0" tIns="0" rIns="0" bIns="0" rtlCol="0" anchor="ctr"/>
-          <a:lstStyle/>
-          <a:p>
-            <a:pPr algn="ctr" indent="0" marL="0">
-              <a:buNone/>
-            </a:pPr>
-            <a:r>
-              <a:rPr lang="en-US" sz="1100" b="1" dirty="0">
-                <a:solidFill>
-                  <a:srgbClr val="475569"/>
-                </a:solidFill>
-                <a:latin typeface="Trebuchet MS" pitchFamily="34" charset="0"/>
-                <a:ea typeface="Trebuchet MS" pitchFamily="34" charset="-122"/>
-                <a:cs typeface="Trebuchet MS" pitchFamily="34" charset="-120"/>
-              </a:rPr>
-              <a:t>Phonemes</a:t>
-            </a:r>
-            <a:endParaRPr lang="en-US" sz="1100" dirty="0"/>
-          </a:p>
-        </p:txBody>
-      </p:sp>
-      <p:sp>
-        <p:nvSpPr>
-          <p:cNvPr id="35" name="Shape 33"/>
-          <p:cNvSpPr/>
-          <p:nvPr/>
-        </p:nvSpPr>
-        <p:spPr>
-          <a:xfrm>
-            <a:off x="1874520" y="4096512"/>
-            <a:ext cx="6903720" cy="804672"/>
-          </a:xfrm>
-          <a:prstGeom prst="rect">
-            <a:avLst>
-              <a:gd name="adj" fmla="val 6818"/>
-            </a:avLst>
-          </a:prstGeom>
-          <a:solidFill>
-            <a:srgbClr val="F8FAFC"/>
-          </a:solidFill>
-          <a:ln w="12700">
-            <a:solidFill>
-              <a:srgbClr val="E2E8F0"/>
-            </a:solidFill>
             <a:prstDash val="dash"/>
           </a:ln>
         </p:spPr>
       </p:sp>
       <p:sp>
         <p:nvSpPr>
-          <p:cNvPr id="36" name="Text 34"/>
+          <p:cNvPr id="33" name="Text 31"/>
           <p:cNvSpPr/>
           <p:nvPr/>
         </p:nvSpPr>
@@ -14911,7 +14833,7 @@
                 <a:ea typeface="Trebuchet MS" pitchFamily="34" charset="-122"/>
                 <a:cs typeface="Trebuchet MS" pitchFamily="34" charset="-120"/>
               </a:rPr>
-              <a:t>electric</a:t>
+              <a:t>cosmic</a:t>
             </a:r>
             <a:endParaRPr lang="en-US" sz="2800" dirty="0"/>
           </a:p>
@@ -15050,7 +14972,7 @@
                 <a:ea typeface="Trebuchet MS" pitchFamily="34" charset="-122"/>
                 <a:cs typeface="Trebuchet MS" pitchFamily="34" charset="-120"/>
               </a:rPr>
-              <a:t>electr</a:t>
+              <a:t>cosm</a:t>
             </a:r>
             <a:endParaRPr lang="en-US" sz="1300" dirty="0"/>
           </a:p>
@@ -15089,7 +15011,7 @@
                 <a:ea typeface="Calibri" pitchFamily="34" charset="-122"/>
                 <a:cs typeface="Calibri" pitchFamily="34" charset="-120"/>
               </a:rPr>
-              <a:t>electricity, amber</a:t>
+              <a:t>universe, order</a:t>
             </a:r>
             <a:endParaRPr lang="en-US" sz="850" dirty="0"/>
           </a:p>
@@ -15201,7 +15123,7 @@
                 <a:ea typeface="Calibri" pitchFamily="34" charset="-122"/>
                 <a:cs typeface="Calibri" pitchFamily="34" charset="-120"/>
               </a:rPr>
-              <a:t>relating to</a:t>
+              <a:t>relating to, having the nature of</a:t>
             </a:r>
             <a:endParaRPr lang="en-US" sz="850" dirty="0"/>
           </a:p>
@@ -15308,7 +15230,7 @@
         </p:nvSpPr>
         <p:spPr>
           <a:xfrm>
-            <a:off x="2313432" y="3364992"/>
+            <a:off x="2999232" y="3364992"/>
             <a:ext cx="1645920" cy="475488"/>
           </a:xfrm>
           <a:prstGeom prst="rect">
@@ -15335,7 +15257,7 @@
         </p:nvSpPr>
         <p:spPr>
           <a:xfrm>
-            <a:off x="2313432" y="3364992"/>
+            <a:off x="2999232" y="3364992"/>
             <a:ext cx="1645920" cy="475488"/>
           </a:xfrm>
           <a:prstGeom prst="rect">
@@ -15360,7 +15282,7 @@
                 <a:ea typeface="Trebuchet MS" pitchFamily="34" charset="-122"/>
                 <a:cs typeface="Trebuchet MS" pitchFamily="34" charset="-120"/>
               </a:rPr>
-              <a:t>e</a:t>
+              <a:t>cos</a:t>
             </a:r>
             <a:endParaRPr lang="en-US" sz="1400" dirty="0"/>
           </a:p>
@@ -15374,8 +15296,8 @@
         </p:nvSpPr>
         <p:spPr>
           <a:xfrm>
-            <a:off x="3959352" y="3364992"/>
-            <a:ext cx="411480" cy="475488"/>
+            <a:off x="4645152" y="3364992"/>
+            <a:ext cx="1097280" cy="475488"/>
           </a:xfrm>
           <a:prstGeom prst="rect">
             <a:avLst/>
@@ -15413,7 +15335,7 @@
         </p:nvSpPr>
         <p:spPr>
           <a:xfrm>
-            <a:off x="4370832" y="3364992"/>
+            <a:off x="5742432" y="3364992"/>
             <a:ext cx="1645920" cy="475488"/>
           </a:xfrm>
           <a:prstGeom prst="rect">
@@ -15440,7 +15362,7 @@
         </p:nvSpPr>
         <p:spPr>
           <a:xfrm>
-            <a:off x="4370832" y="3364992"/>
+            <a:off x="5742432" y="3364992"/>
             <a:ext cx="1645920" cy="475488"/>
           </a:xfrm>
           <a:prstGeom prst="rect">
@@ -15465,7 +15387,7 @@
                 <a:ea typeface="Trebuchet MS" pitchFamily="34" charset="-122"/>
                 <a:cs typeface="Trebuchet MS" pitchFamily="34" charset="-120"/>
               </a:rPr>
-              <a:t>lec</a:t>
+              <a:t>mic</a:t>
             </a:r>
             <a:endParaRPr lang="en-US" sz="1400" dirty="0"/>
           </a:p>
@@ -15473,211 +15395,277 @@
       </p:sp>
       <p:sp>
         <p:nvSpPr>
-          <p:cNvPr id="30" name="Text 28"/>
-          <p:cNvSpPr/>
-          <p:nvPr/>
-        </p:nvSpPr>
-        <p:spPr>
-          <a:xfrm>
-            <a:off x="6016752" y="3364992"/>
-            <a:ext cx="411480" cy="475488"/>
-          </a:xfrm>
-          <a:prstGeom prst="rect">
-            <a:avLst/>
-          </a:prstGeom>
-          <a:noFill/>
-          <a:ln/>
-        </p:spPr>
-        <p:txBody>
-          <a:bodyPr wrap="square" lIns="0" tIns="0" rIns="0" bIns="0" rtlCol="0" anchor="ctr"/>
-          <a:lstStyle/>
-          <a:p>
-            <a:pPr algn="ctr" indent="0" marL="0">
-              <a:buNone/>
-            </a:pPr>
-            <a:r>
-              <a:rPr lang="en-US" sz="1600" b="1" dirty="0">
-                <a:solidFill>
-                  <a:srgbClr val="0D9488"/>
+          <p:cNvPr id="30" name="Shape 28"/>
+          <p:cNvSpPr/>
+          <p:nvPr/>
+        </p:nvSpPr>
+        <p:spPr>
+          <a:xfrm>
+            <a:off x="365760" y="4096512"/>
+            <a:ext cx="1371600" cy="804672"/>
+          </a:xfrm>
+          <a:prstGeom prst="rect">
+            <a:avLst>
+              <a:gd name="adj" fmla="val 6818"/>
+            </a:avLst>
+          </a:prstGeom>
+          <a:solidFill>
+            <a:srgbClr val="E2E8F0"/>
+          </a:solidFill>
+          <a:ln w="12700">
+            <a:solidFill>
+              <a:srgbClr val="E2E8F0"/>
+            </a:solidFill>
+            <a:prstDash val="solid"/>
+          </a:ln>
+        </p:spPr>
+      </p:sp>
+      <p:sp>
+        <p:nvSpPr>
+          <p:cNvPr id="31" name="Text 29"/>
+          <p:cNvSpPr/>
+          <p:nvPr/>
+        </p:nvSpPr>
+        <p:spPr>
+          <a:xfrm>
+            <a:off x="365760" y="4096512"/>
+            <a:ext cx="1371600" cy="804672"/>
+          </a:xfrm>
+          <a:prstGeom prst="rect">
+            <a:avLst/>
+          </a:prstGeom>
+          <a:noFill/>
+          <a:ln/>
+        </p:spPr>
+        <p:txBody>
+          <a:bodyPr wrap="square" lIns="0" tIns="0" rIns="0" bIns="0" rtlCol="0" anchor="ctr"/>
+          <a:lstStyle/>
+          <a:p>
+            <a:pPr algn="ctr" indent="0" marL="0">
+              <a:buNone/>
+            </a:pPr>
+            <a:r>
+              <a:rPr lang="en-US" sz="1100" b="1" dirty="0">
+                <a:solidFill>
+                  <a:srgbClr val="475569"/>
                 </a:solidFill>
                 <a:latin typeface="Trebuchet MS" pitchFamily="34" charset="0"/>
                 <a:ea typeface="Trebuchet MS" pitchFamily="34" charset="-122"/>
                 <a:cs typeface="Trebuchet MS" pitchFamily="34" charset="-120"/>
               </a:rPr>
-              <a:t>·</a:t>
-            </a:r>
-            <a:endParaRPr lang="en-US" sz="1600" dirty="0"/>
-          </a:p>
-        </p:txBody>
-      </p:sp>
-      <p:sp>
-        <p:nvSpPr>
-          <p:cNvPr id="31" name="Shape 29"/>
-          <p:cNvSpPr/>
-          <p:nvPr/>
-        </p:nvSpPr>
-        <p:spPr>
-          <a:xfrm>
-            <a:off x="6428232" y="3364992"/>
-            <a:ext cx="1645920" cy="475488"/>
+              <a:t>Phonemes</a:t>
+            </a:r>
+            <a:endParaRPr lang="en-US" sz="1100" dirty="0"/>
+          </a:p>
+        </p:txBody>
+      </p:sp>
+      <p:sp>
+        <p:nvSpPr>
+          <p:cNvPr id="32" name="Shape 30"/>
+          <p:cNvSpPr/>
+          <p:nvPr/>
+        </p:nvSpPr>
+        <p:spPr>
+          <a:xfrm>
+            <a:off x="1874520" y="4096512"/>
+            <a:ext cx="6903720" cy="804672"/>
           </a:xfrm>
           <a:prstGeom prst="rect">
             <a:avLst>
-              <a:gd name="adj" fmla="val 9615"/>
+              <a:gd name="adj" fmla="val 6818"/>
             </a:avLst>
           </a:prstGeom>
           <a:solidFill>
+            <a:srgbClr val="FCE7F3"/>
+          </a:solidFill>
+          <a:ln w="12700">
+            <a:solidFill>
+              <a:srgbClr val="DB2777"/>
+            </a:solidFill>
+            <a:prstDash val="solid"/>
+          </a:ln>
+        </p:spPr>
+      </p:sp>
+      <p:sp>
+        <p:nvSpPr>
+          <p:cNvPr id="33" name="Shape 31"/>
+          <p:cNvSpPr/>
+          <p:nvPr/>
+        </p:nvSpPr>
+        <p:spPr>
+          <a:xfrm>
+            <a:off x="2254649" y="4169664"/>
+            <a:ext cx="685800" cy="384048"/>
+          </a:xfrm>
+          <a:prstGeom prst="rect">
+            <a:avLst>
+              <a:gd name="adj" fmla="val 9524"/>
+            </a:avLst>
+          </a:prstGeom>
+          <a:solidFill>
             <a:srgbClr val="FFFFFF"/>
           </a:solidFill>
           <a:ln w="12700">
             <a:solidFill>
-              <a:srgbClr val="0D9488"/>
-            </a:solidFill>
-            <a:prstDash val="solid"/>
-          </a:ln>
-        </p:spPr>
-      </p:sp>
-      <p:sp>
-        <p:nvSpPr>
-          <p:cNvPr id="32" name="Text 30"/>
-          <p:cNvSpPr/>
-          <p:nvPr/>
-        </p:nvSpPr>
-        <p:spPr>
-          <a:xfrm>
-            <a:off x="6428232" y="3364992"/>
-            <a:ext cx="1645920" cy="475488"/>
-          </a:xfrm>
-          <a:prstGeom prst="rect">
-            <a:avLst/>
-          </a:prstGeom>
-          <a:noFill/>
-          <a:ln/>
-        </p:spPr>
-        <p:txBody>
-          <a:bodyPr wrap="square" lIns="0" tIns="0" rIns="0" bIns="0" rtlCol="0" anchor="ctr"/>
-          <a:lstStyle/>
-          <a:p>
-            <a:pPr algn="ctr" indent="0" marL="0">
-              <a:buNone/>
-            </a:pPr>
-            <a:r>
-              <a:rPr lang="en-US" sz="1400" b="1" dirty="0">
-                <a:solidFill>
-                  <a:srgbClr val="0D9488"/>
+              <a:srgbClr val="DB2777"/>
+            </a:solidFill>
+            <a:prstDash val="solid"/>
+          </a:ln>
+        </p:spPr>
+      </p:sp>
+      <p:sp>
+        <p:nvSpPr>
+          <p:cNvPr id="34" name="Text 32"/>
+          <p:cNvSpPr/>
+          <p:nvPr/>
+        </p:nvSpPr>
+        <p:spPr>
+          <a:xfrm>
+            <a:off x="2254649" y="4169664"/>
+            <a:ext cx="685800" cy="384048"/>
+          </a:xfrm>
+          <a:prstGeom prst="rect">
+            <a:avLst/>
+          </a:prstGeom>
+          <a:noFill/>
+          <a:ln/>
+        </p:spPr>
+        <p:txBody>
+          <a:bodyPr wrap="square" lIns="0" tIns="0" rIns="0" bIns="0" rtlCol="0" anchor="ctr"/>
+          <a:lstStyle/>
+          <a:p>
+            <a:pPr algn="ctr" indent="0" marL="0">
+              <a:buNone/>
+            </a:pPr>
+            <a:r>
+              <a:rPr lang="en-US" sz="900" b="1" dirty="0">
+                <a:solidFill>
+                  <a:srgbClr val="9D174D"/>
                 </a:solidFill>
                 <a:latin typeface="Trebuchet MS" pitchFamily="34" charset="0"/>
                 <a:ea typeface="Trebuchet MS" pitchFamily="34" charset="-122"/>
                 <a:cs typeface="Trebuchet MS" pitchFamily="34" charset="-120"/>
               </a:rPr>
-              <a:t>tric</a:t>
-            </a:r>
-            <a:endParaRPr lang="en-US" sz="1400" dirty="0"/>
-          </a:p>
-        </p:txBody>
-      </p:sp>
-      <p:sp>
-        <p:nvSpPr>
-          <p:cNvPr id="33" name="Shape 31"/>
-          <p:cNvSpPr/>
-          <p:nvPr/>
-        </p:nvSpPr>
-        <p:spPr>
-          <a:xfrm>
-            <a:off x="365760" y="4096512"/>
-            <a:ext cx="1371600" cy="804672"/>
+              <a:t>c</a:t>
+            </a:r>
+            <a:endParaRPr lang="en-US" sz="900" dirty="0"/>
+          </a:p>
+        </p:txBody>
+      </p:sp>
+      <p:sp>
+        <p:nvSpPr>
+          <p:cNvPr id="35" name="Text 33"/>
+          <p:cNvSpPr/>
+          <p:nvPr/>
+        </p:nvSpPr>
+        <p:spPr>
+          <a:xfrm>
+            <a:off x="2254649" y="4572000"/>
+            <a:ext cx="685800" cy="219456"/>
+          </a:xfrm>
+          <a:prstGeom prst="rect">
+            <a:avLst/>
+          </a:prstGeom>
+          <a:noFill/>
+          <a:ln/>
+        </p:spPr>
+        <p:txBody>
+          <a:bodyPr wrap="square" lIns="0" tIns="0" rIns="0" bIns="0" rtlCol="0" anchor="t"/>
+          <a:lstStyle/>
+          <a:p>
+            <a:pPr algn="ctr" indent="0" marL="0">
+              <a:buNone/>
+            </a:pPr>
+            <a:r>
+              <a:rPr lang="en-US" sz="750" i="1" dirty="0">
+                <a:solidFill>
+                  <a:srgbClr val="94A3B8"/>
+                </a:solidFill>
+                <a:latin typeface="Calibri" pitchFamily="34" charset="0"/>
+                <a:ea typeface="Calibri" pitchFamily="34" charset="-122"/>
+                <a:cs typeface="Calibri" pitchFamily="34" charset="-120"/>
+              </a:rPr>
+              <a:t>/k/</a:t>
+            </a:r>
+            <a:endParaRPr lang="en-US" sz="750" dirty="0"/>
+          </a:p>
+        </p:txBody>
+      </p:sp>
+      <p:sp>
+        <p:nvSpPr>
+          <p:cNvPr id="36" name="Shape 34"/>
+          <p:cNvSpPr/>
+          <p:nvPr/>
+        </p:nvSpPr>
+        <p:spPr>
+          <a:xfrm>
+            <a:off x="3293146" y="4169664"/>
+            <a:ext cx="685800" cy="384048"/>
           </a:xfrm>
           <a:prstGeom prst="rect">
             <a:avLst>
-              <a:gd name="adj" fmla="val 6818"/>
+              <a:gd name="adj" fmla="val 9524"/>
             </a:avLst>
           </a:prstGeom>
           <a:solidFill>
-            <a:srgbClr val="E2E8F0"/>
-          </a:solidFill>
-          <a:ln w="12700">
-            <a:solidFill>
-              <a:srgbClr val="E2E8F0"/>
-            </a:solidFill>
-            <a:prstDash val="solid"/>
-          </a:ln>
-        </p:spPr>
-      </p:sp>
-      <p:sp>
-        <p:nvSpPr>
-          <p:cNvPr id="34" name="Text 32"/>
-          <p:cNvSpPr/>
-          <p:nvPr/>
-        </p:nvSpPr>
-        <p:spPr>
-          <a:xfrm>
-            <a:off x="365760" y="4096512"/>
-            <a:ext cx="1371600" cy="804672"/>
-          </a:xfrm>
-          <a:prstGeom prst="rect">
-            <a:avLst/>
-          </a:prstGeom>
-          <a:noFill/>
-          <a:ln/>
-        </p:spPr>
-        <p:txBody>
-          <a:bodyPr wrap="square" lIns="0" tIns="0" rIns="0" bIns="0" rtlCol="0" anchor="ctr"/>
-          <a:lstStyle/>
-          <a:p>
-            <a:pPr algn="ctr" indent="0" marL="0">
-              <a:buNone/>
-            </a:pPr>
-            <a:r>
-              <a:rPr lang="en-US" sz="1100" b="1" dirty="0">
-                <a:solidFill>
-                  <a:srgbClr val="475569"/>
+            <a:srgbClr val="FFFFFF"/>
+          </a:solidFill>
+          <a:ln w="12700">
+            <a:solidFill>
+              <a:srgbClr val="DB2777"/>
+            </a:solidFill>
+            <a:prstDash val="solid"/>
+          </a:ln>
+        </p:spPr>
+      </p:sp>
+      <p:sp>
+        <p:nvSpPr>
+          <p:cNvPr id="37" name="Text 35"/>
+          <p:cNvSpPr/>
+          <p:nvPr/>
+        </p:nvSpPr>
+        <p:spPr>
+          <a:xfrm>
+            <a:off x="3293146" y="4169664"/>
+            <a:ext cx="685800" cy="384048"/>
+          </a:xfrm>
+          <a:prstGeom prst="rect">
+            <a:avLst/>
+          </a:prstGeom>
+          <a:noFill/>
+          <a:ln/>
+        </p:spPr>
+        <p:txBody>
+          <a:bodyPr wrap="square" lIns="0" tIns="0" rIns="0" bIns="0" rtlCol="0" anchor="ctr"/>
+          <a:lstStyle/>
+          <a:p>
+            <a:pPr algn="ctr" indent="0" marL="0">
+              <a:buNone/>
+            </a:pPr>
+            <a:r>
+              <a:rPr lang="en-US" sz="900" b="1" dirty="0">
+                <a:solidFill>
+                  <a:srgbClr val="9D174D"/>
                 </a:solidFill>
                 <a:latin typeface="Trebuchet MS" pitchFamily="34" charset="0"/>
                 <a:ea typeface="Trebuchet MS" pitchFamily="34" charset="-122"/>
                 <a:cs typeface="Trebuchet MS" pitchFamily="34" charset="-120"/>
               </a:rPr>
-              <a:t>Phonemes</a:t>
-            </a:r>
-            <a:endParaRPr lang="en-US" sz="1100" dirty="0"/>
-          </a:p>
-        </p:txBody>
-      </p:sp>
-      <p:sp>
-        <p:nvSpPr>
-          <p:cNvPr id="35" name="Shape 33"/>
-          <p:cNvSpPr/>
-          <p:nvPr/>
-        </p:nvSpPr>
-        <p:spPr>
-          <a:xfrm>
-            <a:off x="1874520" y="4096512"/>
-            <a:ext cx="6903720" cy="804672"/>
-          </a:xfrm>
-          <a:prstGeom prst="rect">
-            <a:avLst>
-              <a:gd name="adj" fmla="val 6818"/>
-            </a:avLst>
-          </a:prstGeom>
-          <a:solidFill>
-            <a:srgbClr val="FCE7F3"/>
-          </a:solidFill>
-          <a:ln w="12700">
-            <a:solidFill>
-              <a:srgbClr val="DB2777"/>
-            </a:solidFill>
-            <a:prstDash val="solid"/>
-          </a:ln>
-        </p:spPr>
-      </p:sp>
-      <p:sp>
-        <p:nvSpPr>
-          <p:cNvPr id="36" name="Shape 34"/>
-          <p:cNvSpPr/>
-          <p:nvPr/>
-        </p:nvSpPr>
-        <p:spPr>
-          <a:xfrm>
-            <a:off x="2124837" y="4169664"/>
+              <a:t>o</a:t>
+            </a:r>
+            <a:endParaRPr lang="en-US" sz="900" dirty="0"/>
+          </a:p>
+        </p:txBody>
+      </p:sp>
+      <p:sp>
+        <p:nvSpPr>
+          <p:cNvPr id="38" name="Shape 36"/>
+          <p:cNvSpPr/>
+          <p:nvPr/>
+        </p:nvSpPr>
+        <p:spPr>
+          <a:xfrm>
+            <a:off x="4331643" y="4169664"/>
             <a:ext cx="685800" cy="384048"/>
           </a:xfrm>
           <a:prstGeom prst="rect">
@@ -15698,13 +15686,13 @@
       </p:sp>
       <p:sp>
         <p:nvSpPr>
-          <p:cNvPr id="37" name="Text 35"/>
-          <p:cNvSpPr/>
-          <p:nvPr/>
-        </p:nvSpPr>
-        <p:spPr>
-          <a:xfrm>
-            <a:off x="2124837" y="4169664"/>
+          <p:cNvPr id="39" name="Text 37"/>
+          <p:cNvSpPr/>
+          <p:nvPr/>
+        </p:nvSpPr>
+        <p:spPr>
+          <a:xfrm>
+            <a:off x="4331643" y="4169664"/>
             <a:ext cx="685800" cy="384048"/>
           </a:xfrm>
           <a:prstGeom prst="rect">
@@ -15729,7 +15717,7 @@
                 <a:ea typeface="Trebuchet MS" pitchFamily="34" charset="-122"/>
                 <a:cs typeface="Trebuchet MS" pitchFamily="34" charset="-120"/>
               </a:rPr>
-              <a:t>e</a:t>
+              <a:t>s</a:t>
             </a:r>
             <a:endParaRPr lang="en-US" sz="900" dirty="0"/>
           </a:p>
@@ -15737,13 +15725,13 @@
       </p:sp>
       <p:sp>
         <p:nvSpPr>
-          <p:cNvPr id="38" name="Shape 36"/>
-          <p:cNvSpPr/>
-          <p:nvPr/>
-        </p:nvSpPr>
-        <p:spPr>
-          <a:xfrm>
-            <a:off x="3033522" y="4169664"/>
+          <p:cNvPr id="40" name="Shape 38"/>
+          <p:cNvSpPr/>
+          <p:nvPr/>
+        </p:nvSpPr>
+        <p:spPr>
+          <a:xfrm>
+            <a:off x="5370141" y="4169664"/>
             <a:ext cx="685800" cy="384048"/>
           </a:xfrm>
           <a:prstGeom prst="rect">
@@ -15764,13 +15752,13 @@
       </p:sp>
       <p:sp>
         <p:nvSpPr>
-          <p:cNvPr id="39" name="Text 37"/>
-          <p:cNvSpPr/>
-          <p:nvPr/>
-        </p:nvSpPr>
-        <p:spPr>
-          <a:xfrm>
-            <a:off x="3033522" y="4169664"/>
+          <p:cNvPr id="41" name="Text 39"/>
+          <p:cNvSpPr/>
+          <p:nvPr/>
+        </p:nvSpPr>
+        <p:spPr>
+          <a:xfrm>
+            <a:off x="5370141" y="4169664"/>
             <a:ext cx="685800" cy="384048"/>
           </a:xfrm>
           <a:prstGeom prst="rect">
@@ -15795,7 +15783,7 @@
                 <a:ea typeface="Trebuchet MS" pitchFamily="34" charset="-122"/>
                 <a:cs typeface="Trebuchet MS" pitchFamily="34" charset="-120"/>
               </a:rPr>
-              <a:t>l</a:t>
+              <a:t>m</a:t>
             </a:r>
             <a:endParaRPr lang="en-US" sz="900" dirty="0"/>
           </a:p>
@@ -15803,13 +15791,13 @@
       </p:sp>
       <p:sp>
         <p:nvSpPr>
-          <p:cNvPr id="40" name="Shape 38"/>
-          <p:cNvSpPr/>
-          <p:nvPr/>
-        </p:nvSpPr>
-        <p:spPr>
-          <a:xfrm>
-            <a:off x="3942207" y="4169664"/>
+          <p:cNvPr id="42" name="Shape 40"/>
+          <p:cNvSpPr/>
+          <p:nvPr/>
+        </p:nvSpPr>
+        <p:spPr>
+          <a:xfrm>
+            <a:off x="6408638" y="4169664"/>
             <a:ext cx="685800" cy="384048"/>
           </a:xfrm>
           <a:prstGeom prst="rect">
@@ -15830,13 +15818,13 @@
       </p:sp>
       <p:sp>
         <p:nvSpPr>
-          <p:cNvPr id="41" name="Text 39"/>
-          <p:cNvSpPr/>
-          <p:nvPr/>
-        </p:nvSpPr>
-        <p:spPr>
-          <a:xfrm>
-            <a:off x="3942207" y="4169664"/>
+          <p:cNvPr id="43" name="Text 41"/>
+          <p:cNvSpPr/>
+          <p:nvPr/>
+        </p:nvSpPr>
+        <p:spPr>
+          <a:xfrm>
+            <a:off x="6408638" y="4169664"/>
             <a:ext cx="685800" cy="384048"/>
           </a:xfrm>
           <a:prstGeom prst="rect">
@@ -15861,7 +15849,7 @@
                 <a:ea typeface="Trebuchet MS" pitchFamily="34" charset="-122"/>
                 <a:cs typeface="Trebuchet MS" pitchFamily="34" charset="-120"/>
               </a:rPr>
-              <a:t>e</a:t>
+              <a:t>i</a:t>
             </a:r>
             <a:endParaRPr lang="en-US" sz="900" dirty="0"/>
           </a:p>
@@ -15869,13 +15857,13 @@
       </p:sp>
       <p:sp>
         <p:nvSpPr>
-          <p:cNvPr id="42" name="Shape 40"/>
-          <p:cNvSpPr/>
-          <p:nvPr/>
-        </p:nvSpPr>
-        <p:spPr>
-          <a:xfrm>
-            <a:off x="4850892" y="4169664"/>
+          <p:cNvPr id="44" name="Shape 42"/>
+          <p:cNvSpPr/>
+          <p:nvPr/>
+        </p:nvSpPr>
+        <p:spPr>
+          <a:xfrm>
+            <a:off x="7447135" y="4169664"/>
             <a:ext cx="685800" cy="384048"/>
           </a:xfrm>
           <a:prstGeom prst="rect">
@@ -15896,13 +15884,13 @@
       </p:sp>
       <p:sp>
         <p:nvSpPr>
-          <p:cNvPr id="43" name="Text 41"/>
-          <p:cNvSpPr/>
-          <p:nvPr/>
-        </p:nvSpPr>
-        <p:spPr>
-          <a:xfrm>
-            <a:off x="4850892" y="4169664"/>
+          <p:cNvPr id="45" name="Text 43"/>
+          <p:cNvSpPr/>
+          <p:nvPr/>
+        </p:nvSpPr>
+        <p:spPr>
+          <a:xfrm>
+            <a:off x="7447135" y="4169664"/>
             <a:ext cx="685800" cy="384048"/>
           </a:xfrm>
           <a:prstGeom prst="rect">
@@ -15935,13 +15923,13 @@
       </p:sp>
       <p:sp>
         <p:nvSpPr>
-          <p:cNvPr id="44" name="Text 42"/>
-          <p:cNvSpPr/>
-          <p:nvPr/>
-        </p:nvSpPr>
-        <p:spPr>
-          <a:xfrm>
-            <a:off x="4850892" y="4572000"/>
+          <p:cNvPr id="46" name="Text 44"/>
+          <p:cNvSpPr/>
+          <p:nvPr/>
+        </p:nvSpPr>
+        <p:spPr>
+          <a:xfrm>
+            <a:off x="7447135" y="4572000"/>
             <a:ext cx="685800" cy="219456"/>
           </a:xfrm>
           <a:prstGeom prst="rect">
@@ -15967,243 +15955,6 @@
                 <a:cs typeface="Calibri" pitchFamily="34" charset="-120"/>
               </a:rPr>
               <a:t>/k/</a:t>
-            </a:r>
-            <a:endParaRPr lang="en-US" sz="750" dirty="0"/>
-          </a:p>
-        </p:txBody>
-      </p:sp>
-      <p:sp>
-        <p:nvSpPr>
-          <p:cNvPr id="45" name="Shape 43"/>
-          <p:cNvSpPr/>
-          <p:nvPr/>
-        </p:nvSpPr>
-        <p:spPr>
-          <a:xfrm>
-            <a:off x="5759577" y="4169664"/>
-            <a:ext cx="685800" cy="384048"/>
-          </a:xfrm>
-          <a:prstGeom prst="rect">
-            <a:avLst>
-              <a:gd name="adj" fmla="val 9524"/>
-            </a:avLst>
-          </a:prstGeom>
-          <a:solidFill>
-            <a:srgbClr val="FFFFFF"/>
-          </a:solidFill>
-          <a:ln w="12700">
-            <a:solidFill>
-              <a:srgbClr val="DB2777"/>
-            </a:solidFill>
-            <a:prstDash val="solid"/>
-          </a:ln>
-        </p:spPr>
-      </p:sp>
-      <p:sp>
-        <p:nvSpPr>
-          <p:cNvPr id="46" name="Text 44"/>
-          <p:cNvSpPr/>
-          <p:nvPr/>
-        </p:nvSpPr>
-        <p:spPr>
-          <a:xfrm>
-            <a:off x="5759577" y="4169664"/>
-            <a:ext cx="685800" cy="384048"/>
-          </a:xfrm>
-          <a:prstGeom prst="rect">
-            <a:avLst/>
-          </a:prstGeom>
-          <a:noFill/>
-          <a:ln/>
-        </p:spPr>
-        <p:txBody>
-          <a:bodyPr wrap="square" lIns="0" tIns="0" rIns="0" bIns="0" rtlCol="0" anchor="ctr"/>
-          <a:lstStyle/>
-          <a:p>
-            <a:pPr algn="ctr" indent="0" marL="0">
-              <a:buNone/>
-            </a:pPr>
-            <a:r>
-              <a:rPr lang="en-US" sz="900" b="1" dirty="0">
-                <a:solidFill>
-                  <a:srgbClr val="9D174D"/>
-                </a:solidFill>
-                <a:latin typeface="Trebuchet MS" pitchFamily="34" charset="0"/>
-                <a:ea typeface="Trebuchet MS" pitchFamily="34" charset="-122"/>
-                <a:cs typeface="Trebuchet MS" pitchFamily="34" charset="-120"/>
-              </a:rPr>
-              <a:t>t</a:t>
-            </a:r>
-            <a:endParaRPr lang="en-US" sz="900" dirty="0"/>
-          </a:p>
-        </p:txBody>
-      </p:sp>
-      <p:sp>
-        <p:nvSpPr>
-          <p:cNvPr id="47" name="Shape 45"/>
-          <p:cNvSpPr/>
-          <p:nvPr/>
-        </p:nvSpPr>
-        <p:spPr>
-          <a:xfrm>
-            <a:off x="6668262" y="4169664"/>
-            <a:ext cx="685800" cy="384048"/>
-          </a:xfrm>
-          <a:prstGeom prst="rect">
-            <a:avLst>
-              <a:gd name="adj" fmla="val 9524"/>
-            </a:avLst>
-          </a:prstGeom>
-          <a:solidFill>
-            <a:srgbClr val="FFFFFF"/>
-          </a:solidFill>
-          <a:ln w="12700">
-            <a:solidFill>
-              <a:srgbClr val="DB2777"/>
-            </a:solidFill>
-            <a:prstDash val="solid"/>
-          </a:ln>
-        </p:spPr>
-      </p:sp>
-      <p:sp>
-        <p:nvSpPr>
-          <p:cNvPr id="48" name="Text 46"/>
-          <p:cNvSpPr/>
-          <p:nvPr/>
-        </p:nvSpPr>
-        <p:spPr>
-          <a:xfrm>
-            <a:off x="6668262" y="4169664"/>
-            <a:ext cx="685800" cy="384048"/>
-          </a:xfrm>
-          <a:prstGeom prst="rect">
-            <a:avLst/>
-          </a:prstGeom>
-          <a:noFill/>
-          <a:ln/>
-        </p:spPr>
-        <p:txBody>
-          <a:bodyPr wrap="square" lIns="0" tIns="0" rIns="0" bIns="0" rtlCol="0" anchor="ctr"/>
-          <a:lstStyle/>
-          <a:p>
-            <a:pPr algn="ctr" indent="0" marL="0">
-              <a:buNone/>
-            </a:pPr>
-            <a:r>
-              <a:rPr lang="en-US" sz="900" b="1" dirty="0">
-                <a:solidFill>
-                  <a:srgbClr val="9D174D"/>
-                </a:solidFill>
-                <a:latin typeface="Trebuchet MS" pitchFamily="34" charset="0"/>
-                <a:ea typeface="Trebuchet MS" pitchFamily="34" charset="-122"/>
-                <a:cs typeface="Trebuchet MS" pitchFamily="34" charset="-120"/>
-              </a:rPr>
-              <a:t>r</a:t>
-            </a:r>
-            <a:endParaRPr lang="en-US" sz="900" dirty="0"/>
-          </a:p>
-        </p:txBody>
-      </p:sp>
-      <p:sp>
-        <p:nvSpPr>
-          <p:cNvPr id="49" name="Shape 47"/>
-          <p:cNvSpPr/>
-          <p:nvPr/>
-        </p:nvSpPr>
-        <p:spPr>
-          <a:xfrm>
-            <a:off x="7576947" y="4169664"/>
-            <a:ext cx="685800" cy="384048"/>
-          </a:xfrm>
-          <a:prstGeom prst="rect">
-            <a:avLst>
-              <a:gd name="adj" fmla="val 9524"/>
-            </a:avLst>
-          </a:prstGeom>
-          <a:solidFill>
-            <a:srgbClr val="FFFFFF"/>
-          </a:solidFill>
-          <a:ln w="12700">
-            <a:solidFill>
-              <a:srgbClr val="DB2777"/>
-            </a:solidFill>
-            <a:prstDash val="solid"/>
-          </a:ln>
-        </p:spPr>
-      </p:sp>
-      <p:sp>
-        <p:nvSpPr>
-          <p:cNvPr id="50" name="Text 48"/>
-          <p:cNvSpPr/>
-          <p:nvPr/>
-        </p:nvSpPr>
-        <p:spPr>
-          <a:xfrm>
-            <a:off x="7576947" y="4169664"/>
-            <a:ext cx="685800" cy="384048"/>
-          </a:xfrm>
-          <a:prstGeom prst="rect">
-            <a:avLst/>
-          </a:prstGeom>
-          <a:noFill/>
-          <a:ln/>
-        </p:spPr>
-        <p:txBody>
-          <a:bodyPr wrap="square" lIns="0" tIns="0" rIns="0" bIns="0" rtlCol="0" anchor="ctr"/>
-          <a:lstStyle/>
-          <a:p>
-            <a:pPr algn="ctr" indent="0" marL="0">
-              <a:buNone/>
-            </a:pPr>
-            <a:r>
-              <a:rPr lang="en-US" sz="900" b="1" dirty="0">
-                <a:solidFill>
-                  <a:srgbClr val="9D174D"/>
-                </a:solidFill>
-                <a:latin typeface="Trebuchet MS" pitchFamily="34" charset="0"/>
-                <a:ea typeface="Trebuchet MS" pitchFamily="34" charset="-122"/>
-                <a:cs typeface="Trebuchet MS" pitchFamily="34" charset="-120"/>
-              </a:rPr>
-              <a:t>ic</a:t>
-            </a:r>
-            <a:endParaRPr lang="en-US" sz="900" dirty="0"/>
-          </a:p>
-        </p:txBody>
-      </p:sp>
-      <p:sp>
-        <p:nvSpPr>
-          <p:cNvPr id="51" name="Text 49"/>
-          <p:cNvSpPr/>
-          <p:nvPr/>
-        </p:nvSpPr>
-        <p:spPr>
-          <a:xfrm>
-            <a:off x="7576947" y="4572000"/>
-            <a:ext cx="685800" cy="219456"/>
-          </a:xfrm>
-          <a:prstGeom prst="rect">
-            <a:avLst/>
-          </a:prstGeom>
-          <a:noFill/>
-          <a:ln/>
-        </p:spPr>
-        <p:txBody>
-          <a:bodyPr wrap="square" lIns="0" tIns="0" rIns="0" bIns="0" rtlCol="0" anchor="t"/>
-          <a:lstStyle/>
-          <a:p>
-            <a:pPr algn="ctr" indent="0" marL="0">
-              <a:buNone/>
-            </a:pPr>
-            <a:r>
-              <a:rPr lang="en-US" sz="750" i="1" dirty="0">
-                <a:solidFill>
-                  <a:srgbClr val="94A3B8"/>
-                </a:solidFill>
-                <a:latin typeface="Calibri" pitchFamily="34" charset="0"/>
-                <a:ea typeface="Calibri" pitchFamily="34" charset="-122"/>
-                <a:cs typeface="Calibri" pitchFamily="34" charset="-120"/>
-              </a:rPr>
-              <a:t>/ik/</a:t>
             </a:r>
             <a:endParaRPr lang="en-US" sz="750" dirty="0"/>
           </a:p>
@@ -17546,7 +17297,7 @@
                 <a:ea typeface="Calibri" pitchFamily="34" charset="-122"/>
                 <a:cs typeface="Calibri" pitchFamily="34" charset="-120"/>
               </a:rPr>
-              <a:t>heroic</a:t>
+              <a:t>volcanic</a:t>
             </a:r>
             <a:pPr algn="l" indent="0" marL="0">
               <a:buNone/>
@@ -17560,7 +17311,7 @@
                 <a:ea typeface="Calibri" pitchFamily="34" charset="-122"/>
                 <a:cs typeface="Calibri" pitchFamily="34" charset="-120"/>
               </a:rPr>
-              <a:t> diver explored the </a:t>
+              <a:t> eruption was a dramatic and </a:t>
             </a:r>
             <a:pPr algn="l" indent="0" marL="0">
               <a:buNone/>
@@ -17577,7 +17328,7 @@
                 <a:ea typeface="Calibri" pitchFamily="34" charset="-122"/>
                 <a:cs typeface="Calibri" pitchFamily="34" charset="-120"/>
               </a:rPr>
-              <a:t>oceanic</a:t>
+              <a:t>rhythmic</a:t>
             </a:r>
             <a:pPr algn="l" indent="0" marL="0">
               <a:buNone/>
@@ -17591,7 +17342,7 @@
                 <a:ea typeface="Calibri" pitchFamily="34" charset="-122"/>
                 <a:cs typeface="Calibri" pitchFamily="34" charset="-120"/>
               </a:rPr>
-              <a:t> depths and discovered an </a:t>
+              <a:t> explosion that lit up the dark, </a:t>
             </a:r>
             <a:pPr algn="l" indent="0" marL="0">
               <a:buNone/>
@@ -17608,7 +17359,7 @@
                 <a:ea typeface="Calibri" pitchFamily="34" charset="-122"/>
                 <a:cs typeface="Calibri" pitchFamily="34" charset="-120"/>
               </a:rPr>
-              <a:t>atomic</a:t>
+              <a:t>electric</a:t>
             </a:r>
             <a:pPr algn="l" indent="0" marL="0">
               <a:buNone/>
@@ -17622,7 +17373,7 @@
                 <a:ea typeface="Calibri" pitchFamily="34" charset="-122"/>
                 <a:cs typeface="Calibri" pitchFamily="34" charset="-120"/>
               </a:rPr>
-              <a:t>-sized creature living on the reef.</a:t>
+              <a:t> sky.</a:t>
             </a:r>
             <a:endParaRPr lang="en-US" sz="1800" dirty="0"/>
           </a:p>
@@ -17777,7 +17528,7 @@
                 <a:ea typeface="Trebuchet MS" pitchFamily="34" charset="-122"/>
                 <a:cs typeface="Trebuchet MS" pitchFamily="34" charset="-120"/>
               </a:rPr>
-              <a:t>heroic</a:t>
+              <a:t>volcanic</a:t>
             </a:r>
             <a:endParaRPr lang="en-US" sz="1400" dirty="0"/>
           </a:p>
@@ -17905,7 +17656,7 @@
                 <a:ea typeface="Trebuchet MS" pitchFamily="34" charset="-122"/>
                 <a:cs typeface="Trebuchet MS" pitchFamily="34" charset="-120"/>
               </a:rPr>
-              <a:t>oceanic</a:t>
+              <a:t>rhythmic</a:t>
             </a:r>
             <a:endParaRPr lang="en-US" sz="1400" dirty="0"/>
           </a:p>
@@ -18033,7 +17784,7 @@
                 <a:ea typeface="Trebuchet MS" pitchFamily="34" charset="-122"/>
                 <a:cs typeface="Trebuchet MS" pitchFamily="34" charset="-120"/>
               </a:rPr>
-              <a:t>atomic</a:t>
+              <a:t>electric</a:t>
             </a:r>
             <a:endParaRPr lang="en-US" sz="1400" dirty="0"/>
           </a:p>
@@ -18503,7 +18254,7 @@
                 <a:ea typeface="Trebuchet MS" pitchFamily="34" charset="-122"/>
                 <a:cs typeface="Trebuchet MS" pitchFamily="34" charset="-120"/>
               </a:rPr>
-              <a:t>heroic</a:t>
+              <a:t>volcanic</a:t>
             </a:r>
             <a:endParaRPr lang="en-US" sz="2800" dirty="0"/>
           </a:p>
@@ -19330,7 +19081,7 @@
                 <a:ea typeface="Trebuchet MS" pitchFamily="34" charset="-122"/>
                 <a:cs typeface="Trebuchet MS" pitchFamily="34" charset="-120"/>
               </a:rPr>
-              <a:t>heroic</a:t>
+              <a:t>volcanic</a:t>
             </a:r>
             <a:endParaRPr lang="en-US" sz="2800" dirty="0"/>
           </a:p>
@@ -19469,7 +19220,7 @@
                 <a:ea typeface="Trebuchet MS" pitchFamily="34" charset="-122"/>
                 <a:cs typeface="Trebuchet MS" pitchFamily="34" charset="-120"/>
               </a:rPr>
-              <a:t>hero</a:t>
+              <a:t>volcan</a:t>
             </a:r>
             <a:endParaRPr lang="en-US" sz="1300" dirty="0"/>
           </a:p>
@@ -19508,7 +19259,7 @@
                 <a:ea typeface="Calibri" pitchFamily="34" charset="-122"/>
                 <a:cs typeface="Calibri" pitchFamily="34" charset="-120"/>
               </a:rPr>
-              <a:t>a brave person</a:t>
+              <a:t>volcano</a:t>
             </a:r>
             <a:endParaRPr lang="en-US" sz="850" dirty="0"/>
           </a:p>
@@ -19620,7 +19371,7 @@
                 <a:ea typeface="Calibri" pitchFamily="34" charset="-122"/>
                 <a:cs typeface="Calibri" pitchFamily="34" charset="-120"/>
               </a:rPr>
-              <a:t>relating to</a:t>
+              <a:t>relating to, having the nature of</a:t>
             </a:r>
             <a:endParaRPr lang="en-US" sz="850" dirty="0"/>
           </a:p>
@@ -20315,7 +20066,7 @@
                 <a:ea typeface="Trebuchet MS" pitchFamily="34" charset="-122"/>
                 <a:cs typeface="Trebuchet MS" pitchFamily="34" charset="-120"/>
               </a:rPr>
-              <a:t>heroic</a:t>
+              <a:t>volcanic</a:t>
             </a:r>
             <a:endParaRPr lang="en-US" sz="2800" dirty="0"/>
           </a:p>
@@ -20454,7 +20205,7 @@
                 <a:ea typeface="Trebuchet MS" pitchFamily="34" charset="-122"/>
                 <a:cs typeface="Trebuchet MS" pitchFamily="34" charset="-120"/>
               </a:rPr>
-              <a:t>hero</a:t>
+              <a:t>volcan</a:t>
             </a:r>
             <a:endParaRPr lang="en-US" sz="1300" dirty="0"/>
           </a:p>
@@ -20493,7 +20244,7 @@
                 <a:ea typeface="Calibri" pitchFamily="34" charset="-122"/>
                 <a:cs typeface="Calibri" pitchFamily="34" charset="-120"/>
               </a:rPr>
-              <a:t>a brave person</a:t>
+              <a:t>volcano</a:t>
             </a:r>
             <a:endParaRPr lang="en-US" sz="850" dirty="0"/>
           </a:p>
@@ -20605,7 +20356,7 @@
                 <a:ea typeface="Calibri" pitchFamily="34" charset="-122"/>
                 <a:cs typeface="Calibri" pitchFamily="34" charset="-120"/>
               </a:rPr>
-              <a:t>relating to</a:t>
+              <a:t>relating to, having the nature of</a:t>
             </a:r>
             <a:endParaRPr lang="en-US" sz="850" dirty="0"/>
           </a:p>
@@ -20764,7 +20515,7 @@
                 <a:ea typeface="Trebuchet MS" pitchFamily="34" charset="-122"/>
                 <a:cs typeface="Trebuchet MS" pitchFamily="34" charset="-120"/>
               </a:rPr>
-              <a:t>he</a:t>
+              <a:t>vol</a:t>
             </a:r>
             <a:endParaRPr lang="en-US" sz="1400" dirty="0"/>
           </a:p>
@@ -20869,7 +20620,7 @@
                 <a:ea typeface="Trebuchet MS" pitchFamily="34" charset="-122"/>
                 <a:cs typeface="Trebuchet MS" pitchFamily="34" charset="-120"/>
               </a:rPr>
-              <a:t>ro</a:t>
+              <a:t>can</a:t>
             </a:r>
             <a:endParaRPr lang="en-US" sz="1400" dirty="0"/>
           </a:p>
@@ -21537,7 +21288,7 @@
                 <a:ea typeface="Trebuchet MS" pitchFamily="34" charset="-122"/>
                 <a:cs typeface="Trebuchet MS" pitchFamily="34" charset="-120"/>
               </a:rPr>
-              <a:t>heroic</a:t>
+              <a:t>volcanic</a:t>
             </a:r>
             <a:endParaRPr lang="en-US" sz="2800" dirty="0"/>
           </a:p>
@@ -21676,7 +21427,7 @@
                 <a:ea typeface="Trebuchet MS" pitchFamily="34" charset="-122"/>
                 <a:cs typeface="Trebuchet MS" pitchFamily="34" charset="-120"/>
               </a:rPr>
-              <a:t>hero</a:t>
+              <a:t>volcan</a:t>
             </a:r>
             <a:endParaRPr lang="en-US" sz="1300" dirty="0"/>
           </a:p>
@@ -21715,7 +21466,7 @@
                 <a:ea typeface="Calibri" pitchFamily="34" charset="-122"/>
                 <a:cs typeface="Calibri" pitchFamily="34" charset="-120"/>
               </a:rPr>
-              <a:t>a brave person</a:t>
+              <a:t>volcano</a:t>
             </a:r>
             <a:endParaRPr lang="en-US" sz="850" dirty="0"/>
           </a:p>
@@ -21827,7 +21578,7 @@
                 <a:ea typeface="Calibri" pitchFamily="34" charset="-122"/>
                 <a:cs typeface="Calibri" pitchFamily="34" charset="-120"/>
               </a:rPr>
-              <a:t>relating to</a:t>
+              <a:t>relating to, having the nature of</a:t>
             </a:r>
             <a:endParaRPr lang="en-US" sz="850" dirty="0"/>
           </a:p>
@@ -21986,7 +21737,7 @@
                 <a:ea typeface="Trebuchet MS" pitchFamily="34" charset="-122"/>
                 <a:cs typeface="Trebuchet MS" pitchFamily="34" charset="-120"/>
               </a:rPr>
-              <a:t>he</a:t>
+              <a:t>vol</a:t>
             </a:r>
             <a:endParaRPr lang="en-US" sz="1400" dirty="0"/>
           </a:p>
@@ -22091,7 +21842,7 @@
                 <a:ea typeface="Trebuchet MS" pitchFamily="34" charset="-122"/>
                 <a:cs typeface="Trebuchet MS" pitchFamily="34" charset="-120"/>
               </a:rPr>
-              <a:t>ro</a:t>
+              <a:t>can</a:t>
             </a:r>
             <a:endParaRPr lang="en-US" sz="1400" dirty="0"/>
           </a:p>
@@ -22303,7 +22054,7 @@
         </p:nvSpPr>
         <p:spPr>
           <a:xfrm>
-            <a:off x="2427732" y="4169664"/>
+            <a:off x="2023872" y="4169664"/>
             <a:ext cx="685800" cy="384048"/>
           </a:xfrm>
           <a:prstGeom prst="rect">
@@ -22330,7 +22081,7 @@
         </p:nvSpPr>
         <p:spPr>
           <a:xfrm>
-            <a:off x="2427732" y="4169664"/>
+            <a:off x="2023872" y="4169664"/>
             <a:ext cx="685800" cy="384048"/>
           </a:xfrm>
           <a:prstGeom prst="rect">
@@ -22355,7 +22106,7 @@
                 <a:ea typeface="Trebuchet MS" pitchFamily="34" charset="-122"/>
                 <a:cs typeface="Trebuchet MS" pitchFamily="34" charset="-120"/>
               </a:rPr>
-              <a:t>h</a:t>
+              <a:t>v</a:t>
             </a:r>
             <a:endParaRPr lang="en-US" sz="900" dirty="0"/>
           </a:p>
@@ -22369,7 +22120,7 @@
         </p:nvSpPr>
         <p:spPr>
           <a:xfrm>
-            <a:off x="3639312" y="4169664"/>
+            <a:off x="2831592" y="4169664"/>
             <a:ext cx="685800" cy="384048"/>
           </a:xfrm>
           <a:prstGeom prst="rect">
@@ -22396,7 +22147,7 @@
         </p:nvSpPr>
         <p:spPr>
           <a:xfrm>
-            <a:off x="3639312" y="4169664"/>
+            <a:off x="2831592" y="4169664"/>
             <a:ext cx="685800" cy="384048"/>
           </a:xfrm>
           <a:prstGeom prst="rect">
@@ -22421,7 +22172,7 @@
                 <a:ea typeface="Trebuchet MS" pitchFamily="34" charset="-122"/>
                 <a:cs typeface="Trebuchet MS" pitchFamily="34" charset="-120"/>
               </a:rPr>
-              <a:t>e</a:t>
+              <a:t>o</a:t>
             </a:r>
             <a:endParaRPr lang="en-US" sz="900" dirty="0"/>
           </a:p>
@@ -22435,7 +22186,7 @@
         </p:nvSpPr>
         <p:spPr>
           <a:xfrm>
-            <a:off x="4850892" y="4169664"/>
+            <a:off x="3639312" y="4169664"/>
             <a:ext cx="685800" cy="384048"/>
           </a:xfrm>
           <a:prstGeom prst="rect">
@@ -22462,7 +22213,7 @@
         </p:nvSpPr>
         <p:spPr>
           <a:xfrm>
-            <a:off x="4850892" y="4169664"/>
+            <a:off x="3639312" y="4169664"/>
             <a:ext cx="685800" cy="384048"/>
           </a:xfrm>
           <a:prstGeom prst="rect">
@@ -22487,7 +22238,7 @@
                 <a:ea typeface="Trebuchet MS" pitchFamily="34" charset="-122"/>
                 <a:cs typeface="Trebuchet MS" pitchFamily="34" charset="-120"/>
               </a:rPr>
-              <a:t>r</a:t>
+              <a:t>l</a:t>
             </a:r>
             <a:endParaRPr lang="en-US" sz="900" dirty="0"/>
           </a:p>
@@ -22501,7 +22252,7 @@
         </p:nvSpPr>
         <p:spPr>
           <a:xfrm>
-            <a:off x="6062472" y="4169664"/>
+            <a:off x="4447032" y="4169664"/>
             <a:ext cx="685800" cy="384048"/>
           </a:xfrm>
           <a:prstGeom prst="rect">
@@ -22528,7 +22279,7 @@
         </p:nvSpPr>
         <p:spPr>
           <a:xfrm>
-            <a:off x="6062472" y="4169664"/>
+            <a:off x="4447032" y="4169664"/>
             <a:ext cx="685800" cy="384048"/>
           </a:xfrm>
           <a:prstGeom prst="rect">
@@ -22553,7 +22304,7 @@
                 <a:ea typeface="Trebuchet MS" pitchFamily="34" charset="-122"/>
                 <a:cs typeface="Trebuchet MS" pitchFamily="34" charset="-120"/>
               </a:rPr>
-              <a:t>o</a:t>
+              <a:t>c</a:t>
             </a:r>
             <a:endParaRPr lang="en-US" sz="900" dirty="0"/>
           </a:p>
@@ -22561,13 +22312,52 @@
       </p:sp>
       <p:sp>
         <p:nvSpPr>
-          <p:cNvPr id="44" name="Shape 42"/>
-          <p:cNvSpPr/>
-          <p:nvPr/>
-        </p:nvSpPr>
-        <p:spPr>
-          <a:xfrm>
-            <a:off x="7274052" y="4169664"/>
+          <p:cNvPr id="44" name="Text 42"/>
+          <p:cNvSpPr/>
+          <p:nvPr/>
+        </p:nvSpPr>
+        <p:spPr>
+          <a:xfrm>
+            <a:off x="4447032" y="4572000"/>
+            <a:ext cx="685800" cy="219456"/>
+          </a:xfrm>
+          <a:prstGeom prst="rect">
+            <a:avLst/>
+          </a:prstGeom>
+          <a:noFill/>
+          <a:ln/>
+        </p:spPr>
+        <p:txBody>
+          <a:bodyPr wrap="square" lIns="0" tIns="0" rIns="0" bIns="0" rtlCol="0" anchor="t"/>
+          <a:lstStyle/>
+          <a:p>
+            <a:pPr algn="ctr" indent="0" marL="0">
+              <a:buNone/>
+            </a:pPr>
+            <a:r>
+              <a:rPr lang="en-US" sz="750" i="1" dirty="0">
+                <a:solidFill>
+                  <a:srgbClr val="94A3B8"/>
+                </a:solidFill>
+                <a:latin typeface="Calibri" pitchFamily="34" charset="0"/>
+                <a:ea typeface="Calibri" pitchFamily="34" charset="-122"/>
+                <a:cs typeface="Calibri" pitchFamily="34" charset="-120"/>
+              </a:rPr>
+              <a:t>/k/</a:t>
+            </a:r>
+            <a:endParaRPr lang="en-US" sz="750" dirty="0"/>
+          </a:p>
+        </p:txBody>
+      </p:sp>
+      <p:sp>
+        <p:nvSpPr>
+          <p:cNvPr id="45" name="Shape 43"/>
+          <p:cNvSpPr/>
+          <p:nvPr/>
+        </p:nvSpPr>
+        <p:spPr>
+          <a:xfrm>
+            <a:off x="5254752" y="4169664"/>
             <a:ext cx="685800" cy="384048"/>
           </a:xfrm>
           <a:prstGeom prst="rect">
@@ -22588,13 +22378,13 @@
       </p:sp>
       <p:sp>
         <p:nvSpPr>
-          <p:cNvPr id="45" name="Text 43"/>
-          <p:cNvSpPr/>
-          <p:nvPr/>
-        </p:nvSpPr>
-        <p:spPr>
-          <a:xfrm>
-            <a:off x="7274052" y="4169664"/>
+          <p:cNvPr id="46" name="Text 44"/>
+          <p:cNvSpPr/>
+          <p:nvPr/>
+        </p:nvSpPr>
+        <p:spPr>
+          <a:xfrm>
+            <a:off x="5254752" y="4169664"/>
             <a:ext cx="685800" cy="384048"/>
           </a:xfrm>
           <a:prstGeom prst="rect">
@@ -22619,7 +22409,7 @@
                 <a:ea typeface="Trebuchet MS" pitchFamily="34" charset="-122"/>
                 <a:cs typeface="Trebuchet MS" pitchFamily="34" charset="-120"/>
               </a:rPr>
-              <a:t>ic</a:t>
+              <a:t>a</a:t>
             </a:r>
             <a:endParaRPr lang="en-US" sz="900" dirty="0"/>
           </a:p>
@@ -22627,13 +22417,211 @@
       </p:sp>
       <p:sp>
         <p:nvSpPr>
-          <p:cNvPr id="46" name="Text 44"/>
-          <p:cNvSpPr/>
-          <p:nvPr/>
-        </p:nvSpPr>
-        <p:spPr>
-          <a:xfrm>
-            <a:off x="7274052" y="4572000"/>
+          <p:cNvPr id="47" name="Shape 45"/>
+          <p:cNvSpPr/>
+          <p:nvPr/>
+        </p:nvSpPr>
+        <p:spPr>
+          <a:xfrm>
+            <a:off x="6062472" y="4169664"/>
+            <a:ext cx="685800" cy="384048"/>
+          </a:xfrm>
+          <a:prstGeom prst="rect">
+            <a:avLst>
+              <a:gd name="adj" fmla="val 9524"/>
+            </a:avLst>
+          </a:prstGeom>
+          <a:solidFill>
+            <a:srgbClr val="FFFFFF"/>
+          </a:solidFill>
+          <a:ln w="12700">
+            <a:solidFill>
+              <a:srgbClr val="DB2777"/>
+            </a:solidFill>
+            <a:prstDash val="solid"/>
+          </a:ln>
+        </p:spPr>
+      </p:sp>
+      <p:sp>
+        <p:nvSpPr>
+          <p:cNvPr id="48" name="Text 46"/>
+          <p:cNvSpPr/>
+          <p:nvPr/>
+        </p:nvSpPr>
+        <p:spPr>
+          <a:xfrm>
+            <a:off x="6062472" y="4169664"/>
+            <a:ext cx="685800" cy="384048"/>
+          </a:xfrm>
+          <a:prstGeom prst="rect">
+            <a:avLst/>
+          </a:prstGeom>
+          <a:noFill/>
+          <a:ln/>
+        </p:spPr>
+        <p:txBody>
+          <a:bodyPr wrap="square" lIns="0" tIns="0" rIns="0" bIns="0" rtlCol="0" anchor="ctr"/>
+          <a:lstStyle/>
+          <a:p>
+            <a:pPr algn="ctr" indent="0" marL="0">
+              <a:buNone/>
+            </a:pPr>
+            <a:r>
+              <a:rPr lang="en-US" sz="900" b="1" dirty="0">
+                <a:solidFill>
+                  <a:srgbClr val="9D174D"/>
+                </a:solidFill>
+                <a:latin typeface="Trebuchet MS" pitchFamily="34" charset="0"/>
+                <a:ea typeface="Trebuchet MS" pitchFamily="34" charset="-122"/>
+                <a:cs typeface="Trebuchet MS" pitchFamily="34" charset="-120"/>
+              </a:rPr>
+              <a:t>n</a:t>
+            </a:r>
+            <a:endParaRPr lang="en-US" sz="900" dirty="0"/>
+          </a:p>
+        </p:txBody>
+      </p:sp>
+      <p:sp>
+        <p:nvSpPr>
+          <p:cNvPr id="49" name="Shape 47"/>
+          <p:cNvSpPr/>
+          <p:nvPr/>
+        </p:nvSpPr>
+        <p:spPr>
+          <a:xfrm>
+            <a:off x="6870192" y="4169664"/>
+            <a:ext cx="685800" cy="384048"/>
+          </a:xfrm>
+          <a:prstGeom prst="rect">
+            <a:avLst>
+              <a:gd name="adj" fmla="val 9524"/>
+            </a:avLst>
+          </a:prstGeom>
+          <a:solidFill>
+            <a:srgbClr val="FFFFFF"/>
+          </a:solidFill>
+          <a:ln w="12700">
+            <a:solidFill>
+              <a:srgbClr val="DB2777"/>
+            </a:solidFill>
+            <a:prstDash val="solid"/>
+          </a:ln>
+        </p:spPr>
+      </p:sp>
+      <p:sp>
+        <p:nvSpPr>
+          <p:cNvPr id="50" name="Text 48"/>
+          <p:cNvSpPr/>
+          <p:nvPr/>
+        </p:nvSpPr>
+        <p:spPr>
+          <a:xfrm>
+            <a:off x="6870192" y="4169664"/>
+            <a:ext cx="685800" cy="384048"/>
+          </a:xfrm>
+          <a:prstGeom prst="rect">
+            <a:avLst/>
+          </a:prstGeom>
+          <a:noFill/>
+          <a:ln/>
+        </p:spPr>
+        <p:txBody>
+          <a:bodyPr wrap="square" lIns="0" tIns="0" rIns="0" bIns="0" rtlCol="0" anchor="ctr"/>
+          <a:lstStyle/>
+          <a:p>
+            <a:pPr algn="ctr" indent="0" marL="0">
+              <a:buNone/>
+            </a:pPr>
+            <a:r>
+              <a:rPr lang="en-US" sz="900" b="1" dirty="0">
+                <a:solidFill>
+                  <a:srgbClr val="9D174D"/>
+                </a:solidFill>
+                <a:latin typeface="Trebuchet MS" pitchFamily="34" charset="0"/>
+                <a:ea typeface="Trebuchet MS" pitchFamily="34" charset="-122"/>
+                <a:cs typeface="Trebuchet MS" pitchFamily="34" charset="-120"/>
+              </a:rPr>
+              <a:t>i</a:t>
+            </a:r>
+            <a:endParaRPr lang="en-US" sz="900" dirty="0"/>
+          </a:p>
+        </p:txBody>
+      </p:sp>
+      <p:sp>
+        <p:nvSpPr>
+          <p:cNvPr id="51" name="Shape 49"/>
+          <p:cNvSpPr/>
+          <p:nvPr/>
+        </p:nvSpPr>
+        <p:spPr>
+          <a:xfrm>
+            <a:off x="7677912" y="4169664"/>
+            <a:ext cx="685800" cy="384048"/>
+          </a:xfrm>
+          <a:prstGeom prst="rect">
+            <a:avLst>
+              <a:gd name="adj" fmla="val 9524"/>
+            </a:avLst>
+          </a:prstGeom>
+          <a:solidFill>
+            <a:srgbClr val="FFFFFF"/>
+          </a:solidFill>
+          <a:ln w="12700">
+            <a:solidFill>
+              <a:srgbClr val="DB2777"/>
+            </a:solidFill>
+            <a:prstDash val="solid"/>
+          </a:ln>
+        </p:spPr>
+      </p:sp>
+      <p:sp>
+        <p:nvSpPr>
+          <p:cNvPr id="52" name="Text 50"/>
+          <p:cNvSpPr/>
+          <p:nvPr/>
+        </p:nvSpPr>
+        <p:spPr>
+          <a:xfrm>
+            <a:off x="7677912" y="4169664"/>
+            <a:ext cx="685800" cy="384048"/>
+          </a:xfrm>
+          <a:prstGeom prst="rect">
+            <a:avLst/>
+          </a:prstGeom>
+          <a:noFill/>
+          <a:ln/>
+        </p:spPr>
+        <p:txBody>
+          <a:bodyPr wrap="square" lIns="0" tIns="0" rIns="0" bIns="0" rtlCol="0" anchor="ctr"/>
+          <a:lstStyle/>
+          <a:p>
+            <a:pPr algn="ctr" indent="0" marL="0">
+              <a:buNone/>
+            </a:pPr>
+            <a:r>
+              <a:rPr lang="en-US" sz="900" b="1" dirty="0">
+                <a:solidFill>
+                  <a:srgbClr val="9D174D"/>
+                </a:solidFill>
+                <a:latin typeface="Trebuchet MS" pitchFamily="34" charset="0"/>
+                <a:ea typeface="Trebuchet MS" pitchFamily="34" charset="-122"/>
+                <a:cs typeface="Trebuchet MS" pitchFamily="34" charset="-120"/>
+              </a:rPr>
+              <a:t>c</a:t>
+            </a:r>
+            <a:endParaRPr lang="en-US" sz="900" dirty="0"/>
+          </a:p>
+        </p:txBody>
+      </p:sp>
+      <p:sp>
+        <p:nvSpPr>
+          <p:cNvPr id="53" name="Text 51"/>
+          <p:cNvSpPr/>
+          <p:nvPr/>
+        </p:nvSpPr>
+        <p:spPr>
+          <a:xfrm>
+            <a:off x="7677912" y="4572000"/>
             <a:ext cx="685800" cy="219456"/>
           </a:xfrm>
           <a:prstGeom prst="rect">
@@ -22658,7 +22646,7 @@
                 <a:ea typeface="Calibri" pitchFamily="34" charset="-122"/>
                 <a:cs typeface="Calibri" pitchFamily="34" charset="-120"/>
               </a:rPr>
-              <a:t>/ik/</a:t>
+              <a:t>/k/</a:t>
             </a:r>
             <a:endParaRPr lang="en-US" sz="750" dirty="0"/>
           </a:p>
@@ -23089,7 +23077,7 @@
                 <a:ea typeface="Trebuchet MS" pitchFamily="34" charset="-122"/>
                 <a:cs typeface="Trebuchet MS" pitchFamily="34" charset="-120"/>
               </a:rPr>
-              <a:t>oceanic</a:t>
+              <a:t>rhythmic</a:t>
             </a:r>
             <a:endParaRPr lang="en-US" sz="2800" dirty="0"/>
           </a:p>
@@ -23916,7 +23904,7 @@
                 <a:ea typeface="Trebuchet MS" pitchFamily="34" charset="-122"/>
                 <a:cs typeface="Trebuchet MS" pitchFamily="34" charset="-120"/>
               </a:rPr>
-              <a:t>oceanic</a:t>
+              <a:t>rhythmic</a:t>
             </a:r>
             <a:endParaRPr lang="en-US" sz="2800" dirty="0"/>
           </a:p>
@@ -24055,7 +24043,7 @@
                 <a:ea typeface="Trebuchet MS" pitchFamily="34" charset="-122"/>
                 <a:cs typeface="Trebuchet MS" pitchFamily="34" charset="-120"/>
               </a:rPr>
-              <a:t>ocean</a:t>
+              <a:t>rhythm</a:t>
             </a:r>
             <a:endParaRPr lang="en-US" sz="1300" dirty="0"/>
           </a:p>
@@ -24094,7 +24082,7 @@
                 <a:ea typeface="Calibri" pitchFamily="34" charset="-122"/>
                 <a:cs typeface="Calibri" pitchFamily="34" charset="-120"/>
               </a:rPr>
-              <a:t>the sea</a:t>
+              <a:t>a regular beat or pattern</a:t>
             </a:r>
             <a:endParaRPr lang="en-US" sz="850" dirty="0"/>
           </a:p>
@@ -24206,7 +24194,7 @@
                 <a:ea typeface="Calibri" pitchFamily="34" charset="-122"/>
                 <a:cs typeface="Calibri" pitchFamily="34" charset="-120"/>
               </a:rPr>
-              <a:t>relating to</a:t>
+              <a:t>relating to, having the nature of</a:t>
             </a:r>
             <a:endParaRPr lang="en-US" sz="850" dirty="0"/>
           </a:p>
@@ -25620,7 +25608,7 @@
                 <a:ea typeface="Trebuchet MS" pitchFamily="34" charset="-122"/>
                 <a:cs typeface="Trebuchet MS" pitchFamily="34" charset="-120"/>
               </a:rPr>
-              <a:t>oceanic</a:t>
+              <a:t>rhythmic</a:t>
             </a:r>
             <a:endParaRPr lang="en-US" sz="2800" dirty="0"/>
           </a:p>
@@ -25759,7 +25747,7 @@
                 <a:ea typeface="Trebuchet MS" pitchFamily="34" charset="-122"/>
                 <a:cs typeface="Trebuchet MS" pitchFamily="34" charset="-120"/>
               </a:rPr>
-              <a:t>ocean</a:t>
+              <a:t>rhythm</a:t>
             </a:r>
             <a:endParaRPr lang="en-US" sz="1300" dirty="0"/>
           </a:p>
@@ -25798,7 +25786,7 @@
                 <a:ea typeface="Calibri" pitchFamily="34" charset="-122"/>
                 <a:cs typeface="Calibri" pitchFamily="34" charset="-120"/>
               </a:rPr>
-              <a:t>the sea</a:t>
+              <a:t>a regular beat or pattern</a:t>
             </a:r>
             <a:endParaRPr lang="en-US" sz="850" dirty="0"/>
           </a:p>
@@ -25910,7 +25898,7 @@
                 <a:ea typeface="Calibri" pitchFamily="34" charset="-122"/>
                 <a:cs typeface="Calibri" pitchFamily="34" charset="-120"/>
               </a:rPr>
-              <a:t>relating to</a:t>
+              <a:t>relating to, having the nature of</a:t>
             </a:r>
             <a:endParaRPr lang="en-US" sz="850" dirty="0"/>
           </a:p>
@@ -26017,8 +26005,8 @@
         </p:nvSpPr>
         <p:spPr>
           <a:xfrm>
-            <a:off x="1975104" y="3364992"/>
-            <a:ext cx="1554480" cy="475488"/>
+            <a:off x="2999232" y="3364992"/>
+            <a:ext cx="1645920" cy="475488"/>
           </a:xfrm>
           <a:prstGeom prst="rect">
             <a:avLst>
@@ -26044,8 +26032,8 @@
         </p:nvSpPr>
         <p:spPr>
           <a:xfrm>
-            <a:off x="1975104" y="3364992"/>
-            <a:ext cx="1554480" cy="475488"/>
+            <a:off x="2999232" y="3364992"/>
+            <a:ext cx="1645920" cy="475488"/>
           </a:xfrm>
           <a:prstGeom prst="rect">
             <a:avLst/>
@@ -26069,7 +26057,7 @@
                 <a:ea typeface="Trebuchet MS" pitchFamily="34" charset="-122"/>
                 <a:cs typeface="Trebuchet MS" pitchFamily="34" charset="-120"/>
               </a:rPr>
-              <a:t>o</a:t>
+              <a:t>rhyth</a:t>
             </a:r>
             <a:endParaRPr lang="en-US" sz="1400" dirty="0"/>
           </a:p>
@@ -26083,8 +26071,8 @@
         </p:nvSpPr>
         <p:spPr>
           <a:xfrm>
-            <a:off x="3529584" y="3364992"/>
-            <a:ext cx="73152" cy="475488"/>
+            <a:off x="4645152" y="3364992"/>
+            <a:ext cx="1097280" cy="475488"/>
           </a:xfrm>
           <a:prstGeom prst="rect">
             <a:avLst/>
@@ -26122,8 +26110,8 @@
         </p:nvSpPr>
         <p:spPr>
           <a:xfrm>
-            <a:off x="3602736" y="3364992"/>
-            <a:ext cx="1554480" cy="475488"/>
+            <a:off x="5742432" y="3364992"/>
+            <a:ext cx="1645920" cy="475488"/>
           </a:xfrm>
           <a:prstGeom prst="rect">
             <a:avLst>
@@ -26149,8 +26137,8 @@
         </p:nvSpPr>
         <p:spPr>
           <a:xfrm>
-            <a:off x="3602736" y="3364992"/>
-            <a:ext cx="1554480" cy="475488"/>
+            <a:off x="5742432" y="3364992"/>
+            <a:ext cx="1645920" cy="475488"/>
           </a:xfrm>
           <a:prstGeom prst="rect">
             <a:avLst/>
@@ -26174,7 +26162,7 @@
                 <a:ea typeface="Trebuchet MS" pitchFamily="34" charset="-122"/>
                 <a:cs typeface="Trebuchet MS" pitchFamily="34" charset="-120"/>
               </a:rPr>
-              <a:t>ce</a:t>
+              <a:t>mic</a:t>
             </a:r>
             <a:endParaRPr lang="en-US" sz="1400" dirty="0"/>
           </a:p>
@@ -26182,224 +26170,80 @@
       </p:sp>
       <p:sp>
         <p:nvSpPr>
-          <p:cNvPr id="30" name="Text 28"/>
-          <p:cNvSpPr/>
-          <p:nvPr/>
-        </p:nvSpPr>
-        <p:spPr>
-          <a:xfrm>
-            <a:off x="5157216" y="3364992"/>
-            <a:ext cx="73152" cy="475488"/>
-          </a:xfrm>
-          <a:prstGeom prst="rect">
-            <a:avLst/>
-          </a:prstGeom>
-          <a:noFill/>
-          <a:ln/>
-        </p:spPr>
-        <p:txBody>
-          <a:bodyPr wrap="square" lIns="0" tIns="0" rIns="0" bIns="0" rtlCol="0" anchor="ctr"/>
-          <a:lstStyle/>
-          <a:p>
-            <a:pPr algn="ctr" indent="0" marL="0">
-              <a:buNone/>
-            </a:pPr>
-            <a:r>
-              <a:rPr lang="en-US" sz="1600" b="1" dirty="0">
-                <a:solidFill>
-                  <a:srgbClr val="0D9488"/>
+          <p:cNvPr id="30" name="Shape 28"/>
+          <p:cNvSpPr/>
+          <p:nvPr/>
+        </p:nvSpPr>
+        <p:spPr>
+          <a:xfrm>
+            <a:off x="365760" y="4096512"/>
+            <a:ext cx="1371600" cy="804672"/>
+          </a:xfrm>
+          <a:prstGeom prst="rect">
+            <a:avLst>
+              <a:gd name="adj" fmla="val 6818"/>
+            </a:avLst>
+          </a:prstGeom>
+          <a:solidFill>
+            <a:srgbClr val="E2E8F0"/>
+          </a:solidFill>
+          <a:ln w="12700">
+            <a:solidFill>
+              <a:srgbClr val="E2E8F0"/>
+            </a:solidFill>
+            <a:prstDash val="solid"/>
+          </a:ln>
+        </p:spPr>
+      </p:sp>
+      <p:sp>
+        <p:nvSpPr>
+          <p:cNvPr id="31" name="Text 29"/>
+          <p:cNvSpPr/>
+          <p:nvPr/>
+        </p:nvSpPr>
+        <p:spPr>
+          <a:xfrm>
+            <a:off x="365760" y="4096512"/>
+            <a:ext cx="1371600" cy="804672"/>
+          </a:xfrm>
+          <a:prstGeom prst="rect">
+            <a:avLst/>
+          </a:prstGeom>
+          <a:noFill/>
+          <a:ln/>
+        </p:spPr>
+        <p:txBody>
+          <a:bodyPr wrap="square" lIns="0" tIns="0" rIns="0" bIns="0" rtlCol="0" anchor="ctr"/>
+          <a:lstStyle/>
+          <a:p>
+            <a:pPr algn="ctr" indent="0" marL="0">
+              <a:buNone/>
+            </a:pPr>
+            <a:r>
+              <a:rPr lang="en-US" sz="1100" b="1" dirty="0">
+                <a:solidFill>
+                  <a:srgbClr val="475569"/>
                 </a:solidFill>
                 <a:latin typeface="Trebuchet MS" pitchFamily="34" charset="0"/>
                 <a:ea typeface="Trebuchet MS" pitchFamily="34" charset="-122"/>
                 <a:cs typeface="Trebuchet MS" pitchFamily="34" charset="-120"/>
               </a:rPr>
-              <a:t>·</a:t>
-            </a:r>
-            <a:endParaRPr lang="en-US" sz="1600" dirty="0"/>
-          </a:p>
-        </p:txBody>
-      </p:sp>
-      <p:sp>
-        <p:nvSpPr>
-          <p:cNvPr id="31" name="Shape 29"/>
-          <p:cNvSpPr/>
-          <p:nvPr/>
-        </p:nvSpPr>
-        <p:spPr>
-          <a:xfrm>
-            <a:off x="5230368" y="3364992"/>
-            <a:ext cx="1554480" cy="475488"/>
-          </a:xfrm>
-          <a:prstGeom prst="rect">
-            <a:avLst>
-              <a:gd name="adj" fmla="val 9615"/>
-            </a:avLst>
-          </a:prstGeom>
-          <a:solidFill>
-            <a:srgbClr val="FFFFFF"/>
-          </a:solidFill>
-          <a:ln w="12700">
-            <a:solidFill>
-              <a:srgbClr val="0D9488"/>
-            </a:solidFill>
-            <a:prstDash val="solid"/>
-          </a:ln>
-        </p:spPr>
-      </p:sp>
-      <p:sp>
-        <p:nvSpPr>
-          <p:cNvPr id="32" name="Text 30"/>
-          <p:cNvSpPr/>
-          <p:nvPr/>
-        </p:nvSpPr>
-        <p:spPr>
-          <a:xfrm>
-            <a:off x="5230368" y="3364992"/>
-            <a:ext cx="1554480" cy="475488"/>
-          </a:xfrm>
-          <a:prstGeom prst="rect">
-            <a:avLst/>
-          </a:prstGeom>
-          <a:noFill/>
-          <a:ln/>
-        </p:spPr>
-        <p:txBody>
-          <a:bodyPr wrap="square" lIns="0" tIns="0" rIns="0" bIns="0" rtlCol="0" anchor="ctr"/>
-          <a:lstStyle/>
-          <a:p>
-            <a:pPr algn="ctr" indent="0" marL="0">
-              <a:buNone/>
-            </a:pPr>
-            <a:r>
-              <a:rPr lang="en-US" sz="1400" b="1" dirty="0">
-                <a:solidFill>
-                  <a:srgbClr val="0D9488"/>
-                </a:solidFill>
-                <a:latin typeface="Trebuchet MS" pitchFamily="34" charset="0"/>
-                <a:ea typeface="Trebuchet MS" pitchFamily="34" charset="-122"/>
-                <a:cs typeface="Trebuchet MS" pitchFamily="34" charset="-120"/>
-              </a:rPr>
-              <a:t>an</a:t>
-            </a:r>
-            <a:endParaRPr lang="en-US" sz="1400" dirty="0"/>
-          </a:p>
-        </p:txBody>
-      </p:sp>
-      <p:sp>
-        <p:nvSpPr>
-          <p:cNvPr id="33" name="Text 31"/>
-          <p:cNvSpPr/>
-          <p:nvPr/>
-        </p:nvSpPr>
-        <p:spPr>
-          <a:xfrm>
-            <a:off x="6784848" y="3364992"/>
-            <a:ext cx="73152" cy="475488"/>
-          </a:xfrm>
-          <a:prstGeom prst="rect">
-            <a:avLst/>
-          </a:prstGeom>
-          <a:noFill/>
-          <a:ln/>
-        </p:spPr>
-        <p:txBody>
-          <a:bodyPr wrap="square" lIns="0" tIns="0" rIns="0" bIns="0" rtlCol="0" anchor="ctr"/>
-          <a:lstStyle/>
-          <a:p>
-            <a:pPr algn="ctr" indent="0" marL="0">
-              <a:buNone/>
-            </a:pPr>
-            <a:r>
-              <a:rPr lang="en-US" sz="1600" b="1" dirty="0">
-                <a:solidFill>
-                  <a:srgbClr val="0D9488"/>
-                </a:solidFill>
-                <a:latin typeface="Trebuchet MS" pitchFamily="34" charset="0"/>
-                <a:ea typeface="Trebuchet MS" pitchFamily="34" charset="-122"/>
-                <a:cs typeface="Trebuchet MS" pitchFamily="34" charset="-120"/>
-              </a:rPr>
-              <a:t>·</a:t>
-            </a:r>
-            <a:endParaRPr lang="en-US" sz="1600" dirty="0"/>
-          </a:p>
-        </p:txBody>
-      </p:sp>
-      <p:sp>
-        <p:nvSpPr>
-          <p:cNvPr id="34" name="Shape 32"/>
-          <p:cNvSpPr/>
-          <p:nvPr/>
-        </p:nvSpPr>
-        <p:spPr>
-          <a:xfrm>
-            <a:off x="6858000" y="3364992"/>
-            <a:ext cx="1554480" cy="475488"/>
-          </a:xfrm>
-          <a:prstGeom prst="rect">
-            <a:avLst>
-              <a:gd name="adj" fmla="val 9615"/>
-            </a:avLst>
-          </a:prstGeom>
-          <a:solidFill>
-            <a:srgbClr val="FFFFFF"/>
-          </a:solidFill>
-          <a:ln w="12700">
-            <a:solidFill>
-              <a:srgbClr val="0D9488"/>
-            </a:solidFill>
-            <a:prstDash val="solid"/>
-          </a:ln>
-        </p:spPr>
-      </p:sp>
-      <p:sp>
-        <p:nvSpPr>
-          <p:cNvPr id="35" name="Text 33"/>
-          <p:cNvSpPr/>
-          <p:nvPr/>
-        </p:nvSpPr>
-        <p:spPr>
-          <a:xfrm>
-            <a:off x="6858000" y="3364992"/>
-            <a:ext cx="1554480" cy="475488"/>
-          </a:xfrm>
-          <a:prstGeom prst="rect">
-            <a:avLst/>
-          </a:prstGeom>
-          <a:noFill/>
-          <a:ln/>
-        </p:spPr>
-        <p:txBody>
-          <a:bodyPr wrap="square" lIns="0" tIns="0" rIns="0" bIns="0" rtlCol="0" anchor="ctr"/>
-          <a:lstStyle/>
-          <a:p>
-            <a:pPr algn="ctr" indent="0" marL="0">
-              <a:buNone/>
-            </a:pPr>
-            <a:r>
-              <a:rPr lang="en-US" sz="1400" b="1" dirty="0">
-                <a:solidFill>
-                  <a:srgbClr val="0D9488"/>
-                </a:solidFill>
-                <a:latin typeface="Trebuchet MS" pitchFamily="34" charset="0"/>
-                <a:ea typeface="Trebuchet MS" pitchFamily="34" charset="-122"/>
-                <a:cs typeface="Trebuchet MS" pitchFamily="34" charset="-120"/>
-              </a:rPr>
-              <a:t>ic</a:t>
-            </a:r>
-            <a:endParaRPr lang="en-US" sz="1400" dirty="0"/>
-          </a:p>
-        </p:txBody>
-      </p:sp>
-      <p:sp>
-        <p:nvSpPr>
-          <p:cNvPr id="36" name="Shape 34"/>
-          <p:cNvSpPr/>
-          <p:nvPr/>
-        </p:nvSpPr>
-        <p:spPr>
-          <a:xfrm>
-            <a:off x="365760" y="4096512"/>
-            <a:ext cx="1371600" cy="804672"/>
+              <a:t>Phonemes</a:t>
+            </a:r>
+            <a:endParaRPr lang="en-US" sz="1100" dirty="0"/>
+          </a:p>
+        </p:txBody>
+      </p:sp>
+      <p:sp>
+        <p:nvSpPr>
+          <p:cNvPr id="32" name="Shape 30"/>
+          <p:cNvSpPr/>
+          <p:nvPr/>
+        </p:nvSpPr>
+        <p:spPr>
+          <a:xfrm>
+            <a:off x="1874520" y="4096512"/>
+            <a:ext cx="6903720" cy="804672"/>
           </a:xfrm>
           <a:prstGeom prst="rect">
             <a:avLst>
@@ -26407,85 +26251,19 @@
             </a:avLst>
           </a:prstGeom>
           <a:solidFill>
-            <a:srgbClr val="E2E8F0"/>
+            <a:srgbClr val="F8FAFC"/>
           </a:solidFill>
           <a:ln w="12700">
             <a:solidFill>
               <a:srgbClr val="E2E8F0"/>
             </a:solidFill>
-            <a:prstDash val="solid"/>
-          </a:ln>
-        </p:spPr>
-      </p:sp>
-      <p:sp>
-        <p:nvSpPr>
-          <p:cNvPr id="37" name="Text 35"/>
-          <p:cNvSpPr/>
-          <p:nvPr/>
-        </p:nvSpPr>
-        <p:spPr>
-          <a:xfrm>
-            <a:off x="365760" y="4096512"/>
-            <a:ext cx="1371600" cy="804672"/>
-          </a:xfrm>
-          <a:prstGeom prst="rect">
-            <a:avLst/>
-          </a:prstGeom>
-          <a:noFill/>
-          <a:ln/>
-        </p:spPr>
-        <p:txBody>
-          <a:bodyPr wrap="square" lIns="0" tIns="0" rIns="0" bIns="0" rtlCol="0" anchor="ctr"/>
-          <a:lstStyle/>
-          <a:p>
-            <a:pPr algn="ctr" indent="0" marL="0">
-              <a:buNone/>
-            </a:pPr>
-            <a:r>
-              <a:rPr lang="en-US" sz="1100" b="1" dirty="0">
-                <a:solidFill>
-                  <a:srgbClr val="475569"/>
-                </a:solidFill>
-                <a:latin typeface="Trebuchet MS" pitchFamily="34" charset="0"/>
-                <a:ea typeface="Trebuchet MS" pitchFamily="34" charset="-122"/>
-                <a:cs typeface="Trebuchet MS" pitchFamily="34" charset="-120"/>
-              </a:rPr>
-              <a:t>Phonemes</a:t>
-            </a:r>
-            <a:endParaRPr lang="en-US" sz="1100" dirty="0"/>
-          </a:p>
-        </p:txBody>
-      </p:sp>
-      <p:sp>
-        <p:nvSpPr>
-          <p:cNvPr id="38" name="Shape 36"/>
-          <p:cNvSpPr/>
-          <p:nvPr/>
-        </p:nvSpPr>
-        <p:spPr>
-          <a:xfrm>
-            <a:off x="1874520" y="4096512"/>
-            <a:ext cx="6903720" cy="804672"/>
-          </a:xfrm>
-          <a:prstGeom prst="rect">
-            <a:avLst>
-              <a:gd name="adj" fmla="val 6818"/>
-            </a:avLst>
-          </a:prstGeom>
-          <a:solidFill>
-            <a:srgbClr val="F8FAFC"/>
-          </a:solidFill>
-          <a:ln w="12700">
-            <a:solidFill>
-              <a:srgbClr val="E2E8F0"/>
-            </a:solidFill>
             <a:prstDash val="dash"/>
           </a:ln>
         </p:spPr>
       </p:sp>
       <p:sp>
         <p:nvSpPr>
-          <p:cNvPr id="39" name="Text 37"/>
+          <p:cNvPr id="33" name="Text 31"/>
           <p:cNvSpPr/>
           <p:nvPr/>
         </p:nvSpPr>
@@ -26947,7 +26725,7 @@
                 <a:ea typeface="Trebuchet MS" pitchFamily="34" charset="-122"/>
                 <a:cs typeface="Trebuchet MS" pitchFamily="34" charset="-120"/>
               </a:rPr>
-              <a:t>oceanic</a:t>
+              <a:t>rhythmic</a:t>
             </a:r>
             <a:endParaRPr lang="en-US" sz="2800" dirty="0"/>
           </a:p>
@@ -27086,7 +26864,7 @@
                 <a:ea typeface="Trebuchet MS" pitchFamily="34" charset="-122"/>
                 <a:cs typeface="Trebuchet MS" pitchFamily="34" charset="-120"/>
               </a:rPr>
-              <a:t>ocean</a:t>
+              <a:t>rhythm</a:t>
             </a:r>
             <a:endParaRPr lang="en-US" sz="1300" dirty="0"/>
           </a:p>
@@ -27125,7 +26903,7 @@
                 <a:ea typeface="Calibri" pitchFamily="34" charset="-122"/>
                 <a:cs typeface="Calibri" pitchFamily="34" charset="-120"/>
               </a:rPr>
-              <a:t>the sea</a:t>
+              <a:t>a regular beat or pattern</a:t>
             </a:r>
             <a:endParaRPr lang="en-US" sz="850" dirty="0"/>
           </a:p>
@@ -27237,7 +27015,7 @@
                 <a:ea typeface="Calibri" pitchFamily="34" charset="-122"/>
                 <a:cs typeface="Calibri" pitchFamily="34" charset="-120"/>
               </a:rPr>
-              <a:t>relating to</a:t>
+              <a:t>relating to, having the nature of</a:t>
             </a:r>
             <a:endParaRPr lang="en-US" sz="850" dirty="0"/>
           </a:p>
@@ -27344,8 +27122,8 @@
         </p:nvSpPr>
         <p:spPr>
           <a:xfrm>
-            <a:off x="1975104" y="3364992"/>
-            <a:ext cx="1554480" cy="475488"/>
+            <a:off x="2999232" y="3364992"/>
+            <a:ext cx="1645920" cy="475488"/>
           </a:xfrm>
           <a:prstGeom prst="rect">
             <a:avLst>
@@ -27371,8 +27149,8 @@
         </p:nvSpPr>
         <p:spPr>
           <a:xfrm>
-            <a:off x="1975104" y="3364992"/>
-            <a:ext cx="1554480" cy="475488"/>
+            <a:off x="2999232" y="3364992"/>
+            <a:ext cx="1645920" cy="475488"/>
           </a:xfrm>
           <a:prstGeom prst="rect">
             <a:avLst/>
@@ -27396,7 +27174,7 @@
                 <a:ea typeface="Trebuchet MS" pitchFamily="34" charset="-122"/>
                 <a:cs typeface="Trebuchet MS" pitchFamily="34" charset="-120"/>
               </a:rPr>
-              <a:t>o</a:t>
+              <a:t>rhyth</a:t>
             </a:r>
             <a:endParaRPr lang="en-US" sz="1400" dirty="0"/>
           </a:p>
@@ -27410,8 +27188,8 @@
         </p:nvSpPr>
         <p:spPr>
           <a:xfrm>
-            <a:off x="3529584" y="3364992"/>
-            <a:ext cx="73152" cy="475488"/>
+            <a:off x="4645152" y="3364992"/>
+            <a:ext cx="1097280" cy="475488"/>
           </a:xfrm>
           <a:prstGeom prst="rect">
             <a:avLst/>
@@ -27449,8 +27227,8 @@
         </p:nvSpPr>
         <p:spPr>
           <a:xfrm>
-            <a:off x="3602736" y="3364992"/>
-            <a:ext cx="1554480" cy="475488"/>
+            <a:off x="5742432" y="3364992"/>
+            <a:ext cx="1645920" cy="475488"/>
           </a:xfrm>
           <a:prstGeom prst="rect">
             <a:avLst>
@@ -27476,8 +27254,8 @@
         </p:nvSpPr>
         <p:spPr>
           <a:xfrm>
-            <a:off x="3602736" y="3364992"/>
-            <a:ext cx="1554480" cy="475488"/>
+            <a:off x="5742432" y="3364992"/>
+            <a:ext cx="1645920" cy="475488"/>
           </a:xfrm>
           <a:prstGeom prst="rect">
             <a:avLst/>
@@ -27501,7 +27279,7 @@
                 <a:ea typeface="Trebuchet MS" pitchFamily="34" charset="-122"/>
                 <a:cs typeface="Trebuchet MS" pitchFamily="34" charset="-120"/>
               </a:rPr>
-              <a:t>ce</a:t>
+              <a:t>mic</a:t>
             </a:r>
             <a:endParaRPr lang="en-US" sz="1400" dirty="0"/>
           </a:p>
@@ -27509,162 +27287,321 @@
       </p:sp>
       <p:sp>
         <p:nvSpPr>
-          <p:cNvPr id="30" name="Text 28"/>
-          <p:cNvSpPr/>
-          <p:nvPr/>
-        </p:nvSpPr>
-        <p:spPr>
-          <a:xfrm>
-            <a:off x="5157216" y="3364992"/>
-            <a:ext cx="73152" cy="475488"/>
-          </a:xfrm>
-          <a:prstGeom prst="rect">
-            <a:avLst/>
-          </a:prstGeom>
-          <a:noFill/>
-          <a:ln/>
-        </p:spPr>
-        <p:txBody>
-          <a:bodyPr wrap="square" lIns="0" tIns="0" rIns="0" bIns="0" rtlCol="0" anchor="ctr"/>
-          <a:lstStyle/>
-          <a:p>
-            <a:pPr algn="ctr" indent="0" marL="0">
-              <a:buNone/>
-            </a:pPr>
-            <a:r>
-              <a:rPr lang="en-US" sz="1600" b="1" dirty="0">
-                <a:solidFill>
-                  <a:srgbClr val="0D9488"/>
+          <p:cNvPr id="30" name="Shape 28"/>
+          <p:cNvSpPr/>
+          <p:nvPr/>
+        </p:nvSpPr>
+        <p:spPr>
+          <a:xfrm>
+            <a:off x="365760" y="4096512"/>
+            <a:ext cx="1371600" cy="804672"/>
+          </a:xfrm>
+          <a:prstGeom prst="rect">
+            <a:avLst>
+              <a:gd name="adj" fmla="val 6818"/>
+            </a:avLst>
+          </a:prstGeom>
+          <a:solidFill>
+            <a:srgbClr val="E2E8F0"/>
+          </a:solidFill>
+          <a:ln w="12700">
+            <a:solidFill>
+              <a:srgbClr val="E2E8F0"/>
+            </a:solidFill>
+            <a:prstDash val="solid"/>
+          </a:ln>
+        </p:spPr>
+      </p:sp>
+      <p:sp>
+        <p:nvSpPr>
+          <p:cNvPr id="31" name="Text 29"/>
+          <p:cNvSpPr/>
+          <p:nvPr/>
+        </p:nvSpPr>
+        <p:spPr>
+          <a:xfrm>
+            <a:off x="365760" y="4096512"/>
+            <a:ext cx="1371600" cy="804672"/>
+          </a:xfrm>
+          <a:prstGeom prst="rect">
+            <a:avLst/>
+          </a:prstGeom>
+          <a:noFill/>
+          <a:ln/>
+        </p:spPr>
+        <p:txBody>
+          <a:bodyPr wrap="square" lIns="0" tIns="0" rIns="0" bIns="0" rtlCol="0" anchor="ctr"/>
+          <a:lstStyle/>
+          <a:p>
+            <a:pPr algn="ctr" indent="0" marL="0">
+              <a:buNone/>
+            </a:pPr>
+            <a:r>
+              <a:rPr lang="en-US" sz="1100" b="1" dirty="0">
+                <a:solidFill>
+                  <a:srgbClr val="475569"/>
                 </a:solidFill>
                 <a:latin typeface="Trebuchet MS" pitchFamily="34" charset="0"/>
                 <a:ea typeface="Trebuchet MS" pitchFamily="34" charset="-122"/>
                 <a:cs typeface="Trebuchet MS" pitchFamily="34" charset="-120"/>
               </a:rPr>
-              <a:t>·</a:t>
-            </a:r>
-            <a:endParaRPr lang="en-US" sz="1600" dirty="0"/>
-          </a:p>
-        </p:txBody>
-      </p:sp>
-      <p:sp>
-        <p:nvSpPr>
-          <p:cNvPr id="31" name="Shape 29"/>
-          <p:cNvSpPr/>
-          <p:nvPr/>
-        </p:nvSpPr>
-        <p:spPr>
-          <a:xfrm>
-            <a:off x="5230368" y="3364992"/>
-            <a:ext cx="1554480" cy="475488"/>
+              <a:t>Phonemes</a:t>
+            </a:r>
+            <a:endParaRPr lang="en-US" sz="1100" dirty="0"/>
+          </a:p>
+        </p:txBody>
+      </p:sp>
+      <p:sp>
+        <p:nvSpPr>
+          <p:cNvPr id="32" name="Shape 30"/>
+          <p:cNvSpPr/>
+          <p:nvPr/>
+        </p:nvSpPr>
+        <p:spPr>
+          <a:xfrm>
+            <a:off x="1874520" y="4096512"/>
+            <a:ext cx="6903720" cy="804672"/>
           </a:xfrm>
           <a:prstGeom prst="rect">
             <a:avLst>
-              <a:gd name="adj" fmla="val 9615"/>
+              <a:gd name="adj" fmla="val 6818"/>
             </a:avLst>
           </a:prstGeom>
           <a:solidFill>
+            <a:srgbClr val="FCE7F3"/>
+          </a:solidFill>
+          <a:ln w="12700">
+            <a:solidFill>
+              <a:srgbClr val="DB2777"/>
+            </a:solidFill>
+            <a:prstDash val="solid"/>
+          </a:ln>
+        </p:spPr>
+      </p:sp>
+      <p:sp>
+        <p:nvSpPr>
+          <p:cNvPr id="33" name="Shape 31"/>
+          <p:cNvSpPr/>
+          <p:nvPr/>
+        </p:nvSpPr>
+        <p:spPr>
+          <a:xfrm>
+            <a:off x="2254649" y="4169664"/>
+            <a:ext cx="685800" cy="384048"/>
+          </a:xfrm>
+          <a:prstGeom prst="rect">
+            <a:avLst>
+              <a:gd name="adj" fmla="val 9524"/>
+            </a:avLst>
+          </a:prstGeom>
+          <a:solidFill>
             <a:srgbClr val="FFFFFF"/>
           </a:solidFill>
           <a:ln w="12700">
             <a:solidFill>
-              <a:srgbClr val="0D9488"/>
-            </a:solidFill>
-            <a:prstDash val="solid"/>
-          </a:ln>
-        </p:spPr>
-      </p:sp>
-      <p:sp>
-        <p:nvSpPr>
-          <p:cNvPr id="32" name="Text 30"/>
-          <p:cNvSpPr/>
-          <p:nvPr/>
-        </p:nvSpPr>
-        <p:spPr>
-          <a:xfrm>
-            <a:off x="5230368" y="3364992"/>
-            <a:ext cx="1554480" cy="475488"/>
-          </a:xfrm>
-          <a:prstGeom prst="rect">
-            <a:avLst/>
-          </a:prstGeom>
-          <a:noFill/>
-          <a:ln/>
-        </p:spPr>
-        <p:txBody>
-          <a:bodyPr wrap="square" lIns="0" tIns="0" rIns="0" bIns="0" rtlCol="0" anchor="ctr"/>
-          <a:lstStyle/>
-          <a:p>
-            <a:pPr algn="ctr" indent="0" marL="0">
-              <a:buNone/>
-            </a:pPr>
-            <a:r>
-              <a:rPr lang="en-US" sz="1400" b="1" dirty="0">
-                <a:solidFill>
-                  <a:srgbClr val="0D9488"/>
+              <a:srgbClr val="DB2777"/>
+            </a:solidFill>
+            <a:prstDash val="solid"/>
+          </a:ln>
+        </p:spPr>
+      </p:sp>
+      <p:sp>
+        <p:nvSpPr>
+          <p:cNvPr id="34" name="Text 32"/>
+          <p:cNvSpPr/>
+          <p:nvPr/>
+        </p:nvSpPr>
+        <p:spPr>
+          <a:xfrm>
+            <a:off x="2254649" y="4169664"/>
+            <a:ext cx="685800" cy="384048"/>
+          </a:xfrm>
+          <a:prstGeom prst="rect">
+            <a:avLst/>
+          </a:prstGeom>
+          <a:noFill/>
+          <a:ln/>
+        </p:spPr>
+        <p:txBody>
+          <a:bodyPr wrap="square" lIns="0" tIns="0" rIns="0" bIns="0" rtlCol="0" anchor="ctr"/>
+          <a:lstStyle/>
+          <a:p>
+            <a:pPr algn="ctr" indent="0" marL="0">
+              <a:buNone/>
+            </a:pPr>
+            <a:r>
+              <a:rPr lang="en-US" sz="900" b="1" dirty="0">
+                <a:solidFill>
+                  <a:srgbClr val="9D174D"/>
                 </a:solidFill>
                 <a:latin typeface="Trebuchet MS" pitchFamily="34" charset="0"/>
                 <a:ea typeface="Trebuchet MS" pitchFamily="34" charset="-122"/>
                 <a:cs typeface="Trebuchet MS" pitchFamily="34" charset="-120"/>
               </a:rPr>
-              <a:t>an</a:t>
-            </a:r>
-            <a:endParaRPr lang="en-US" sz="1400" dirty="0"/>
-          </a:p>
-        </p:txBody>
-      </p:sp>
-      <p:sp>
-        <p:nvSpPr>
-          <p:cNvPr id="33" name="Text 31"/>
-          <p:cNvSpPr/>
-          <p:nvPr/>
-        </p:nvSpPr>
-        <p:spPr>
-          <a:xfrm>
-            <a:off x="6784848" y="3364992"/>
-            <a:ext cx="73152" cy="475488"/>
-          </a:xfrm>
-          <a:prstGeom prst="rect">
-            <a:avLst/>
-          </a:prstGeom>
-          <a:noFill/>
-          <a:ln/>
-        </p:spPr>
-        <p:txBody>
-          <a:bodyPr wrap="square" lIns="0" tIns="0" rIns="0" bIns="0" rtlCol="0" anchor="ctr"/>
-          <a:lstStyle/>
-          <a:p>
-            <a:pPr algn="ctr" indent="0" marL="0">
-              <a:buNone/>
-            </a:pPr>
-            <a:r>
-              <a:rPr lang="en-US" sz="1600" b="1" dirty="0">
-                <a:solidFill>
-                  <a:srgbClr val="0D9488"/>
+              <a:t>rh</a:t>
+            </a:r>
+            <a:endParaRPr lang="en-US" sz="900" dirty="0"/>
+          </a:p>
+        </p:txBody>
+      </p:sp>
+      <p:sp>
+        <p:nvSpPr>
+          <p:cNvPr id="35" name="Text 33"/>
+          <p:cNvSpPr/>
+          <p:nvPr/>
+        </p:nvSpPr>
+        <p:spPr>
+          <a:xfrm>
+            <a:off x="2254649" y="4572000"/>
+            <a:ext cx="685800" cy="219456"/>
+          </a:xfrm>
+          <a:prstGeom prst="rect">
+            <a:avLst/>
+          </a:prstGeom>
+          <a:noFill/>
+          <a:ln/>
+        </p:spPr>
+        <p:txBody>
+          <a:bodyPr wrap="square" lIns="0" tIns="0" rIns="0" bIns="0" rtlCol="0" anchor="t"/>
+          <a:lstStyle/>
+          <a:p>
+            <a:pPr algn="ctr" indent="0" marL="0">
+              <a:buNone/>
+            </a:pPr>
+            <a:r>
+              <a:rPr lang="en-US" sz="750" i="1" dirty="0">
+                <a:solidFill>
+                  <a:srgbClr val="94A3B8"/>
+                </a:solidFill>
+                <a:latin typeface="Calibri" pitchFamily="34" charset="0"/>
+                <a:ea typeface="Calibri" pitchFamily="34" charset="-122"/>
+                <a:cs typeface="Calibri" pitchFamily="34" charset="-120"/>
+              </a:rPr>
+              <a:t>/r/</a:t>
+            </a:r>
+            <a:endParaRPr lang="en-US" sz="750" dirty="0"/>
+          </a:p>
+        </p:txBody>
+      </p:sp>
+      <p:sp>
+        <p:nvSpPr>
+          <p:cNvPr id="36" name="Shape 34"/>
+          <p:cNvSpPr/>
+          <p:nvPr/>
+        </p:nvSpPr>
+        <p:spPr>
+          <a:xfrm>
+            <a:off x="3293146" y="4169664"/>
+            <a:ext cx="685800" cy="384048"/>
+          </a:xfrm>
+          <a:prstGeom prst="rect">
+            <a:avLst>
+              <a:gd name="adj" fmla="val 9524"/>
+            </a:avLst>
+          </a:prstGeom>
+          <a:solidFill>
+            <a:srgbClr val="FFFFFF"/>
+          </a:solidFill>
+          <a:ln w="12700">
+            <a:solidFill>
+              <a:srgbClr val="DB2777"/>
+            </a:solidFill>
+            <a:prstDash val="solid"/>
+          </a:ln>
+        </p:spPr>
+      </p:sp>
+      <p:sp>
+        <p:nvSpPr>
+          <p:cNvPr id="37" name="Text 35"/>
+          <p:cNvSpPr/>
+          <p:nvPr/>
+        </p:nvSpPr>
+        <p:spPr>
+          <a:xfrm>
+            <a:off x="3293146" y="4169664"/>
+            <a:ext cx="685800" cy="384048"/>
+          </a:xfrm>
+          <a:prstGeom prst="rect">
+            <a:avLst/>
+          </a:prstGeom>
+          <a:noFill/>
+          <a:ln/>
+        </p:spPr>
+        <p:txBody>
+          <a:bodyPr wrap="square" lIns="0" tIns="0" rIns="0" bIns="0" rtlCol="0" anchor="ctr"/>
+          <a:lstStyle/>
+          <a:p>
+            <a:pPr algn="ctr" indent="0" marL="0">
+              <a:buNone/>
+            </a:pPr>
+            <a:r>
+              <a:rPr lang="en-US" sz="900" b="1" dirty="0">
+                <a:solidFill>
+                  <a:srgbClr val="9D174D"/>
                 </a:solidFill>
                 <a:latin typeface="Trebuchet MS" pitchFamily="34" charset="0"/>
                 <a:ea typeface="Trebuchet MS" pitchFamily="34" charset="-122"/>
                 <a:cs typeface="Trebuchet MS" pitchFamily="34" charset="-120"/>
               </a:rPr>
-              <a:t>·</a:t>
-            </a:r>
-            <a:endParaRPr lang="en-US" sz="1600" dirty="0"/>
-          </a:p>
-        </p:txBody>
-      </p:sp>
-      <p:sp>
-        <p:nvSpPr>
-          <p:cNvPr id="34" name="Shape 32"/>
-          <p:cNvSpPr/>
-          <p:nvPr/>
-        </p:nvSpPr>
-        <p:spPr>
-          <a:xfrm>
-            <a:off x="6858000" y="3364992"/>
-            <a:ext cx="1554480" cy="475488"/>
+              <a:t>y</a:t>
+            </a:r>
+            <a:endParaRPr lang="en-US" sz="900" dirty="0"/>
+          </a:p>
+        </p:txBody>
+      </p:sp>
+      <p:sp>
+        <p:nvSpPr>
+          <p:cNvPr id="38" name="Text 36"/>
+          <p:cNvSpPr/>
+          <p:nvPr/>
+        </p:nvSpPr>
+        <p:spPr>
+          <a:xfrm>
+            <a:off x="3293146" y="4572000"/>
+            <a:ext cx="685800" cy="219456"/>
+          </a:xfrm>
+          <a:prstGeom prst="rect">
+            <a:avLst/>
+          </a:prstGeom>
+          <a:noFill/>
+          <a:ln/>
+        </p:spPr>
+        <p:txBody>
+          <a:bodyPr wrap="square" lIns="0" tIns="0" rIns="0" bIns="0" rtlCol="0" anchor="t"/>
+          <a:lstStyle/>
+          <a:p>
+            <a:pPr algn="ctr" indent="0" marL="0">
+              <a:buNone/>
+            </a:pPr>
+            <a:r>
+              <a:rPr lang="en-US" sz="750" i="1" dirty="0">
+                <a:solidFill>
+                  <a:srgbClr val="94A3B8"/>
+                </a:solidFill>
+                <a:latin typeface="Calibri" pitchFamily="34" charset="0"/>
+                <a:ea typeface="Calibri" pitchFamily="34" charset="-122"/>
+                <a:cs typeface="Calibri" pitchFamily="34" charset="-120"/>
+              </a:rPr>
+              <a:t>/i/</a:t>
+            </a:r>
+            <a:endParaRPr lang="en-US" sz="750" dirty="0"/>
+          </a:p>
+        </p:txBody>
+      </p:sp>
+      <p:sp>
+        <p:nvSpPr>
+          <p:cNvPr id="39" name="Shape 37"/>
+          <p:cNvSpPr/>
+          <p:nvPr/>
+        </p:nvSpPr>
+        <p:spPr>
+          <a:xfrm>
+            <a:off x="4331643" y="4169664"/>
+            <a:ext cx="685800" cy="384048"/>
           </a:xfrm>
           <a:prstGeom prst="rect">
             <a:avLst>
-              <a:gd name="adj" fmla="val 9615"/>
+              <a:gd name="adj" fmla="val 9524"/>
             </a:avLst>
           </a:prstGeom>
           <a:solidFill>
@@ -27672,153 +27609,126 @@
           </a:solidFill>
           <a:ln w="12700">
             <a:solidFill>
-              <a:srgbClr val="0D9488"/>
-            </a:solidFill>
-            <a:prstDash val="solid"/>
-          </a:ln>
-        </p:spPr>
-      </p:sp>
-      <p:sp>
-        <p:nvSpPr>
-          <p:cNvPr id="35" name="Text 33"/>
-          <p:cNvSpPr/>
-          <p:nvPr/>
-        </p:nvSpPr>
-        <p:spPr>
-          <a:xfrm>
-            <a:off x="6858000" y="3364992"/>
-            <a:ext cx="1554480" cy="475488"/>
-          </a:xfrm>
-          <a:prstGeom prst="rect">
-            <a:avLst/>
-          </a:prstGeom>
-          <a:noFill/>
-          <a:ln/>
-        </p:spPr>
-        <p:txBody>
-          <a:bodyPr wrap="square" lIns="0" tIns="0" rIns="0" bIns="0" rtlCol="0" anchor="ctr"/>
-          <a:lstStyle/>
-          <a:p>
-            <a:pPr algn="ctr" indent="0" marL="0">
-              <a:buNone/>
-            </a:pPr>
-            <a:r>
-              <a:rPr lang="en-US" sz="1400" b="1" dirty="0">
-                <a:solidFill>
-                  <a:srgbClr val="0D9488"/>
+              <a:srgbClr val="DB2777"/>
+            </a:solidFill>
+            <a:prstDash val="solid"/>
+          </a:ln>
+        </p:spPr>
+      </p:sp>
+      <p:sp>
+        <p:nvSpPr>
+          <p:cNvPr id="40" name="Text 38"/>
+          <p:cNvSpPr/>
+          <p:nvPr/>
+        </p:nvSpPr>
+        <p:spPr>
+          <a:xfrm>
+            <a:off x="4331643" y="4169664"/>
+            <a:ext cx="685800" cy="384048"/>
+          </a:xfrm>
+          <a:prstGeom prst="rect">
+            <a:avLst/>
+          </a:prstGeom>
+          <a:noFill/>
+          <a:ln/>
+        </p:spPr>
+        <p:txBody>
+          <a:bodyPr wrap="square" lIns="0" tIns="0" rIns="0" bIns="0" rtlCol="0" anchor="ctr"/>
+          <a:lstStyle/>
+          <a:p>
+            <a:pPr algn="ctr" indent="0" marL="0">
+              <a:buNone/>
+            </a:pPr>
+            <a:r>
+              <a:rPr lang="en-US" sz="900" b="1" dirty="0">
+                <a:solidFill>
+                  <a:srgbClr val="9D174D"/>
                 </a:solidFill>
                 <a:latin typeface="Trebuchet MS" pitchFamily="34" charset="0"/>
                 <a:ea typeface="Trebuchet MS" pitchFamily="34" charset="-122"/>
                 <a:cs typeface="Trebuchet MS" pitchFamily="34" charset="-120"/>
               </a:rPr>
-              <a:t>ic</a:t>
-            </a:r>
-            <a:endParaRPr lang="en-US" sz="1400" dirty="0"/>
-          </a:p>
-        </p:txBody>
-      </p:sp>
-      <p:sp>
-        <p:nvSpPr>
-          <p:cNvPr id="36" name="Shape 34"/>
-          <p:cNvSpPr/>
-          <p:nvPr/>
-        </p:nvSpPr>
-        <p:spPr>
-          <a:xfrm>
-            <a:off x="365760" y="4096512"/>
-            <a:ext cx="1371600" cy="804672"/>
+              <a:t>th</a:t>
+            </a:r>
+            <a:endParaRPr lang="en-US" sz="900" dirty="0"/>
+          </a:p>
+        </p:txBody>
+      </p:sp>
+      <p:sp>
+        <p:nvSpPr>
+          <p:cNvPr id="41" name="Shape 39"/>
+          <p:cNvSpPr/>
+          <p:nvPr/>
+        </p:nvSpPr>
+        <p:spPr>
+          <a:xfrm>
+            <a:off x="5370141" y="4169664"/>
+            <a:ext cx="685800" cy="384048"/>
           </a:xfrm>
           <a:prstGeom prst="rect">
             <a:avLst>
-              <a:gd name="adj" fmla="val 6818"/>
+              <a:gd name="adj" fmla="val 9524"/>
             </a:avLst>
           </a:prstGeom>
           <a:solidFill>
-            <a:srgbClr val="E2E8F0"/>
-          </a:solidFill>
-          <a:ln w="12700">
-            <a:solidFill>
-              <a:srgbClr val="E2E8F0"/>
-            </a:solidFill>
-            <a:prstDash val="solid"/>
-          </a:ln>
-        </p:spPr>
-      </p:sp>
-      <p:sp>
-        <p:nvSpPr>
-          <p:cNvPr id="37" name="Text 35"/>
-          <p:cNvSpPr/>
-          <p:nvPr/>
-        </p:nvSpPr>
-        <p:spPr>
-          <a:xfrm>
-            <a:off x="365760" y="4096512"/>
-            <a:ext cx="1371600" cy="804672"/>
-          </a:xfrm>
-          <a:prstGeom prst="rect">
-            <a:avLst/>
-          </a:prstGeom>
-          <a:noFill/>
-          <a:ln/>
-        </p:spPr>
-        <p:txBody>
-          <a:bodyPr wrap="square" lIns="0" tIns="0" rIns="0" bIns="0" rtlCol="0" anchor="ctr"/>
-          <a:lstStyle/>
-          <a:p>
-            <a:pPr algn="ctr" indent="0" marL="0">
-              <a:buNone/>
-            </a:pPr>
-            <a:r>
-              <a:rPr lang="en-US" sz="1100" b="1" dirty="0">
-                <a:solidFill>
-                  <a:srgbClr val="475569"/>
+            <a:srgbClr val="FFFFFF"/>
+          </a:solidFill>
+          <a:ln w="12700">
+            <a:solidFill>
+              <a:srgbClr val="DB2777"/>
+            </a:solidFill>
+            <a:prstDash val="solid"/>
+          </a:ln>
+        </p:spPr>
+      </p:sp>
+      <p:sp>
+        <p:nvSpPr>
+          <p:cNvPr id="42" name="Text 40"/>
+          <p:cNvSpPr/>
+          <p:nvPr/>
+        </p:nvSpPr>
+        <p:spPr>
+          <a:xfrm>
+            <a:off x="5370141" y="4169664"/>
+            <a:ext cx="685800" cy="384048"/>
+          </a:xfrm>
+          <a:prstGeom prst="rect">
+            <a:avLst/>
+          </a:prstGeom>
+          <a:noFill/>
+          <a:ln/>
+        </p:spPr>
+        <p:txBody>
+          <a:bodyPr wrap="square" lIns="0" tIns="0" rIns="0" bIns="0" rtlCol="0" anchor="ctr"/>
+          <a:lstStyle/>
+          <a:p>
+            <a:pPr algn="ctr" indent="0" marL="0">
+              <a:buNone/>
+            </a:pPr>
+            <a:r>
+              <a:rPr lang="en-US" sz="900" b="1" dirty="0">
+                <a:solidFill>
+                  <a:srgbClr val="9D174D"/>
                 </a:solidFill>
                 <a:latin typeface="Trebuchet MS" pitchFamily="34" charset="0"/>
                 <a:ea typeface="Trebuchet MS" pitchFamily="34" charset="-122"/>
                 <a:cs typeface="Trebuchet MS" pitchFamily="34" charset="-120"/>
               </a:rPr>
-              <a:t>Phonemes</a:t>
-            </a:r>
-            <a:endParaRPr lang="en-US" sz="1100" dirty="0"/>
-          </a:p>
-        </p:txBody>
-      </p:sp>
-      <p:sp>
-        <p:nvSpPr>
-          <p:cNvPr id="38" name="Shape 36"/>
-          <p:cNvSpPr/>
-          <p:nvPr/>
-        </p:nvSpPr>
-        <p:spPr>
-          <a:xfrm>
-            <a:off x="1874520" y="4096512"/>
-            <a:ext cx="6903720" cy="804672"/>
-          </a:xfrm>
-          <a:prstGeom prst="rect">
-            <a:avLst>
-              <a:gd name="adj" fmla="val 6818"/>
-            </a:avLst>
-          </a:prstGeom>
-          <a:solidFill>
-            <a:srgbClr val="FCE7F3"/>
-          </a:solidFill>
-          <a:ln w="12700">
-            <a:solidFill>
-              <a:srgbClr val="DB2777"/>
-            </a:solidFill>
-            <a:prstDash val="solid"/>
-          </a:ln>
-        </p:spPr>
-      </p:sp>
-      <p:sp>
-        <p:nvSpPr>
-          <p:cNvPr id="39" name="Shape 37"/>
-          <p:cNvSpPr/>
-          <p:nvPr/>
-        </p:nvSpPr>
-        <p:spPr>
-          <a:xfrm>
-            <a:off x="2427732" y="4169664"/>
+              <a:t>m</a:t>
+            </a:r>
+            <a:endParaRPr lang="en-US" sz="900" dirty="0"/>
+          </a:p>
+        </p:txBody>
+      </p:sp>
+      <p:sp>
+        <p:nvSpPr>
+          <p:cNvPr id="43" name="Shape 41"/>
+          <p:cNvSpPr/>
+          <p:nvPr/>
+        </p:nvSpPr>
+        <p:spPr>
+          <a:xfrm>
+            <a:off x="6408638" y="4169664"/>
             <a:ext cx="685800" cy="384048"/>
           </a:xfrm>
           <a:prstGeom prst="rect">
@@ -27839,13 +27749,13 @@
       </p:sp>
       <p:sp>
         <p:nvSpPr>
-          <p:cNvPr id="40" name="Text 38"/>
-          <p:cNvSpPr/>
-          <p:nvPr/>
-        </p:nvSpPr>
-        <p:spPr>
-          <a:xfrm>
-            <a:off x="2427732" y="4169664"/>
+          <p:cNvPr id="44" name="Text 42"/>
+          <p:cNvSpPr/>
+          <p:nvPr/>
+        </p:nvSpPr>
+        <p:spPr>
+          <a:xfrm>
+            <a:off x="6408638" y="4169664"/>
             <a:ext cx="685800" cy="384048"/>
           </a:xfrm>
           <a:prstGeom prst="rect">
@@ -27870,7 +27780,7 @@
                 <a:ea typeface="Trebuchet MS" pitchFamily="34" charset="-122"/>
                 <a:cs typeface="Trebuchet MS" pitchFamily="34" charset="-120"/>
               </a:rPr>
-              <a:t>o</a:t>
+              <a:t>i</a:t>
             </a:r>
             <a:endParaRPr lang="en-US" sz="900" dirty="0"/>
           </a:p>
@@ -27878,13 +27788,13 @@
       </p:sp>
       <p:sp>
         <p:nvSpPr>
-          <p:cNvPr id="41" name="Shape 39"/>
-          <p:cNvSpPr/>
-          <p:nvPr/>
-        </p:nvSpPr>
-        <p:spPr>
-          <a:xfrm>
-            <a:off x="3639312" y="4169664"/>
+          <p:cNvPr id="45" name="Shape 43"/>
+          <p:cNvSpPr/>
+          <p:nvPr/>
+        </p:nvSpPr>
+        <p:spPr>
+          <a:xfrm>
+            <a:off x="7447135" y="4169664"/>
             <a:ext cx="685800" cy="384048"/>
           </a:xfrm>
           <a:prstGeom prst="rect">
@@ -27905,13 +27815,13 @@
       </p:sp>
       <p:sp>
         <p:nvSpPr>
-          <p:cNvPr id="42" name="Text 40"/>
-          <p:cNvSpPr/>
-          <p:nvPr/>
-        </p:nvSpPr>
-        <p:spPr>
-          <a:xfrm>
-            <a:off x="3639312" y="4169664"/>
+          <p:cNvPr id="46" name="Text 44"/>
+          <p:cNvSpPr/>
+          <p:nvPr/>
+        </p:nvSpPr>
+        <p:spPr>
+          <a:xfrm>
+            <a:off x="7447135" y="4169664"/>
             <a:ext cx="685800" cy="384048"/>
           </a:xfrm>
           <a:prstGeom prst="rect">
@@ -27936,7 +27846,7 @@
                 <a:ea typeface="Trebuchet MS" pitchFamily="34" charset="-122"/>
                 <a:cs typeface="Trebuchet MS" pitchFamily="34" charset="-120"/>
               </a:rPr>
-              <a:t>ce</a:t>
+              <a:t>c</a:t>
             </a:r>
             <a:endParaRPr lang="en-US" sz="900" dirty="0"/>
           </a:p>
@@ -27944,13 +27854,13 @@
       </p:sp>
       <p:sp>
         <p:nvSpPr>
-          <p:cNvPr id="43" name="Text 41"/>
-          <p:cNvSpPr/>
-          <p:nvPr/>
-        </p:nvSpPr>
-        <p:spPr>
-          <a:xfrm>
-            <a:off x="3639312" y="4572000"/>
+          <p:cNvPr id="47" name="Text 45"/>
+          <p:cNvSpPr/>
+          <p:nvPr/>
+        </p:nvSpPr>
+        <p:spPr>
+          <a:xfrm>
+            <a:off x="7447135" y="4572000"/>
             <a:ext cx="685800" cy="219456"/>
           </a:xfrm>
           <a:prstGeom prst="rect">
@@ -27975,244 +27885,7 @@
                 <a:ea typeface="Calibri" pitchFamily="34" charset="-122"/>
                 <a:cs typeface="Calibri" pitchFamily="34" charset="-120"/>
               </a:rPr>
-              <a:t>/sh/</a:t>
-            </a:r>
-            <a:endParaRPr lang="en-US" sz="750" dirty="0"/>
-          </a:p>
-        </p:txBody>
-      </p:sp>
-      <p:sp>
-        <p:nvSpPr>
-          <p:cNvPr id="44" name="Shape 42"/>
-          <p:cNvSpPr/>
-          <p:nvPr/>
-        </p:nvSpPr>
-        <p:spPr>
-          <a:xfrm>
-            <a:off x="4850892" y="4169664"/>
-            <a:ext cx="685800" cy="384048"/>
-          </a:xfrm>
-          <a:prstGeom prst="rect">
-            <a:avLst>
-              <a:gd name="adj" fmla="val 9524"/>
-            </a:avLst>
-          </a:prstGeom>
-          <a:solidFill>
-            <a:srgbClr val="FFFFFF"/>
-          </a:solidFill>
-          <a:ln w="12700">
-            <a:solidFill>
-              <a:srgbClr val="DB2777"/>
-            </a:solidFill>
-            <a:prstDash val="solid"/>
-          </a:ln>
-        </p:spPr>
-      </p:sp>
-      <p:sp>
-        <p:nvSpPr>
-          <p:cNvPr id="45" name="Text 43"/>
-          <p:cNvSpPr/>
-          <p:nvPr/>
-        </p:nvSpPr>
-        <p:spPr>
-          <a:xfrm>
-            <a:off x="4850892" y="4169664"/>
-            <a:ext cx="685800" cy="384048"/>
-          </a:xfrm>
-          <a:prstGeom prst="rect">
-            <a:avLst/>
-          </a:prstGeom>
-          <a:noFill/>
-          <a:ln/>
-        </p:spPr>
-        <p:txBody>
-          <a:bodyPr wrap="square" lIns="0" tIns="0" rIns="0" bIns="0" rtlCol="0" anchor="ctr"/>
-          <a:lstStyle/>
-          <a:p>
-            <a:pPr algn="ctr" indent="0" marL="0">
-              <a:buNone/>
-            </a:pPr>
-            <a:r>
-              <a:rPr lang="en-US" sz="900" b="1" dirty="0">
-                <a:solidFill>
-                  <a:srgbClr val="9D174D"/>
-                </a:solidFill>
-                <a:latin typeface="Trebuchet MS" pitchFamily="34" charset="0"/>
-                <a:ea typeface="Trebuchet MS" pitchFamily="34" charset="-122"/>
-                <a:cs typeface="Trebuchet MS" pitchFamily="34" charset="-120"/>
-              </a:rPr>
-              <a:t>a</a:t>
-            </a:r>
-            <a:endParaRPr lang="en-US" sz="900" dirty="0"/>
-          </a:p>
-        </p:txBody>
-      </p:sp>
-      <p:sp>
-        <p:nvSpPr>
-          <p:cNvPr id="46" name="Shape 44"/>
-          <p:cNvSpPr/>
-          <p:nvPr/>
-        </p:nvSpPr>
-        <p:spPr>
-          <a:xfrm>
-            <a:off x="6062472" y="4169664"/>
-            <a:ext cx="685800" cy="384048"/>
-          </a:xfrm>
-          <a:prstGeom prst="rect">
-            <a:avLst>
-              <a:gd name="adj" fmla="val 9524"/>
-            </a:avLst>
-          </a:prstGeom>
-          <a:solidFill>
-            <a:srgbClr val="FFFFFF"/>
-          </a:solidFill>
-          <a:ln w="12700">
-            <a:solidFill>
-              <a:srgbClr val="DB2777"/>
-            </a:solidFill>
-            <a:prstDash val="solid"/>
-          </a:ln>
-        </p:spPr>
-      </p:sp>
-      <p:sp>
-        <p:nvSpPr>
-          <p:cNvPr id="47" name="Text 45"/>
-          <p:cNvSpPr/>
-          <p:nvPr/>
-        </p:nvSpPr>
-        <p:spPr>
-          <a:xfrm>
-            <a:off x="6062472" y="4169664"/>
-            <a:ext cx="685800" cy="384048"/>
-          </a:xfrm>
-          <a:prstGeom prst="rect">
-            <a:avLst/>
-          </a:prstGeom>
-          <a:noFill/>
-          <a:ln/>
-        </p:spPr>
-        <p:txBody>
-          <a:bodyPr wrap="square" lIns="0" tIns="0" rIns="0" bIns="0" rtlCol="0" anchor="ctr"/>
-          <a:lstStyle/>
-          <a:p>
-            <a:pPr algn="ctr" indent="0" marL="0">
-              <a:buNone/>
-            </a:pPr>
-            <a:r>
-              <a:rPr lang="en-US" sz="900" b="1" dirty="0">
-                <a:solidFill>
-                  <a:srgbClr val="9D174D"/>
-                </a:solidFill>
-                <a:latin typeface="Trebuchet MS" pitchFamily="34" charset="0"/>
-                <a:ea typeface="Trebuchet MS" pitchFamily="34" charset="-122"/>
-                <a:cs typeface="Trebuchet MS" pitchFamily="34" charset="-120"/>
-              </a:rPr>
-              <a:t>n</a:t>
-            </a:r>
-            <a:endParaRPr lang="en-US" sz="900" dirty="0"/>
-          </a:p>
-        </p:txBody>
-      </p:sp>
-      <p:sp>
-        <p:nvSpPr>
-          <p:cNvPr id="48" name="Shape 46"/>
-          <p:cNvSpPr/>
-          <p:nvPr/>
-        </p:nvSpPr>
-        <p:spPr>
-          <a:xfrm>
-            <a:off x="7274052" y="4169664"/>
-            <a:ext cx="685800" cy="384048"/>
-          </a:xfrm>
-          <a:prstGeom prst="rect">
-            <a:avLst>
-              <a:gd name="adj" fmla="val 9524"/>
-            </a:avLst>
-          </a:prstGeom>
-          <a:solidFill>
-            <a:srgbClr val="FFFFFF"/>
-          </a:solidFill>
-          <a:ln w="12700">
-            <a:solidFill>
-              <a:srgbClr val="DB2777"/>
-            </a:solidFill>
-            <a:prstDash val="solid"/>
-          </a:ln>
-        </p:spPr>
-      </p:sp>
-      <p:sp>
-        <p:nvSpPr>
-          <p:cNvPr id="49" name="Text 47"/>
-          <p:cNvSpPr/>
-          <p:nvPr/>
-        </p:nvSpPr>
-        <p:spPr>
-          <a:xfrm>
-            <a:off x="7274052" y="4169664"/>
-            <a:ext cx="685800" cy="384048"/>
-          </a:xfrm>
-          <a:prstGeom prst="rect">
-            <a:avLst/>
-          </a:prstGeom>
-          <a:noFill/>
-          <a:ln/>
-        </p:spPr>
-        <p:txBody>
-          <a:bodyPr wrap="square" lIns="0" tIns="0" rIns="0" bIns="0" rtlCol="0" anchor="ctr"/>
-          <a:lstStyle/>
-          <a:p>
-            <a:pPr algn="ctr" indent="0" marL="0">
-              <a:buNone/>
-            </a:pPr>
-            <a:r>
-              <a:rPr lang="en-US" sz="900" b="1" dirty="0">
-                <a:solidFill>
-                  <a:srgbClr val="9D174D"/>
-                </a:solidFill>
-                <a:latin typeface="Trebuchet MS" pitchFamily="34" charset="0"/>
-                <a:ea typeface="Trebuchet MS" pitchFamily="34" charset="-122"/>
-                <a:cs typeface="Trebuchet MS" pitchFamily="34" charset="-120"/>
-              </a:rPr>
-              <a:t>ic</a:t>
-            </a:r>
-            <a:endParaRPr lang="en-US" sz="900" dirty="0"/>
-          </a:p>
-        </p:txBody>
-      </p:sp>
-      <p:sp>
-        <p:nvSpPr>
-          <p:cNvPr id="50" name="Text 48"/>
-          <p:cNvSpPr/>
-          <p:nvPr/>
-        </p:nvSpPr>
-        <p:spPr>
-          <a:xfrm>
-            <a:off x="7274052" y="4572000"/>
-            <a:ext cx="685800" cy="219456"/>
-          </a:xfrm>
-          <a:prstGeom prst="rect">
-            <a:avLst/>
-          </a:prstGeom>
-          <a:noFill/>
-          <a:ln/>
-        </p:spPr>
-        <p:txBody>
-          <a:bodyPr wrap="square" lIns="0" tIns="0" rIns="0" bIns="0" rtlCol="0" anchor="t"/>
-          <a:lstStyle/>
-          <a:p>
-            <a:pPr algn="ctr" indent="0" marL="0">
-              <a:buNone/>
-            </a:pPr>
-            <a:r>
-              <a:rPr lang="en-US" sz="750" i="1" dirty="0">
-                <a:solidFill>
-                  <a:srgbClr val="94A3B8"/>
-                </a:solidFill>
-                <a:latin typeface="Calibri" pitchFamily="34" charset="0"/>
-                <a:ea typeface="Calibri" pitchFamily="34" charset="-122"/>
-                <a:cs typeface="Calibri" pitchFamily="34" charset="-120"/>
-              </a:rPr>
-              <a:t>/ik/</a:t>
+              <a:t>/k/</a:t>
             </a:r>
             <a:endParaRPr lang="en-US" sz="750" dirty="0"/>
           </a:p>
@@ -28643,7 +28316,7 @@
                 <a:ea typeface="Trebuchet MS" pitchFamily="34" charset="-122"/>
                 <a:cs typeface="Trebuchet MS" pitchFamily="34" charset="-120"/>
               </a:rPr>
-              <a:t>atomic</a:t>
+              <a:t>electric</a:t>
             </a:r>
             <a:endParaRPr lang="en-US" sz="2800" dirty="0"/>
           </a:p>
@@ -29470,7 +29143,7 @@
                 <a:ea typeface="Trebuchet MS" pitchFamily="34" charset="-122"/>
                 <a:cs typeface="Trebuchet MS" pitchFamily="34" charset="-120"/>
               </a:rPr>
-              <a:t>atomic</a:t>
+              <a:t>electric</a:t>
             </a:r>
             <a:endParaRPr lang="en-US" sz="2800" dirty="0"/>
           </a:p>
@@ -29609,7 +29282,7 @@
                 <a:ea typeface="Trebuchet MS" pitchFamily="34" charset="-122"/>
                 <a:cs typeface="Trebuchet MS" pitchFamily="34" charset="-120"/>
               </a:rPr>
-              <a:t>atom</a:t>
+              <a:t>electr</a:t>
             </a:r>
             <a:endParaRPr lang="en-US" sz="1300" dirty="0"/>
           </a:p>
@@ -29648,7 +29321,7 @@
                 <a:ea typeface="Calibri" pitchFamily="34" charset="-122"/>
                 <a:cs typeface="Calibri" pitchFamily="34" charset="-120"/>
               </a:rPr>
-              <a:t>tiny particle</a:t>
+              <a:t>electricity, amber</a:t>
             </a:r>
             <a:endParaRPr lang="en-US" sz="850" dirty="0"/>
           </a:p>
@@ -29760,7 +29433,7 @@
                 <a:ea typeface="Calibri" pitchFamily="34" charset="-122"/>
                 <a:cs typeface="Calibri" pitchFamily="34" charset="-120"/>
               </a:rPr>
-              <a:t>relating to</a:t>
+              <a:t>relating to, having the nature of</a:t>
             </a:r>
             <a:endParaRPr lang="en-US" sz="850" dirty="0"/>
           </a:p>
@@ -30455,7 +30128,7 @@
                 <a:ea typeface="Trebuchet MS" pitchFamily="34" charset="-122"/>
                 <a:cs typeface="Trebuchet MS" pitchFamily="34" charset="-120"/>
               </a:rPr>
-              <a:t>atomic</a:t>
+              <a:t>electric</a:t>
             </a:r>
             <a:endParaRPr lang="en-US" sz="2800" dirty="0"/>
           </a:p>
@@ -30594,7 +30267,7 @@
                 <a:ea typeface="Trebuchet MS" pitchFamily="34" charset="-122"/>
                 <a:cs typeface="Trebuchet MS" pitchFamily="34" charset="-120"/>
               </a:rPr>
-              <a:t>atom</a:t>
+              <a:t>electr</a:t>
             </a:r>
             <a:endParaRPr lang="en-US" sz="1300" dirty="0"/>
           </a:p>
@@ -30633,7 +30306,7 @@
                 <a:ea typeface="Calibri" pitchFamily="34" charset="-122"/>
                 <a:cs typeface="Calibri" pitchFamily="34" charset="-120"/>
               </a:rPr>
-              <a:t>tiny particle</a:t>
+              <a:t>electricity, amber</a:t>
             </a:r>
             <a:endParaRPr lang="en-US" sz="850" dirty="0"/>
           </a:p>
@@ -30745,7 +30418,7 @@
                 <a:ea typeface="Calibri" pitchFamily="34" charset="-122"/>
                 <a:cs typeface="Calibri" pitchFamily="34" charset="-120"/>
               </a:rPr>
-              <a:t>relating to</a:t>
+              <a:t>relating to, having the nature of</a:t>
             </a:r>
             <a:endParaRPr lang="en-US" sz="850" dirty="0"/>
           </a:p>
@@ -30904,7 +30577,7 @@
                 <a:ea typeface="Trebuchet MS" pitchFamily="34" charset="-122"/>
                 <a:cs typeface="Trebuchet MS" pitchFamily="34" charset="-120"/>
               </a:rPr>
-              <a:t>a</a:t>
+              <a:t>e</a:t>
             </a:r>
             <a:endParaRPr lang="en-US" sz="1400" dirty="0"/>
           </a:p>
@@ -31009,7 +30682,7 @@
                 <a:ea typeface="Trebuchet MS" pitchFamily="34" charset="-122"/>
                 <a:cs typeface="Trebuchet MS" pitchFamily="34" charset="-120"/>
               </a:rPr>
-              <a:t>tom</a:t>
+              <a:t>lec</a:t>
             </a:r>
             <a:endParaRPr lang="en-US" sz="1400" dirty="0"/>
           </a:p>
@@ -31114,7 +30787,7 @@
                 <a:ea typeface="Trebuchet MS" pitchFamily="34" charset="-122"/>
                 <a:cs typeface="Trebuchet MS" pitchFamily="34" charset="-120"/>
               </a:rPr>
-              <a:t>ic</a:t>
+              <a:t>tric</a:t>
             </a:r>
             <a:endParaRPr lang="en-US" sz="1400" dirty="0"/>
           </a:p>
@@ -31677,7 +31350,7 @@
                 <a:ea typeface="Trebuchet MS" pitchFamily="34" charset="-122"/>
                 <a:cs typeface="Trebuchet MS" pitchFamily="34" charset="-120"/>
               </a:rPr>
-              <a:t>atomic</a:t>
+              <a:t>electric</a:t>
             </a:r>
             <a:endParaRPr lang="en-US" sz="2800" dirty="0"/>
           </a:p>
@@ -31816,7 +31489,7 @@
                 <a:ea typeface="Trebuchet MS" pitchFamily="34" charset="-122"/>
                 <a:cs typeface="Trebuchet MS" pitchFamily="34" charset="-120"/>
               </a:rPr>
-              <a:t>atom</a:t>
+              <a:t>electr</a:t>
             </a:r>
             <a:endParaRPr lang="en-US" sz="1300" dirty="0"/>
           </a:p>
@@ -31855,7 +31528,7 @@
                 <a:ea typeface="Calibri" pitchFamily="34" charset="-122"/>
                 <a:cs typeface="Calibri" pitchFamily="34" charset="-120"/>
               </a:rPr>
-              <a:t>tiny particle</a:t>
+              <a:t>electricity, amber</a:t>
             </a:r>
             <a:endParaRPr lang="en-US" sz="850" dirty="0"/>
           </a:p>
@@ -31967,7 +31640,7 @@
                 <a:ea typeface="Calibri" pitchFamily="34" charset="-122"/>
                 <a:cs typeface="Calibri" pitchFamily="34" charset="-120"/>
               </a:rPr>
-              <a:t>relating to</a:t>
+              <a:t>relating to, having the nature of</a:t>
             </a:r>
             <a:endParaRPr lang="en-US" sz="850" dirty="0"/>
           </a:p>
@@ -32126,7 +31799,7 @@
                 <a:ea typeface="Trebuchet MS" pitchFamily="34" charset="-122"/>
                 <a:cs typeface="Trebuchet MS" pitchFamily="34" charset="-120"/>
               </a:rPr>
-              <a:t>a</a:t>
+              <a:t>e</a:t>
             </a:r>
             <a:endParaRPr lang="en-US" sz="1400" dirty="0"/>
           </a:p>
@@ -32231,7 +31904,7 @@
                 <a:ea typeface="Trebuchet MS" pitchFamily="34" charset="-122"/>
                 <a:cs typeface="Trebuchet MS" pitchFamily="34" charset="-120"/>
               </a:rPr>
-              <a:t>tom</a:t>
+              <a:t>lec</a:t>
             </a:r>
             <a:endParaRPr lang="en-US" sz="1400" dirty="0"/>
           </a:p>
@@ -32336,7 +32009,7 @@
                 <a:ea typeface="Trebuchet MS" pitchFamily="34" charset="-122"/>
                 <a:cs typeface="Trebuchet MS" pitchFamily="34" charset="-120"/>
               </a:rPr>
-              <a:t>ic</a:t>
+              <a:t>tric</a:t>
             </a:r>
             <a:endParaRPr lang="en-US" sz="1400" dirty="0"/>
           </a:p>
@@ -32443,7 +32116,7 @@
         </p:nvSpPr>
         <p:spPr>
           <a:xfrm>
-            <a:off x="2427732" y="4169664"/>
+            <a:off x="2023872" y="4169664"/>
             <a:ext cx="685800" cy="384048"/>
           </a:xfrm>
           <a:prstGeom prst="rect">
@@ -32470,7 +32143,7 @@
         </p:nvSpPr>
         <p:spPr>
           <a:xfrm>
-            <a:off x="2427732" y="4169664"/>
+            <a:off x="2023872" y="4169664"/>
             <a:ext cx="685800" cy="384048"/>
           </a:xfrm>
           <a:prstGeom prst="rect">
@@ -32495,7 +32168,7 @@
                 <a:ea typeface="Trebuchet MS" pitchFamily="34" charset="-122"/>
                 <a:cs typeface="Trebuchet MS" pitchFamily="34" charset="-120"/>
               </a:rPr>
-              <a:t>a</a:t>
+              <a:t>e</a:t>
             </a:r>
             <a:endParaRPr lang="en-US" sz="900" dirty="0"/>
           </a:p>
@@ -32509,7 +32182,7 @@
         </p:nvSpPr>
         <p:spPr>
           <a:xfrm>
-            <a:off x="3639312" y="4169664"/>
+            <a:off x="2831592" y="4169664"/>
             <a:ext cx="685800" cy="384048"/>
           </a:xfrm>
           <a:prstGeom prst="rect">
@@ -32536,7 +32209,7 @@
         </p:nvSpPr>
         <p:spPr>
           <a:xfrm>
-            <a:off x="3639312" y="4169664"/>
+            <a:off x="2831592" y="4169664"/>
             <a:ext cx="685800" cy="384048"/>
           </a:xfrm>
           <a:prstGeom prst="rect">
@@ -32561,7 +32234,7 @@
                 <a:ea typeface="Trebuchet MS" pitchFamily="34" charset="-122"/>
                 <a:cs typeface="Trebuchet MS" pitchFamily="34" charset="-120"/>
               </a:rPr>
-              <a:t>t</a:t>
+              <a:t>l</a:t>
             </a:r>
             <a:endParaRPr lang="en-US" sz="900" dirty="0"/>
           </a:p>
@@ -32575,7 +32248,7 @@
         </p:nvSpPr>
         <p:spPr>
           <a:xfrm>
-            <a:off x="4850892" y="4169664"/>
+            <a:off x="3639312" y="4169664"/>
             <a:ext cx="685800" cy="384048"/>
           </a:xfrm>
           <a:prstGeom prst="rect">
@@ -32602,7 +32275,7 @@
         </p:nvSpPr>
         <p:spPr>
           <a:xfrm>
-            <a:off x="4850892" y="4169664"/>
+            <a:off x="3639312" y="4169664"/>
             <a:ext cx="685800" cy="384048"/>
           </a:xfrm>
           <a:prstGeom prst="rect">
@@ -32627,7 +32300,7 @@
                 <a:ea typeface="Trebuchet MS" pitchFamily="34" charset="-122"/>
                 <a:cs typeface="Trebuchet MS" pitchFamily="34" charset="-120"/>
               </a:rPr>
-              <a:t>o</a:t>
+              <a:t>e</a:t>
             </a:r>
             <a:endParaRPr lang="en-US" sz="900" dirty="0"/>
           </a:p>
@@ -32641,7 +32314,7 @@
         </p:nvSpPr>
         <p:spPr>
           <a:xfrm>
-            <a:off x="6062472" y="4169664"/>
+            <a:off x="4447032" y="4169664"/>
             <a:ext cx="685800" cy="384048"/>
           </a:xfrm>
           <a:prstGeom prst="rect">
@@ -32668,7 +32341,7 @@
         </p:nvSpPr>
         <p:spPr>
           <a:xfrm>
-            <a:off x="6062472" y="4169664"/>
+            <a:off x="4447032" y="4169664"/>
             <a:ext cx="685800" cy="384048"/>
           </a:xfrm>
           <a:prstGeom prst="rect">
@@ -32693,7 +32366,7 @@
                 <a:ea typeface="Trebuchet MS" pitchFamily="34" charset="-122"/>
                 <a:cs typeface="Trebuchet MS" pitchFamily="34" charset="-120"/>
               </a:rPr>
-              <a:t>m</a:t>
+              <a:t>c</a:t>
             </a:r>
             <a:endParaRPr lang="en-US" sz="900" dirty="0"/>
           </a:p>
@@ -32701,13 +32374,52 @@
       </p:sp>
       <p:sp>
         <p:nvSpPr>
-          <p:cNvPr id="44" name="Shape 42"/>
-          <p:cNvSpPr/>
-          <p:nvPr/>
-        </p:nvSpPr>
-        <p:spPr>
-          <a:xfrm>
-            <a:off x="7274052" y="4169664"/>
+          <p:cNvPr id="44" name="Text 42"/>
+          <p:cNvSpPr/>
+          <p:nvPr/>
+        </p:nvSpPr>
+        <p:spPr>
+          <a:xfrm>
+            <a:off x="4447032" y="4572000"/>
+            <a:ext cx="685800" cy="219456"/>
+          </a:xfrm>
+          <a:prstGeom prst="rect">
+            <a:avLst/>
+          </a:prstGeom>
+          <a:noFill/>
+          <a:ln/>
+        </p:spPr>
+        <p:txBody>
+          <a:bodyPr wrap="square" lIns="0" tIns="0" rIns="0" bIns="0" rtlCol="0" anchor="t"/>
+          <a:lstStyle/>
+          <a:p>
+            <a:pPr algn="ctr" indent="0" marL="0">
+              <a:buNone/>
+            </a:pPr>
+            <a:r>
+              <a:rPr lang="en-US" sz="750" i="1" dirty="0">
+                <a:solidFill>
+                  <a:srgbClr val="94A3B8"/>
+                </a:solidFill>
+                <a:latin typeface="Calibri" pitchFamily="34" charset="0"/>
+                <a:ea typeface="Calibri" pitchFamily="34" charset="-122"/>
+                <a:cs typeface="Calibri" pitchFamily="34" charset="-120"/>
+              </a:rPr>
+              <a:t>/k/</a:t>
+            </a:r>
+            <a:endParaRPr lang="en-US" sz="750" dirty="0"/>
+          </a:p>
+        </p:txBody>
+      </p:sp>
+      <p:sp>
+        <p:nvSpPr>
+          <p:cNvPr id="45" name="Shape 43"/>
+          <p:cNvSpPr/>
+          <p:nvPr/>
+        </p:nvSpPr>
+        <p:spPr>
+          <a:xfrm>
+            <a:off x="5254752" y="4169664"/>
             <a:ext cx="685800" cy="384048"/>
           </a:xfrm>
           <a:prstGeom prst="rect">
@@ -32728,13 +32440,13 @@
       </p:sp>
       <p:sp>
         <p:nvSpPr>
-          <p:cNvPr id="45" name="Text 43"/>
-          <p:cNvSpPr/>
-          <p:nvPr/>
-        </p:nvSpPr>
-        <p:spPr>
-          <a:xfrm>
-            <a:off x="7274052" y="4169664"/>
+          <p:cNvPr id="46" name="Text 44"/>
+          <p:cNvSpPr/>
+          <p:nvPr/>
+        </p:nvSpPr>
+        <p:spPr>
+          <a:xfrm>
+            <a:off x="5254752" y="4169664"/>
             <a:ext cx="685800" cy="384048"/>
           </a:xfrm>
           <a:prstGeom prst="rect">
@@ -32759,7 +32471,7 @@
                 <a:ea typeface="Trebuchet MS" pitchFamily="34" charset="-122"/>
                 <a:cs typeface="Trebuchet MS" pitchFamily="34" charset="-120"/>
               </a:rPr>
-              <a:t>ic</a:t>
+              <a:t>t</a:t>
             </a:r>
             <a:endParaRPr lang="en-US" sz="900" dirty="0"/>
           </a:p>
@@ -32767,13 +32479,211 @@
       </p:sp>
       <p:sp>
         <p:nvSpPr>
-          <p:cNvPr id="46" name="Text 44"/>
-          <p:cNvSpPr/>
-          <p:nvPr/>
-        </p:nvSpPr>
-        <p:spPr>
-          <a:xfrm>
-            <a:off x="7274052" y="4572000"/>
+          <p:cNvPr id="47" name="Shape 45"/>
+          <p:cNvSpPr/>
+          <p:nvPr/>
+        </p:nvSpPr>
+        <p:spPr>
+          <a:xfrm>
+            <a:off x="6062472" y="4169664"/>
+            <a:ext cx="685800" cy="384048"/>
+          </a:xfrm>
+          <a:prstGeom prst="rect">
+            <a:avLst>
+              <a:gd name="adj" fmla="val 9524"/>
+            </a:avLst>
+          </a:prstGeom>
+          <a:solidFill>
+            <a:srgbClr val="FFFFFF"/>
+          </a:solidFill>
+          <a:ln w="12700">
+            <a:solidFill>
+              <a:srgbClr val="DB2777"/>
+            </a:solidFill>
+            <a:prstDash val="solid"/>
+          </a:ln>
+        </p:spPr>
+      </p:sp>
+      <p:sp>
+        <p:nvSpPr>
+          <p:cNvPr id="48" name="Text 46"/>
+          <p:cNvSpPr/>
+          <p:nvPr/>
+        </p:nvSpPr>
+        <p:spPr>
+          <a:xfrm>
+            <a:off x="6062472" y="4169664"/>
+            <a:ext cx="685800" cy="384048"/>
+          </a:xfrm>
+          <a:prstGeom prst="rect">
+            <a:avLst/>
+          </a:prstGeom>
+          <a:noFill/>
+          <a:ln/>
+        </p:spPr>
+        <p:txBody>
+          <a:bodyPr wrap="square" lIns="0" tIns="0" rIns="0" bIns="0" rtlCol="0" anchor="ctr"/>
+          <a:lstStyle/>
+          <a:p>
+            <a:pPr algn="ctr" indent="0" marL="0">
+              <a:buNone/>
+            </a:pPr>
+            <a:r>
+              <a:rPr lang="en-US" sz="900" b="1" dirty="0">
+                <a:solidFill>
+                  <a:srgbClr val="9D174D"/>
+                </a:solidFill>
+                <a:latin typeface="Trebuchet MS" pitchFamily="34" charset="0"/>
+                <a:ea typeface="Trebuchet MS" pitchFamily="34" charset="-122"/>
+                <a:cs typeface="Trebuchet MS" pitchFamily="34" charset="-120"/>
+              </a:rPr>
+              <a:t>r</a:t>
+            </a:r>
+            <a:endParaRPr lang="en-US" sz="900" dirty="0"/>
+          </a:p>
+        </p:txBody>
+      </p:sp>
+      <p:sp>
+        <p:nvSpPr>
+          <p:cNvPr id="49" name="Shape 47"/>
+          <p:cNvSpPr/>
+          <p:nvPr/>
+        </p:nvSpPr>
+        <p:spPr>
+          <a:xfrm>
+            <a:off x="6870192" y="4169664"/>
+            <a:ext cx="685800" cy="384048"/>
+          </a:xfrm>
+          <a:prstGeom prst="rect">
+            <a:avLst>
+              <a:gd name="adj" fmla="val 9524"/>
+            </a:avLst>
+          </a:prstGeom>
+          <a:solidFill>
+            <a:srgbClr val="FFFFFF"/>
+          </a:solidFill>
+          <a:ln w="12700">
+            <a:solidFill>
+              <a:srgbClr val="DB2777"/>
+            </a:solidFill>
+            <a:prstDash val="solid"/>
+          </a:ln>
+        </p:spPr>
+      </p:sp>
+      <p:sp>
+        <p:nvSpPr>
+          <p:cNvPr id="50" name="Text 48"/>
+          <p:cNvSpPr/>
+          <p:nvPr/>
+        </p:nvSpPr>
+        <p:spPr>
+          <a:xfrm>
+            <a:off x="6870192" y="4169664"/>
+            <a:ext cx="685800" cy="384048"/>
+          </a:xfrm>
+          <a:prstGeom prst="rect">
+            <a:avLst/>
+          </a:prstGeom>
+          <a:noFill/>
+          <a:ln/>
+        </p:spPr>
+        <p:txBody>
+          <a:bodyPr wrap="square" lIns="0" tIns="0" rIns="0" bIns="0" rtlCol="0" anchor="ctr"/>
+          <a:lstStyle/>
+          <a:p>
+            <a:pPr algn="ctr" indent="0" marL="0">
+              <a:buNone/>
+            </a:pPr>
+            <a:r>
+              <a:rPr lang="en-US" sz="900" b="1" dirty="0">
+                <a:solidFill>
+                  <a:srgbClr val="9D174D"/>
+                </a:solidFill>
+                <a:latin typeface="Trebuchet MS" pitchFamily="34" charset="0"/>
+                <a:ea typeface="Trebuchet MS" pitchFamily="34" charset="-122"/>
+                <a:cs typeface="Trebuchet MS" pitchFamily="34" charset="-120"/>
+              </a:rPr>
+              <a:t>i</a:t>
+            </a:r>
+            <a:endParaRPr lang="en-US" sz="900" dirty="0"/>
+          </a:p>
+        </p:txBody>
+      </p:sp>
+      <p:sp>
+        <p:nvSpPr>
+          <p:cNvPr id="51" name="Shape 49"/>
+          <p:cNvSpPr/>
+          <p:nvPr/>
+        </p:nvSpPr>
+        <p:spPr>
+          <a:xfrm>
+            <a:off x="7677912" y="4169664"/>
+            <a:ext cx="685800" cy="384048"/>
+          </a:xfrm>
+          <a:prstGeom prst="rect">
+            <a:avLst>
+              <a:gd name="adj" fmla="val 9524"/>
+            </a:avLst>
+          </a:prstGeom>
+          <a:solidFill>
+            <a:srgbClr val="FFFFFF"/>
+          </a:solidFill>
+          <a:ln w="12700">
+            <a:solidFill>
+              <a:srgbClr val="DB2777"/>
+            </a:solidFill>
+            <a:prstDash val="solid"/>
+          </a:ln>
+        </p:spPr>
+      </p:sp>
+      <p:sp>
+        <p:nvSpPr>
+          <p:cNvPr id="52" name="Text 50"/>
+          <p:cNvSpPr/>
+          <p:nvPr/>
+        </p:nvSpPr>
+        <p:spPr>
+          <a:xfrm>
+            <a:off x="7677912" y="4169664"/>
+            <a:ext cx="685800" cy="384048"/>
+          </a:xfrm>
+          <a:prstGeom prst="rect">
+            <a:avLst/>
+          </a:prstGeom>
+          <a:noFill/>
+          <a:ln/>
+        </p:spPr>
+        <p:txBody>
+          <a:bodyPr wrap="square" lIns="0" tIns="0" rIns="0" bIns="0" rtlCol="0" anchor="ctr"/>
+          <a:lstStyle/>
+          <a:p>
+            <a:pPr algn="ctr" indent="0" marL="0">
+              <a:buNone/>
+            </a:pPr>
+            <a:r>
+              <a:rPr lang="en-US" sz="900" b="1" dirty="0">
+                <a:solidFill>
+                  <a:srgbClr val="9D174D"/>
+                </a:solidFill>
+                <a:latin typeface="Trebuchet MS" pitchFamily="34" charset="0"/>
+                <a:ea typeface="Trebuchet MS" pitchFamily="34" charset="-122"/>
+                <a:cs typeface="Trebuchet MS" pitchFamily="34" charset="-120"/>
+              </a:rPr>
+              <a:t>c</a:t>
+            </a:r>
+            <a:endParaRPr lang="en-US" sz="900" dirty="0"/>
+          </a:p>
+        </p:txBody>
+      </p:sp>
+      <p:sp>
+        <p:nvSpPr>
+          <p:cNvPr id="53" name="Text 51"/>
+          <p:cNvSpPr/>
+          <p:nvPr/>
+        </p:nvSpPr>
+        <p:spPr>
+          <a:xfrm>
+            <a:off x="7677912" y="4572000"/>
             <a:ext cx="685800" cy="219456"/>
           </a:xfrm>
           <a:prstGeom prst="rect">
@@ -32798,7 +32708,7 @@
                 <a:ea typeface="Calibri" pitchFamily="34" charset="-122"/>
                 <a:cs typeface="Calibri" pitchFamily="34" charset="-120"/>
               </a:rPr>
-              <a:t>/ik/</a:t>
+              <a:t>/k/</a:t>
             </a:r>
             <a:endParaRPr lang="en-US" sz="750" dirty="0"/>
           </a:p>
@@ -34560,7 +34470,7 @@
                 <a:ea typeface="Trebuchet MS" pitchFamily="34" charset="-122"/>
                 <a:cs typeface="Trebuchet MS" pitchFamily="34" charset="-120"/>
               </a:rPr>
-              <a:t>mag-</a:t>
+              <a:t>un-</a:t>
             </a:r>
             <a:endParaRPr lang="en-US" sz="1300" dirty="0"/>
           </a:p>
@@ -34624,7 +34534,7 @@
                 <a:ea typeface="Trebuchet MS" pitchFamily="34" charset="-122"/>
                 <a:cs typeface="Trebuchet MS" pitchFamily="34" charset="-120"/>
               </a:rPr>
-              <a:t>hero</a:t>
+              <a:t>magnet</a:t>
             </a:r>
             <a:endParaRPr lang="en-US" sz="1300" dirty="0"/>
           </a:p>
@@ -34752,7 +34662,7 @@
                 <a:ea typeface="Trebuchet MS" pitchFamily="34" charset="-122"/>
                 <a:cs typeface="Trebuchet MS" pitchFamily="34" charset="-120"/>
               </a:rPr>
-              <a:t>atom-</a:t>
+              <a:t>non-</a:t>
             </a:r>
             <a:endParaRPr lang="en-US" sz="1300" dirty="0"/>
           </a:p>
@@ -34816,7 +34726,7 @@
                 <a:ea typeface="Trebuchet MS" pitchFamily="34" charset="-122"/>
                 <a:cs typeface="Trebuchet MS" pitchFamily="34" charset="-120"/>
               </a:rPr>
-              <a:t>magnet</a:t>
+              <a:t>atom</a:t>
             </a:r>
             <a:endParaRPr lang="en-US" sz="1300" dirty="0"/>
           </a:p>
@@ -34905,7 +34815,7 @@
                 <a:ea typeface="Trebuchet MS" pitchFamily="34" charset="-122"/>
                 <a:cs typeface="Trebuchet MS" pitchFamily="34" charset="-120"/>
               </a:rPr>
-              <a:t>electr-</a:t>
+              <a:t>pre-</a:t>
             </a:r>
             <a:endParaRPr lang="en-US" sz="1300" dirty="0"/>
           </a:p>
@@ -34969,7 +34879,7 @@
                 <a:ea typeface="Trebuchet MS" pitchFamily="34" charset="-122"/>
                 <a:cs typeface="Trebuchet MS" pitchFamily="34" charset="-120"/>
               </a:rPr>
-              <a:t>ocean</a:t>
+              <a:t>hero</a:t>
             </a:r>
             <a:endParaRPr lang="en-US" sz="1300" dirty="0"/>
           </a:p>
@@ -35058,7 +34968,7 @@
                 <a:ea typeface="Trebuchet MS" pitchFamily="34" charset="-122"/>
                 <a:cs typeface="Trebuchet MS" pitchFamily="34" charset="-120"/>
               </a:rPr>
-              <a:t>graph-</a:t>
+              <a:t>sub-</a:t>
             </a:r>
             <a:endParaRPr lang="en-US" sz="1300" dirty="0"/>
           </a:p>
@@ -35122,7 +35032,7 @@
                 <a:ea typeface="Trebuchet MS" pitchFamily="34" charset="-122"/>
                 <a:cs typeface="Trebuchet MS" pitchFamily="34" charset="-120"/>
               </a:rPr>
-              <a:t>poet</a:t>
+              <a:t>artist</a:t>
             </a:r>
             <a:endParaRPr lang="en-US" sz="1300" dirty="0"/>
           </a:p>
@@ -35211,7 +35121,7 @@
                 <a:ea typeface="Trebuchet MS" pitchFamily="34" charset="-122"/>
                 <a:cs typeface="Trebuchet MS" pitchFamily="34" charset="-120"/>
               </a:rPr>
-              <a:t>phot-</a:t>
+              <a:t>super-</a:t>
             </a:r>
             <a:endParaRPr lang="en-US" sz="1300" dirty="0"/>
           </a:p>
@@ -35275,7 +35185,7 @@
                 <a:ea typeface="Trebuchet MS" pitchFamily="34" charset="-122"/>
                 <a:cs typeface="Trebuchet MS" pitchFamily="34" charset="-120"/>
               </a:rPr>
-              <a:t>volcano</a:t>
+              <a:t>rhythm</a:t>
             </a:r>
             <a:endParaRPr lang="en-US" sz="1300" dirty="0"/>
           </a:p>
@@ -35405,7 +35315,7 @@
                 <a:ea typeface="Trebuchet MS" pitchFamily="34" charset="-122"/>
                 <a:cs typeface="Trebuchet MS" pitchFamily="34" charset="-120"/>
               </a:rPr>
-              <a:t>comic</a:t>
+              <a:t>electric</a:t>
             </a:r>
             <a:endParaRPr lang="en-US" sz="1200" dirty="0"/>
           </a:p>
@@ -35471,7 +35381,7 @@
                 <a:ea typeface="Trebuchet MS" pitchFamily="34" charset="-122"/>
                 <a:cs typeface="Trebuchet MS" pitchFamily="34" charset="-120"/>
               </a:rPr>
-              <a:t>magic</a:t>
+              <a:t>heroic</a:t>
             </a:r>
             <a:endParaRPr lang="en-US" sz="1200" dirty="0"/>
           </a:p>
@@ -35537,7 +35447,7 @@
                 <a:ea typeface="Trebuchet MS" pitchFamily="34" charset="-122"/>
                 <a:cs typeface="Trebuchet MS" pitchFamily="34" charset="-120"/>
               </a:rPr>
-              <a:t>atomic</a:t>
+              <a:t>volcanic</a:t>
             </a:r>
             <a:endParaRPr lang="en-US" sz="1200" dirty="0"/>
           </a:p>
@@ -35603,7 +35513,7 @@
                 <a:ea typeface="Trebuchet MS" pitchFamily="34" charset="-122"/>
                 <a:cs typeface="Trebuchet MS" pitchFamily="34" charset="-120"/>
               </a:rPr>
-              <a:t>heroic</a:t>
+              <a:t>magnetic</a:t>
             </a:r>
             <a:endParaRPr lang="en-US" sz="1200" dirty="0"/>
           </a:p>
@@ -35669,7 +35579,7 @@
                 <a:ea typeface="Trebuchet MS" pitchFamily="34" charset="-122"/>
                 <a:cs typeface="Trebuchet MS" pitchFamily="34" charset="-120"/>
               </a:rPr>
-              <a:t>volcanic</a:t>
+              <a:t>cosmic</a:t>
             </a:r>
             <a:endParaRPr lang="en-US" sz="1200" dirty="0"/>
           </a:p>
@@ -35735,7 +35645,7 @@
                 <a:ea typeface="Trebuchet MS" pitchFamily="34" charset="-122"/>
                 <a:cs typeface="Trebuchet MS" pitchFamily="34" charset="-120"/>
               </a:rPr>
-              <a:t>electric</a:t>
+              <a:t>athletic</a:t>
             </a:r>
             <a:endParaRPr lang="en-US" sz="1200" dirty="0"/>
           </a:p>
@@ -35801,7 +35711,7 @@
                 <a:ea typeface="Trebuchet MS" pitchFamily="34" charset="-122"/>
                 <a:cs typeface="Trebuchet MS" pitchFamily="34" charset="-120"/>
               </a:rPr>
-              <a:t>oceanic</a:t>
+              <a:t>artistic</a:t>
             </a:r>
             <a:endParaRPr lang="en-US" sz="1200" dirty="0"/>
           </a:p>
@@ -35867,7 +35777,7 @@
                 <a:ea typeface="Trebuchet MS" pitchFamily="34" charset="-122"/>
                 <a:cs typeface="Trebuchet MS" pitchFamily="34" charset="-120"/>
               </a:rPr>
-              <a:t>poetic</a:t>
+              <a:t>rhythmic</a:t>
             </a:r>
             <a:endParaRPr lang="en-US" sz="1200" dirty="0"/>
           </a:p>
@@ -36487,7 +36397,7 @@
                 <a:ea typeface="Calibri" pitchFamily="34" charset="-122"/>
                 <a:cs typeface="Calibri" pitchFamily="34" charset="-120"/>
               </a:rPr>
-              <a:t>The core part of a word carrying its basic meaning. In 'comic', the root is the part before the suffix '-ic'.</a:t>
+              <a:t>The core part of a word carrying its basic meaning. In 'electric', the root is the part before the suffix '-ic'.</a:t>
             </a:r>
             <a:endParaRPr lang="en-US" sz="1350" dirty="0"/>
           </a:p>
@@ -36651,7 +36561,7 @@
                 <a:ea typeface="Calibri" pitchFamily="34" charset="-122"/>
                 <a:cs typeface="Calibri" pitchFamily="34" charset="-120"/>
               </a:rPr>
-              <a:t>A meaningful word part added to the beginning of a root to change its meaning. E.g. 'un-' in 'magic' means 'not'.</a:t>
+              <a:t>A meaningful word part added to the beginning of a root to change its meaning. E.g. 'un-' in 'heroic' means 'not'.</a:t>
             </a:r>
             <a:endParaRPr lang="en-US" sz="1350" dirty="0"/>
           </a:p>
@@ -37055,7 +36965,7 @@
                 <a:ea typeface="Calibri" pitchFamily="34" charset="-122"/>
                 <a:cs typeface="Calibri" pitchFamily="34" charset="-120"/>
               </a:rPr>
-              <a:t>1.  The suffix '-ic' comes from Greek and means 'relating to' something.</a:t>
+              <a:t>1.  The suffix '-ic' means relating to or having the nature of something.</a:t>
             </a:r>
             <a:endParaRPr lang="en-US" sz="1300" dirty="0"/>
           </a:p>
@@ -37194,7 +37104,7 @@
                 <a:ea typeface="Calibri" pitchFamily="34" charset="-122"/>
                 <a:cs typeface="Calibri" pitchFamily="34" charset="-120"/>
               </a:rPr>
-              <a:t>2.  Adding '-ic' to a word turns it into a noun.</a:t>
+              <a:t>2.  The suffix '-ic' always comes from Old English.</a:t>
             </a:r>
             <a:endParaRPr lang="en-US" sz="1300" dirty="0"/>
           </a:p>
@@ -37333,7 +37243,7 @@
                 <a:ea typeface="Calibri" pitchFamily="34" charset="-122"/>
                 <a:cs typeface="Calibri" pitchFamily="34" charset="-120"/>
               </a:rPr>
-              <a:t>3.  The word 'volcanic' contains the suffix '-ic'.</a:t>
+              <a:t>3.  The suffix '-ic' can turn a noun into an adjective (describing word).</a:t>
             </a:r>
             <a:endParaRPr lang="en-US" sz="1300" dirty="0"/>
           </a:p>
@@ -37472,7 +37382,7 @@
                 <a:ea typeface="Calibri" pitchFamily="34" charset="-122"/>
                 <a:cs typeface="Calibri" pitchFamily="34" charset="-120"/>
               </a:rPr>
-              <a:t>4.  Words ending in '-ic' are usually adjectives that describe something.</a:t>
+              <a:t>4.  The word 'heroic' contains the suffix '-ic'.</a:t>
             </a:r>
             <a:endParaRPr lang="en-US" sz="1300" dirty="0"/>
           </a:p>
@@ -37611,7 +37521,7 @@
                 <a:ea typeface="Calibri" pitchFamily="34" charset="-122"/>
                 <a:cs typeface="Calibri" pitchFamily="34" charset="-120"/>
               </a:rPr>
-              <a:t>5.  The suffix '-ic' always changes the meaning of a word to mean 'without' something.</a:t>
+              <a:t>5.  Adding '-ic' to a word always makes it a verb (action word).</a:t>
             </a:r>
             <a:endParaRPr lang="en-US" sz="1300" dirty="0"/>
           </a:p>
@@ -38250,7 +38160,7 @@
                 <a:ea typeface="Trebuchet MS" pitchFamily="34" charset="-122"/>
                 <a:cs typeface="Trebuchet MS" pitchFamily="34" charset="-120"/>
               </a:rPr>
-              <a:t>comic</a:t>
+              <a:t>electric</a:t>
             </a:r>
             <a:endParaRPr lang="en-US" sz="1300" dirty="0"/>
           </a:p>
@@ -38316,7 +38226,7 @@
                 <a:ea typeface="Trebuchet MS" pitchFamily="34" charset="-122"/>
                 <a:cs typeface="Trebuchet MS" pitchFamily="34" charset="-120"/>
               </a:rPr>
-              <a:t>magic</a:t>
+              <a:t>heroic</a:t>
             </a:r>
             <a:endParaRPr lang="en-US" sz="1300" dirty="0"/>
           </a:p>
@@ -38382,7 +38292,7 @@
                 <a:ea typeface="Trebuchet MS" pitchFamily="34" charset="-122"/>
                 <a:cs typeface="Trebuchet MS" pitchFamily="34" charset="-120"/>
               </a:rPr>
-              <a:t>atomic</a:t>
+              <a:t>volcanic</a:t>
             </a:r>
             <a:endParaRPr lang="en-US" sz="1300" dirty="0"/>
           </a:p>
@@ -38448,7 +38358,7 @@
                 <a:ea typeface="Trebuchet MS" pitchFamily="34" charset="-122"/>
                 <a:cs typeface="Trebuchet MS" pitchFamily="34" charset="-120"/>
               </a:rPr>
-              <a:t>heroic</a:t>
+              <a:t>magnetic</a:t>
             </a:r>
             <a:endParaRPr lang="en-US" sz="1300" dirty="0"/>
           </a:p>
@@ -38514,7 +38424,7 @@
                 <a:ea typeface="Trebuchet MS" pitchFamily="34" charset="-122"/>
                 <a:cs typeface="Trebuchet MS" pitchFamily="34" charset="-120"/>
               </a:rPr>
-              <a:t>volcanic</a:t>
+              <a:t>cosmic</a:t>
             </a:r>
             <a:endParaRPr lang="en-US" sz="1300" dirty="0"/>
           </a:p>
@@ -38580,7 +38490,7 @@
                 <a:ea typeface="Trebuchet MS" pitchFamily="34" charset="-122"/>
                 <a:cs typeface="Trebuchet MS" pitchFamily="34" charset="-120"/>
               </a:rPr>
-              <a:t>electric</a:t>
+              <a:t>athletic</a:t>
             </a:r>
             <a:endParaRPr lang="en-US" sz="1300" dirty="0"/>
           </a:p>
@@ -38646,7 +38556,7 @@
                 <a:ea typeface="Trebuchet MS" pitchFamily="34" charset="-122"/>
                 <a:cs typeface="Trebuchet MS" pitchFamily="34" charset="-120"/>
               </a:rPr>
-              <a:t>oceanic</a:t>
+              <a:t>artistic</a:t>
             </a:r>
             <a:endParaRPr lang="en-US" sz="1300" dirty="0"/>
           </a:p>
@@ -39239,7 +39149,7 @@
                 <a:ea typeface="Trebuchet MS" pitchFamily="34" charset="-122"/>
                 <a:cs typeface="Trebuchet MS" pitchFamily="34" charset="-120"/>
               </a:rPr>
-              <a:t>mag-</a:t>
+              <a:t>un-</a:t>
             </a:r>
             <a:endParaRPr lang="en-US" sz="1300" dirty="0"/>
           </a:p>
@@ -39303,7 +39213,7 @@
                 <a:ea typeface="Trebuchet MS" pitchFamily="34" charset="-122"/>
                 <a:cs typeface="Trebuchet MS" pitchFamily="34" charset="-120"/>
               </a:rPr>
-              <a:t>hero</a:t>
+              <a:t>magnet</a:t>
             </a:r>
             <a:endParaRPr lang="en-US" sz="1300" dirty="0"/>
           </a:p>
@@ -39431,7 +39341,7 @@
                 <a:ea typeface="Trebuchet MS" pitchFamily="34" charset="-122"/>
                 <a:cs typeface="Trebuchet MS" pitchFamily="34" charset="-120"/>
               </a:rPr>
-              <a:t>atom-</a:t>
+              <a:t>non-</a:t>
             </a:r>
             <a:endParaRPr lang="en-US" sz="1300" dirty="0"/>
           </a:p>
@@ -39495,7 +39405,7 @@
                 <a:ea typeface="Trebuchet MS" pitchFamily="34" charset="-122"/>
                 <a:cs typeface="Trebuchet MS" pitchFamily="34" charset="-120"/>
               </a:rPr>
-              <a:t>magnet</a:t>
+              <a:t>atom</a:t>
             </a:r>
             <a:endParaRPr lang="en-US" sz="1300" dirty="0"/>
           </a:p>
@@ -39584,7 +39494,7 @@
                 <a:ea typeface="Trebuchet MS" pitchFamily="34" charset="-122"/>
                 <a:cs typeface="Trebuchet MS" pitchFamily="34" charset="-120"/>
               </a:rPr>
-              <a:t>electr-</a:t>
+              <a:t>pre-</a:t>
             </a:r>
             <a:endParaRPr lang="en-US" sz="1300" dirty="0"/>
           </a:p>
@@ -39648,7 +39558,7 @@
                 <a:ea typeface="Trebuchet MS" pitchFamily="34" charset="-122"/>
                 <a:cs typeface="Trebuchet MS" pitchFamily="34" charset="-120"/>
               </a:rPr>
-              <a:t>ocean</a:t>
+              <a:t>hero</a:t>
             </a:r>
             <a:endParaRPr lang="en-US" sz="1300" dirty="0"/>
           </a:p>
@@ -39737,7 +39647,7 @@
                 <a:ea typeface="Trebuchet MS" pitchFamily="34" charset="-122"/>
                 <a:cs typeface="Trebuchet MS" pitchFamily="34" charset="-120"/>
               </a:rPr>
-              <a:t>graph-</a:t>
+              <a:t>sub-</a:t>
             </a:r>
             <a:endParaRPr lang="en-US" sz="1300" dirty="0"/>
           </a:p>
@@ -39801,7 +39711,7 @@
                 <a:ea typeface="Trebuchet MS" pitchFamily="34" charset="-122"/>
                 <a:cs typeface="Trebuchet MS" pitchFamily="34" charset="-120"/>
               </a:rPr>
-              <a:t>poet</a:t>
+              <a:t>artist</a:t>
             </a:r>
             <a:endParaRPr lang="en-US" sz="1300" dirty="0"/>
           </a:p>
@@ -39890,7 +39800,7 @@
                 <a:ea typeface="Trebuchet MS" pitchFamily="34" charset="-122"/>
                 <a:cs typeface="Trebuchet MS" pitchFamily="34" charset="-120"/>
               </a:rPr>
-              <a:t>phot-</a:t>
+              <a:t>super-</a:t>
             </a:r>
             <a:endParaRPr lang="en-US" sz="1300" dirty="0"/>
           </a:p>
@@ -39954,7 +39864,7 @@
                 <a:ea typeface="Trebuchet MS" pitchFamily="34" charset="-122"/>
                 <a:cs typeface="Trebuchet MS" pitchFamily="34" charset="-120"/>
               </a:rPr>
-              <a:t>volcano</a:t>
+              <a:t>rhythm</a:t>
             </a:r>
             <a:endParaRPr lang="en-US" sz="1300" dirty="0"/>
           </a:p>
@@ -40033,7 +39943,7 @@
         <p:spPr>
           <a:xfrm>
             <a:off x="1508760" y="4178808"/>
-            <a:ext cx="950976" cy="420624"/>
+            <a:ext cx="822960" cy="420624"/>
           </a:xfrm>
           <a:prstGeom prst="rect">
             <a:avLst>
@@ -40067,7 +39977,7 @@
         <p:spPr>
           <a:xfrm>
             <a:off x="1508760" y="4178808"/>
-            <a:ext cx="950976" cy="420624"/>
+            <a:ext cx="822960" cy="420624"/>
           </a:xfrm>
           <a:prstGeom prst="rect">
             <a:avLst/>
@@ -40091,7 +40001,7 @@
                 <a:ea typeface="Trebuchet MS" pitchFamily="34" charset="-122"/>
                 <a:cs typeface="Trebuchet MS" pitchFamily="34" charset="-120"/>
               </a:rPr>
-              <a:t>mag-</a:t>
+              <a:t>un-</a:t>
             </a:r>
             <a:endParaRPr lang="en-US" sz="1300" dirty="0"/>
           </a:p>
@@ -40105,7 +40015,7 @@
         </p:nvSpPr>
         <p:spPr>
           <a:xfrm>
-            <a:off x="2487168" y="4178808"/>
+            <a:off x="2359152" y="4178808"/>
             <a:ext cx="320040" cy="420624"/>
           </a:xfrm>
           <a:prstGeom prst="rect">
@@ -40144,8 +40054,8 @@
         </p:nvSpPr>
         <p:spPr>
           <a:xfrm>
-            <a:off x="2834640" y="4178808"/>
-            <a:ext cx="950976" cy="420624"/>
+            <a:off x="2706624" y="4178808"/>
+            <a:ext cx="1243584" cy="420624"/>
           </a:xfrm>
           <a:prstGeom prst="rect">
             <a:avLst>
@@ -40178,8 +40088,8 @@
         </p:nvSpPr>
         <p:spPr>
           <a:xfrm>
-            <a:off x="2834640" y="4178808"/>
-            <a:ext cx="950976" cy="420624"/>
+            <a:off x="2706624" y="4178808"/>
+            <a:ext cx="1243584" cy="420624"/>
           </a:xfrm>
           <a:prstGeom prst="rect">
             <a:avLst/>
@@ -40203,7 +40113,7 @@
                 <a:ea typeface="Trebuchet MS" pitchFamily="34" charset="-122"/>
                 <a:cs typeface="Trebuchet MS" pitchFamily="34" charset="-120"/>
               </a:rPr>
-              <a:t>hero</a:t>
+              <a:t>magnet</a:t>
             </a:r>
             <a:endParaRPr lang="en-US" sz="1300" dirty="0"/>
           </a:p>
@@ -40217,7 +40127,7 @@
         </p:nvSpPr>
         <p:spPr>
           <a:xfrm>
-            <a:off x="3813048" y="4178808"/>
+            <a:off x="3977640" y="4178808"/>
             <a:ext cx="320040" cy="420624"/>
           </a:xfrm>
           <a:prstGeom prst="rect">
@@ -40256,7 +40166,7 @@
         </p:nvSpPr>
         <p:spPr>
           <a:xfrm>
-            <a:off x="4160520" y="4178808"/>
+            <a:off x="4325112" y="4178808"/>
             <a:ext cx="822960" cy="420624"/>
           </a:xfrm>
           <a:prstGeom prst="rect">
@@ -40290,7 +40200,7 @@
         </p:nvSpPr>
         <p:spPr>
           <a:xfrm>
-            <a:off x="4160520" y="4178808"/>
+            <a:off x="4325112" y="4178808"/>
             <a:ext cx="822960" cy="420624"/>
           </a:xfrm>
           <a:prstGeom prst="rect">
@@ -40329,7 +40239,7 @@
         </p:nvSpPr>
         <p:spPr>
           <a:xfrm>
-            <a:off x="5056632" y="4178808"/>
+            <a:off x="5221224" y="4178808"/>
             <a:ext cx="365760" cy="420624"/>
           </a:xfrm>
           <a:prstGeom prst="rect">
@@ -40368,7 +40278,7 @@
         </p:nvSpPr>
         <p:spPr>
           <a:xfrm>
-            <a:off x="5468112" y="4178808"/>
+            <a:off x="5632704" y="4178808"/>
             <a:ext cx="2194560" cy="420624"/>
           </a:xfrm>
           <a:prstGeom prst="rect">
@@ -40395,7 +40305,7 @@
         </p:nvSpPr>
         <p:spPr>
           <a:xfrm>
-            <a:off x="5468112" y="4178808"/>
+            <a:off x="5632704" y="4178808"/>
             <a:ext cx="2194560" cy="420624"/>
           </a:xfrm>
           <a:prstGeom prst="rect">
@@ -40420,7 +40330,7 @@
                 <a:ea typeface="Trebuchet MS" pitchFamily="34" charset="-122"/>
                 <a:cs typeface="Trebuchet MS" pitchFamily="34" charset="-120"/>
               </a:rPr>
-              <a:t>comic</a:t>
+              <a:t>electric</a:t>
             </a:r>
             <a:endParaRPr lang="en-US" sz="1400" dirty="0"/>
           </a:p>
@@ -40824,7 +40734,7 @@
                 <a:ea typeface="Trebuchet MS" pitchFamily="34" charset="-122"/>
                 <a:cs typeface="Trebuchet MS" pitchFamily="34" charset="-120"/>
               </a:rPr>
-              <a:t>comic</a:t>
+              <a:t>electric</a:t>
             </a:r>
             <a:endParaRPr lang="en-US" sz="1200" dirty="0"/>
           </a:p>
@@ -40890,7 +40800,7 @@
                 <a:ea typeface="Calibri" pitchFamily="34" charset="-122"/>
                 <a:cs typeface="Calibri" pitchFamily="34" charset="-120"/>
               </a:rPr>
-              <a:t>Relating to the ocean or the deep water that covers most of Earth.</a:t>
+              <a:t>Related to art or showing skill in making art.</a:t>
             </a:r>
             <a:endParaRPr lang="en-US" sz="1200" dirty="0"/>
           </a:p>
@@ -40963,7 +40873,7 @@
                 <a:ea typeface="Trebuchet MS" pitchFamily="34" charset="-122"/>
                 <a:cs typeface="Trebuchet MS" pitchFamily="34" charset="-120"/>
               </a:rPr>
-              <a:t>magic</a:t>
+              <a:t>heroic</a:t>
             </a:r>
             <a:endParaRPr lang="en-US" sz="1200" dirty="0"/>
           </a:p>
@@ -41029,7 +40939,7 @@
                 <a:ea typeface="Calibri" pitchFamily="34" charset="-122"/>
                 <a:cs typeface="Calibri" pitchFamily="34" charset="-120"/>
               </a:rPr>
-              <a:t>Something funny or relating to humour, like a comic book or a comic performance.</a:t>
+              <a:t>To do with electricity or electrical power.</a:t>
             </a:r>
             <a:endParaRPr lang="en-US" sz="1200" dirty="0"/>
           </a:p>
@@ -41102,7 +41012,7 @@
                 <a:ea typeface="Trebuchet MS" pitchFamily="34" charset="-122"/>
                 <a:cs typeface="Trebuchet MS" pitchFamily="34" charset="-120"/>
               </a:rPr>
-              <a:t>atomic</a:t>
+              <a:t>volcanic</a:t>
             </a:r>
             <a:endParaRPr lang="en-US" sz="1200" dirty="0"/>
           </a:p>
@@ -41168,7 +41078,7 @@
                 <a:ea typeface="Calibri" pitchFamily="34" charset="-122"/>
                 <a:cs typeface="Calibri" pitchFamily="34" charset="-120"/>
               </a:rPr>
-              <a:t>Acting in a very brave or courageous way, like a hero would.</a:t>
+              <a:t>Having the power to attract metal, like a magnet.</a:t>
             </a:r>
             <a:endParaRPr lang="en-US" sz="1200" dirty="0"/>
           </a:p>
@@ -41241,7 +41151,7 @@
                 <a:ea typeface="Trebuchet MS" pitchFamily="34" charset="-122"/>
                 <a:cs typeface="Trebuchet MS" pitchFamily="34" charset="-120"/>
               </a:rPr>
-              <a:t>heroic</a:t>
+              <a:t>magnetic</a:t>
             </a:r>
             <a:endParaRPr lang="en-US" sz="1200" dirty="0"/>
           </a:p>
@@ -41307,7 +41217,7 @@
                 <a:ea typeface="Calibri" pitchFamily="34" charset="-122"/>
                 <a:cs typeface="Calibri" pitchFamily="34" charset="-120"/>
               </a:rPr>
-              <a:t>Relating to a volcano or the hot, melted rock that erupts from one.</a:t>
+              <a:t>Relating to outer space or the universe.</a:t>
             </a:r>
             <a:endParaRPr lang="en-US" sz="1200" dirty="0"/>
           </a:p>
@@ -41380,7 +41290,7 @@
                 <a:ea typeface="Trebuchet MS" pitchFamily="34" charset="-122"/>
                 <a:cs typeface="Trebuchet MS" pitchFamily="34" charset="-120"/>
               </a:rPr>
-              <a:t>volcanic</a:t>
+              <a:t>cosmic</a:t>
             </a:r>
             <a:endParaRPr lang="en-US" sz="1200" dirty="0"/>
           </a:p>
@@ -41446,7 +41356,7 @@
                 <a:ea typeface="Calibri" pitchFamily="34" charset="-122"/>
                 <a:cs typeface="Calibri" pitchFamily="34" charset="-120"/>
               </a:rPr>
-              <a:t>Relating to electricity, the energy that powers lights, computers and appliances.</a:t>
+              <a:t>Good at sport and physical activities; strong and fit.</a:t>
             </a:r>
             <a:endParaRPr lang="en-US" sz="1200" dirty="0"/>
           </a:p>
@@ -41519,7 +41429,7 @@
                 <a:ea typeface="Trebuchet MS" pitchFamily="34" charset="-122"/>
                 <a:cs typeface="Trebuchet MS" pitchFamily="34" charset="-120"/>
               </a:rPr>
-              <a:t>electric</a:t>
+              <a:t>athletic</a:t>
             </a:r>
             <a:endParaRPr lang="en-US" sz="1200" dirty="0"/>
           </a:p>
@@ -41585,7 +41495,7 @@
                 <a:ea typeface="Calibri" pitchFamily="34" charset="-122"/>
                 <a:cs typeface="Calibri" pitchFamily="34" charset="-120"/>
               </a:rPr>
-              <a:t>Relating to atoms, which are the tiny particles that make up everything around us.</a:t>
+              <a:t>Related to volcanoes or caused by a volcano.</a:t>
             </a:r>
             <a:endParaRPr lang="en-US" sz="1200" dirty="0"/>
           </a:p>
@@ -41658,7 +41568,7 @@
                 <a:ea typeface="Trebuchet MS" pitchFamily="34" charset="-122"/>
                 <a:cs typeface="Trebuchet MS" pitchFamily="34" charset="-120"/>
               </a:rPr>
-              <a:t>oceanic</a:t>
+              <a:t>artistic</a:t>
             </a:r>
             <a:endParaRPr lang="en-US" sz="1200" dirty="0"/>
           </a:p>
@@ -41724,7 +41634,7 @@
                 <a:ea typeface="Calibri" pitchFamily="34" charset="-122"/>
                 <a:cs typeface="Calibri" pitchFamily="34" charset="-120"/>
               </a:rPr>
-              <a:t>Relating to mysterious powers or tricks that seem impossible to explain.</a:t>
+              <a:t>Showing great bravery, like a hero.</a:t>
             </a:r>
             <a:endParaRPr lang="en-US" sz="1200" dirty="0"/>
           </a:p>
@@ -42219,7 +42129,7 @@
                 <a:ea typeface="Calibri" pitchFamily="34" charset="-122"/>
                 <a:cs typeface="Calibri" pitchFamily="34" charset="-120"/>
               </a:rPr>
-              <a:t>The scientist made an atomic discovery that changed the way we understand matter.</a:t>
+              <a:t>The scientist explained that the electric eel can produce a powerful shock.</a:t>
             </a:r>
             <a:endParaRPr lang="en-US" sz="1500" dirty="0"/>
           </a:p>
@@ -42383,7 +42293,7 @@
                 <a:ea typeface="Calibri" pitchFamily="34" charset="-122"/>
                 <a:cs typeface="Calibri" pitchFamily="34" charset="-120"/>
               </a:rPr>
-              <a:t>The heroic firefighter rescued the family from the burning building.</a:t>
+              <a:t>Our class had an athletic carnival where everyone ran their fastest.</a:t>
             </a:r>
             <a:endParaRPr lang="en-US" sz="1500" dirty="0"/>
           </a:p>
@@ -42547,7 +42457,7 @@
                 <a:ea typeface="Calibri" pitchFamily="34" charset="-122"/>
                 <a:cs typeface="Calibri" pitchFamily="34" charset="-120"/>
               </a:rPr>
-              <a:t>We watched a comic performance at the school assembly that made everyone laugh.</a:t>
+              <a:t>The volcanic island was formed millions of years ago deep under the sea.</a:t>
             </a:r>
             <a:endParaRPr lang="en-US" sz="1500" dirty="0"/>
           </a:p>
